--- a/Inglês/Março 26/Aula 16/websites.pptx
+++ b/Inglês/Março 26/Aula 16/websites.pptx
@@ -1,29 +1,36 @@
 
 <file path=ppt/presentation.xml><?xml version="1.0" encoding="utf-8"?>
-<p:presentation xmlns:a="http://schemas.openxmlformats.org/drawingml/2006/main" xmlns:r="http://schemas.openxmlformats.org/officeDocument/2006/relationships" xmlns:p="http://schemas.openxmlformats.org/presentationml/2006/main" saveSubsetFonts="1" embedTrueTypeFonts="true">
+<p:presentation xmlns:a="http://schemas.openxmlformats.org/drawingml/2006/main" xmlns:r="http://schemas.openxmlformats.org/officeDocument/2006/relationships" xmlns:p="http://schemas.openxmlformats.org/presentationml/2006/main" embedTrueTypeFonts="1" saveSubsetFonts="1">
   <p:sldMasterIdLst>
     <p:sldMasterId id="2147483648" r:id="rId1"/>
   </p:sldMasterIdLst>
   <p:sldIdLst>
-    <p:sldId id="256" r:id="rId6"/>
-    <p:sldId id="257" r:id="rId7"/>
-    <p:sldId id="258" r:id="rId8"/>
-    <p:sldId id="259" r:id="rId9"/>
-    <p:sldId id="260" r:id="rId10"/>
+    <p:sldId id="256" r:id="rId2"/>
+    <p:sldId id="257" r:id="rId3"/>
+    <p:sldId id="258" r:id="rId4"/>
+    <p:sldId id="260" r:id="rId5"/>
+    <p:sldId id="261" r:id="rId6"/>
   </p:sldIdLst>
   <p:sldSz cx="18288000" cy="10287000"/>
   <p:notesSz cx="6858000" cy="9144000"/>
   <p:embeddedFontLst>
     <p:embeddedFont>
-      <p:font typeface="Open Sauce Bold" charset="1" panose="00000800000000000000"/>
+      <p:font typeface="Calibri" panose="020F0502020204030204" pitchFamily="34" charset="0"/>
+      <p:regular r:id="rId7"/>
+      <p:bold r:id="rId8"/>
+      <p:italic r:id="rId9"/>
+      <p:boldItalic r:id="rId10"/>
+    </p:embeddedFont>
+    <p:embeddedFont>
+      <p:font typeface="Open Sauce" panose="020B0604020202020204" charset="0"/>
       <p:regular r:id="rId11"/>
     </p:embeddedFont>
     <p:embeddedFont>
-      <p:font typeface="Open Sauce Italics" charset="1" panose="00000500000000000000"/>
+      <p:font typeface="Open Sauce Bold" panose="020B0604020202020204" charset="0"/>
       <p:regular r:id="rId12"/>
     </p:embeddedFont>
     <p:embeddedFont>
-      <p:font typeface="Open Sauce" charset="1" panose="00000500000000000000"/>
+      <p:font typeface="Open Sauce Italics" panose="020B0604020202020204" charset="0"/>
       <p:regular r:id="rId13"/>
     </p:embeddedFont>
   </p:embeddedFontLst>
@@ -122,6 +129,22 @@
       </a:defRPr>
     </a:lvl9pPr>
   </p:defaultTextStyle>
+  <p:extLst>
+    <p:ext uri="{EFAFB233-063F-42B5-8137-9DF3F51BA10A}">
+      <p15:sldGuideLst xmlns:p15="http://schemas.microsoft.com/office/powerpoint/2012/main">
+        <p15:guide id="1" orient="horz" pos="2160">
+          <p15:clr>
+            <a:srgbClr val="A4A3A4"/>
+          </p15:clr>
+        </p15:guide>
+        <p15:guide id="2" pos="2880">
+          <p15:clr>
+            <a:srgbClr val="A4A3A4"/>
+          </p15:clr>
+        </p15:guide>
+      </p15:sldGuideLst>
+    </p:ext>
+  </p:extLst>
 </p:presentation>
 </file>
 
@@ -163,10 +186,9 @@
           <a:lstStyle/>
           <a:p>
             <a:r>
-              <a:rPr lang="en-US" smtClean="0"/>
+              <a:rPr lang="en-US"/>
               <a:t>Click to edit Master title style</a:t>
             </a:r>
-            <a:endParaRPr lang="en-US"/>
           </a:p>
         </p:txBody>
       </p:sp>
@@ -282,10 +304,9 @@
           </a:lstStyle>
           <a:p>
             <a:r>
-              <a:rPr lang="en-US" smtClean="0"/>
+              <a:rPr lang="en-US"/>
               <a:t>Click to edit Master subtitle style</a:t>
             </a:r>
-            <a:endParaRPr lang="en-US"/>
           </a:p>
         </p:txBody>
       </p:sp>
@@ -307,7 +328,7 @@
             <a:fld id="{1D8BD707-D9CF-40AE-B4C6-C98DA3205C09}" type="datetimeFigureOut">
               <a:rPr lang="en-US" smtClean="0"/>
               <a:pPr/>
-              <a:t>8/1/2011</a:t>
+              <a:t>3/18/2026</a:t>
             </a:fld>
             <a:endParaRPr lang="en-US"/>
           </a:p>
@@ -350,7 +371,7 @@
             <a:fld id="{B6F15528-21DE-4FAA-801E-634DDDAF4B2B}" type="slidenum">
               <a:rPr lang="en-US" smtClean="0"/>
               <a:pPr/>
-              <a:t>‹#›</a:t>
+              <a:t>‹nº›</a:t>
             </a:fld>
             <a:endParaRPr lang="en-US"/>
           </a:p>
@@ -397,10 +418,9 @@
           <a:lstStyle/>
           <a:p>
             <a:r>
-              <a:rPr lang="en-US" smtClean="0"/>
+              <a:rPr lang="en-US"/>
               <a:t>Click to edit Master title style</a:t>
             </a:r>
-            <a:endParaRPr lang="en-US"/>
           </a:p>
         </p:txBody>
       </p:sp>
@@ -421,38 +441,37 @@
           <a:p>
             <a:pPr lvl="0"/>
             <a:r>
-              <a:rPr lang="en-US" smtClean="0"/>
+              <a:rPr lang="en-US"/>
               <a:t>Click to edit Master text styles</a:t>
             </a:r>
           </a:p>
           <a:p>
             <a:pPr lvl="1"/>
             <a:r>
-              <a:rPr lang="en-US" smtClean="0"/>
+              <a:rPr lang="en-US"/>
               <a:t>Second level</a:t>
             </a:r>
           </a:p>
           <a:p>
             <a:pPr lvl="2"/>
             <a:r>
-              <a:rPr lang="en-US" smtClean="0"/>
+              <a:rPr lang="en-US"/>
               <a:t>Third level</a:t>
             </a:r>
           </a:p>
           <a:p>
             <a:pPr lvl="3"/>
             <a:r>
-              <a:rPr lang="en-US" smtClean="0"/>
+              <a:rPr lang="en-US"/>
               <a:t>Fourth level</a:t>
             </a:r>
           </a:p>
           <a:p>
             <a:pPr lvl="4"/>
             <a:r>
-              <a:rPr lang="en-US" smtClean="0"/>
+              <a:rPr lang="en-US"/>
               <a:t>Fifth level</a:t>
             </a:r>
-            <a:endParaRPr lang="en-US"/>
           </a:p>
         </p:txBody>
       </p:sp>
@@ -474,7 +493,7 @@
             <a:fld id="{1D8BD707-D9CF-40AE-B4C6-C98DA3205C09}" type="datetimeFigureOut">
               <a:rPr lang="en-US" smtClean="0"/>
               <a:pPr/>
-              <a:t>8/1/2011</a:t>
+              <a:t>3/18/2026</a:t>
             </a:fld>
             <a:endParaRPr lang="en-US"/>
           </a:p>
@@ -517,7 +536,7 @@
             <a:fld id="{B6F15528-21DE-4FAA-801E-634DDDAF4B2B}" type="slidenum">
               <a:rPr lang="en-US" smtClean="0"/>
               <a:pPr/>
-              <a:t>‹#›</a:t>
+              <a:t>‹nº›</a:t>
             </a:fld>
             <a:endParaRPr lang="en-US"/>
           </a:p>
@@ -569,10 +588,9 @@
           <a:lstStyle/>
           <a:p>
             <a:r>
-              <a:rPr lang="en-US" smtClean="0"/>
+              <a:rPr lang="en-US"/>
               <a:t>Click to edit Master title style</a:t>
             </a:r>
-            <a:endParaRPr lang="en-US"/>
           </a:p>
         </p:txBody>
       </p:sp>
@@ -598,38 +616,37 @@
           <a:p>
             <a:pPr lvl="0"/>
             <a:r>
-              <a:rPr lang="en-US" smtClean="0"/>
+              <a:rPr lang="en-US"/>
               <a:t>Click to edit Master text styles</a:t>
             </a:r>
           </a:p>
           <a:p>
             <a:pPr lvl="1"/>
             <a:r>
-              <a:rPr lang="en-US" smtClean="0"/>
+              <a:rPr lang="en-US"/>
               <a:t>Second level</a:t>
             </a:r>
           </a:p>
           <a:p>
             <a:pPr lvl="2"/>
             <a:r>
-              <a:rPr lang="en-US" smtClean="0"/>
+              <a:rPr lang="en-US"/>
               <a:t>Third level</a:t>
             </a:r>
           </a:p>
           <a:p>
             <a:pPr lvl="3"/>
             <a:r>
-              <a:rPr lang="en-US" smtClean="0"/>
+              <a:rPr lang="en-US"/>
               <a:t>Fourth level</a:t>
             </a:r>
           </a:p>
           <a:p>
             <a:pPr lvl="4"/>
             <a:r>
-              <a:rPr lang="en-US" smtClean="0"/>
+              <a:rPr lang="en-US"/>
               <a:t>Fifth level</a:t>
             </a:r>
-            <a:endParaRPr lang="en-US"/>
           </a:p>
         </p:txBody>
       </p:sp>
@@ -651,7 +668,7 @@
             <a:fld id="{1D8BD707-D9CF-40AE-B4C6-C98DA3205C09}" type="datetimeFigureOut">
               <a:rPr lang="en-US" smtClean="0"/>
               <a:pPr/>
-              <a:t>8/1/2011</a:t>
+              <a:t>3/18/2026</a:t>
             </a:fld>
             <a:endParaRPr lang="en-US"/>
           </a:p>
@@ -694,7 +711,7 @@
             <a:fld id="{B6F15528-21DE-4FAA-801E-634DDDAF4B2B}" type="slidenum">
               <a:rPr lang="en-US" smtClean="0"/>
               <a:pPr/>
-              <a:t>‹#›</a:t>
+              <a:t>‹nº›</a:t>
             </a:fld>
             <a:endParaRPr lang="en-US"/>
           </a:p>
@@ -741,10 +758,9 @@
           <a:lstStyle/>
           <a:p>
             <a:r>
-              <a:rPr lang="en-US" smtClean="0"/>
+              <a:rPr lang="en-US"/>
               <a:t>Click to edit Master title style</a:t>
             </a:r>
-            <a:endParaRPr lang="en-US"/>
           </a:p>
         </p:txBody>
       </p:sp>
@@ -765,38 +781,37 @@
           <a:p>
             <a:pPr lvl="0"/>
             <a:r>
-              <a:rPr lang="en-US" smtClean="0"/>
+              <a:rPr lang="en-US"/>
               <a:t>Click to edit Master text styles</a:t>
             </a:r>
           </a:p>
           <a:p>
             <a:pPr lvl="1"/>
             <a:r>
-              <a:rPr lang="en-US" smtClean="0"/>
+              <a:rPr lang="en-US"/>
               <a:t>Second level</a:t>
             </a:r>
           </a:p>
           <a:p>
             <a:pPr lvl="2"/>
             <a:r>
-              <a:rPr lang="en-US" smtClean="0"/>
+              <a:rPr lang="en-US"/>
               <a:t>Third level</a:t>
             </a:r>
           </a:p>
           <a:p>
             <a:pPr lvl="3"/>
             <a:r>
-              <a:rPr lang="en-US" smtClean="0"/>
+              <a:rPr lang="en-US"/>
               <a:t>Fourth level</a:t>
             </a:r>
           </a:p>
           <a:p>
             <a:pPr lvl="4"/>
             <a:r>
-              <a:rPr lang="en-US" smtClean="0"/>
+              <a:rPr lang="en-US"/>
               <a:t>Fifth level</a:t>
             </a:r>
-            <a:endParaRPr lang="en-US"/>
           </a:p>
         </p:txBody>
       </p:sp>
@@ -818,7 +833,7 @@
             <a:fld id="{1D8BD707-D9CF-40AE-B4C6-C98DA3205C09}" type="datetimeFigureOut">
               <a:rPr lang="en-US" smtClean="0"/>
               <a:pPr/>
-              <a:t>8/1/2011</a:t>
+              <a:t>3/18/2026</a:t>
             </a:fld>
             <a:endParaRPr lang="en-US"/>
           </a:p>
@@ -861,7 +876,7 @@
             <a:fld id="{B6F15528-21DE-4FAA-801E-634DDDAF4B2B}" type="slidenum">
               <a:rPr lang="en-US" smtClean="0"/>
               <a:pPr/>
-              <a:t>‹#›</a:t>
+              <a:t>‹nº›</a:t>
             </a:fld>
             <a:endParaRPr lang="en-US"/>
           </a:p>
@@ -917,10 +932,9 @@
           </a:lstStyle>
           <a:p>
             <a:r>
-              <a:rPr lang="en-US" smtClean="0"/>
+              <a:rPr lang="en-US"/>
               <a:t>Click to edit Master title style</a:t>
             </a:r>
-            <a:endParaRPr lang="en-US"/>
           </a:p>
         </p:txBody>
       </p:sp>
@@ -1037,7 +1051,7 @@
           <a:p>
             <a:pPr lvl="0"/>
             <a:r>
-              <a:rPr lang="en-US" smtClean="0"/>
+              <a:rPr lang="en-US"/>
               <a:t>Click to edit Master text styles</a:t>
             </a:r>
           </a:p>
@@ -1061,7 +1075,7 @@
             <a:fld id="{1D8BD707-D9CF-40AE-B4C6-C98DA3205C09}" type="datetimeFigureOut">
               <a:rPr lang="en-US" smtClean="0"/>
               <a:pPr/>
-              <a:t>8/1/2011</a:t>
+              <a:t>3/18/2026</a:t>
             </a:fld>
             <a:endParaRPr lang="en-US"/>
           </a:p>
@@ -1104,7 +1118,7 @@
             <a:fld id="{B6F15528-21DE-4FAA-801E-634DDDAF4B2B}" type="slidenum">
               <a:rPr lang="en-US" smtClean="0"/>
               <a:pPr/>
-              <a:t>‹#›</a:t>
+              <a:t>‹nº›</a:t>
             </a:fld>
             <a:endParaRPr lang="en-US"/>
           </a:p>
@@ -1151,10 +1165,9 @@
           <a:lstStyle/>
           <a:p>
             <a:r>
-              <a:rPr lang="en-US" smtClean="0"/>
+              <a:rPr lang="en-US"/>
               <a:t>Click to edit Master title style</a:t>
             </a:r>
-            <a:endParaRPr lang="en-US"/>
           </a:p>
         </p:txBody>
       </p:sp>
@@ -1208,38 +1221,37 @@
           <a:p>
             <a:pPr lvl="0"/>
             <a:r>
-              <a:rPr lang="en-US" smtClean="0"/>
+              <a:rPr lang="en-US"/>
               <a:t>Click to edit Master text styles</a:t>
             </a:r>
           </a:p>
           <a:p>
             <a:pPr lvl="1"/>
             <a:r>
-              <a:rPr lang="en-US" smtClean="0"/>
+              <a:rPr lang="en-US"/>
               <a:t>Second level</a:t>
             </a:r>
           </a:p>
           <a:p>
             <a:pPr lvl="2"/>
             <a:r>
-              <a:rPr lang="en-US" smtClean="0"/>
+              <a:rPr lang="en-US"/>
               <a:t>Third level</a:t>
             </a:r>
           </a:p>
           <a:p>
             <a:pPr lvl="3"/>
             <a:r>
-              <a:rPr lang="en-US" smtClean="0"/>
+              <a:rPr lang="en-US"/>
               <a:t>Fourth level</a:t>
             </a:r>
           </a:p>
           <a:p>
             <a:pPr lvl="4"/>
             <a:r>
-              <a:rPr lang="en-US" smtClean="0"/>
+              <a:rPr lang="en-US"/>
               <a:t>Fifth level</a:t>
             </a:r>
-            <a:endParaRPr lang="en-US"/>
           </a:p>
         </p:txBody>
       </p:sp>
@@ -1293,38 +1305,37 @@
           <a:p>
             <a:pPr lvl="0"/>
             <a:r>
-              <a:rPr lang="en-US" smtClean="0"/>
+              <a:rPr lang="en-US"/>
               <a:t>Click to edit Master text styles</a:t>
             </a:r>
           </a:p>
           <a:p>
             <a:pPr lvl="1"/>
             <a:r>
-              <a:rPr lang="en-US" smtClean="0"/>
+              <a:rPr lang="en-US"/>
               <a:t>Second level</a:t>
             </a:r>
           </a:p>
           <a:p>
             <a:pPr lvl="2"/>
             <a:r>
-              <a:rPr lang="en-US" smtClean="0"/>
+              <a:rPr lang="en-US"/>
               <a:t>Third level</a:t>
             </a:r>
           </a:p>
           <a:p>
             <a:pPr lvl="3"/>
             <a:r>
-              <a:rPr lang="en-US" smtClean="0"/>
+              <a:rPr lang="en-US"/>
               <a:t>Fourth level</a:t>
             </a:r>
           </a:p>
           <a:p>
             <a:pPr lvl="4"/>
             <a:r>
-              <a:rPr lang="en-US" smtClean="0"/>
+              <a:rPr lang="en-US"/>
               <a:t>Fifth level</a:t>
             </a:r>
-            <a:endParaRPr lang="en-US"/>
           </a:p>
         </p:txBody>
       </p:sp>
@@ -1346,7 +1357,7 @@
             <a:fld id="{1D8BD707-D9CF-40AE-B4C6-C98DA3205C09}" type="datetimeFigureOut">
               <a:rPr lang="en-US" smtClean="0"/>
               <a:pPr/>
-              <a:t>8/1/2011</a:t>
+              <a:t>3/18/2026</a:t>
             </a:fld>
             <a:endParaRPr lang="en-US"/>
           </a:p>
@@ -1389,7 +1400,7 @@
             <a:fld id="{B6F15528-21DE-4FAA-801E-634DDDAF4B2B}" type="slidenum">
               <a:rPr lang="en-US" smtClean="0"/>
               <a:pPr/>
-              <a:t>‹#›</a:t>
+              <a:t>‹nº›</a:t>
             </a:fld>
             <a:endParaRPr lang="en-US"/>
           </a:p>
@@ -1440,10 +1451,9 @@
           </a:lstStyle>
           <a:p>
             <a:r>
-              <a:rPr lang="en-US" smtClean="0"/>
+              <a:rPr lang="en-US"/>
               <a:t>Click to edit Master title style</a:t>
             </a:r>
-            <a:endParaRPr lang="en-US"/>
           </a:p>
         </p:txBody>
       </p:sp>
@@ -1506,7 +1516,7 @@
           <a:p>
             <a:pPr lvl="0"/>
             <a:r>
-              <a:rPr lang="en-US" smtClean="0"/>
+              <a:rPr lang="en-US"/>
               <a:t>Click to edit Master text styles</a:t>
             </a:r>
           </a:p>
@@ -1562,38 +1572,37 @@
           <a:p>
             <a:pPr lvl="0"/>
             <a:r>
-              <a:rPr lang="en-US" smtClean="0"/>
+              <a:rPr lang="en-US"/>
               <a:t>Click to edit Master text styles</a:t>
             </a:r>
           </a:p>
           <a:p>
             <a:pPr lvl="1"/>
             <a:r>
-              <a:rPr lang="en-US" smtClean="0"/>
+              <a:rPr lang="en-US"/>
               <a:t>Second level</a:t>
             </a:r>
           </a:p>
           <a:p>
             <a:pPr lvl="2"/>
             <a:r>
-              <a:rPr lang="en-US" smtClean="0"/>
+              <a:rPr lang="en-US"/>
               <a:t>Third level</a:t>
             </a:r>
           </a:p>
           <a:p>
             <a:pPr lvl="3"/>
             <a:r>
-              <a:rPr lang="en-US" smtClean="0"/>
+              <a:rPr lang="en-US"/>
               <a:t>Fourth level</a:t>
             </a:r>
           </a:p>
           <a:p>
             <a:pPr lvl="4"/>
             <a:r>
-              <a:rPr lang="en-US" smtClean="0"/>
+              <a:rPr lang="en-US"/>
               <a:t>Fifth level</a:t>
             </a:r>
-            <a:endParaRPr lang="en-US"/>
           </a:p>
         </p:txBody>
       </p:sp>
@@ -1656,7 +1665,7 @@
           <a:p>
             <a:pPr lvl="0"/>
             <a:r>
-              <a:rPr lang="en-US" smtClean="0"/>
+              <a:rPr lang="en-US"/>
               <a:t>Click to edit Master text styles</a:t>
             </a:r>
           </a:p>
@@ -1712,38 +1721,37 @@
           <a:p>
             <a:pPr lvl="0"/>
             <a:r>
-              <a:rPr lang="en-US" smtClean="0"/>
+              <a:rPr lang="en-US"/>
               <a:t>Click to edit Master text styles</a:t>
             </a:r>
           </a:p>
           <a:p>
             <a:pPr lvl="1"/>
             <a:r>
-              <a:rPr lang="en-US" smtClean="0"/>
+              <a:rPr lang="en-US"/>
               <a:t>Second level</a:t>
             </a:r>
           </a:p>
           <a:p>
             <a:pPr lvl="2"/>
             <a:r>
-              <a:rPr lang="en-US" smtClean="0"/>
+              <a:rPr lang="en-US"/>
               <a:t>Third level</a:t>
             </a:r>
           </a:p>
           <a:p>
             <a:pPr lvl="3"/>
             <a:r>
-              <a:rPr lang="en-US" smtClean="0"/>
+              <a:rPr lang="en-US"/>
               <a:t>Fourth level</a:t>
             </a:r>
           </a:p>
           <a:p>
             <a:pPr lvl="4"/>
             <a:r>
-              <a:rPr lang="en-US" smtClean="0"/>
+              <a:rPr lang="en-US"/>
               <a:t>Fifth level</a:t>
             </a:r>
-            <a:endParaRPr lang="en-US"/>
           </a:p>
         </p:txBody>
       </p:sp>
@@ -1765,7 +1773,7 @@
             <a:fld id="{1D8BD707-D9CF-40AE-B4C6-C98DA3205C09}" type="datetimeFigureOut">
               <a:rPr lang="en-US" smtClean="0"/>
               <a:pPr/>
-              <a:t>8/1/2011</a:t>
+              <a:t>3/18/2026</a:t>
             </a:fld>
             <a:endParaRPr lang="en-US"/>
           </a:p>
@@ -1808,7 +1816,7 @@
             <a:fld id="{B6F15528-21DE-4FAA-801E-634DDDAF4B2B}" type="slidenum">
               <a:rPr lang="en-US" smtClean="0"/>
               <a:pPr/>
-              <a:t>‹#›</a:t>
+              <a:t>‹nº›</a:t>
             </a:fld>
             <a:endParaRPr lang="en-US"/>
           </a:p>
@@ -1855,10 +1863,9 @@
           <a:lstStyle/>
           <a:p>
             <a:r>
-              <a:rPr lang="en-US" smtClean="0"/>
+              <a:rPr lang="en-US"/>
               <a:t>Click to edit Master title style</a:t>
             </a:r>
-            <a:endParaRPr lang="en-US"/>
           </a:p>
         </p:txBody>
       </p:sp>
@@ -1880,7 +1887,7 @@
             <a:fld id="{1D8BD707-D9CF-40AE-B4C6-C98DA3205C09}" type="datetimeFigureOut">
               <a:rPr lang="en-US" smtClean="0"/>
               <a:pPr/>
-              <a:t>8/1/2011</a:t>
+              <a:t>3/18/2026</a:t>
             </a:fld>
             <a:endParaRPr lang="en-US"/>
           </a:p>
@@ -1923,7 +1930,7 @@
             <a:fld id="{B6F15528-21DE-4FAA-801E-634DDDAF4B2B}" type="slidenum">
               <a:rPr lang="en-US" smtClean="0"/>
               <a:pPr/>
-              <a:t>‹#›</a:t>
+              <a:t>‹nº›</a:t>
             </a:fld>
             <a:endParaRPr lang="en-US"/>
           </a:p>
@@ -1972,7 +1979,7 @@
             <a:fld id="{1D8BD707-D9CF-40AE-B4C6-C98DA3205C09}" type="datetimeFigureOut">
               <a:rPr lang="en-US" smtClean="0"/>
               <a:pPr/>
-              <a:t>8/1/2011</a:t>
+              <a:t>3/18/2026</a:t>
             </a:fld>
             <a:endParaRPr lang="en-US"/>
           </a:p>
@@ -2015,7 +2022,7 @@
             <a:fld id="{B6F15528-21DE-4FAA-801E-634DDDAF4B2B}" type="slidenum">
               <a:rPr lang="en-US" smtClean="0"/>
               <a:pPr/>
-              <a:t>‹#›</a:t>
+              <a:t>‹nº›</a:t>
             </a:fld>
             <a:endParaRPr lang="en-US"/>
           </a:p>
@@ -2071,10 +2078,9 @@
           </a:lstStyle>
           <a:p>
             <a:r>
-              <a:rPr lang="en-US" smtClean="0"/>
+              <a:rPr lang="en-US"/>
               <a:t>Click to edit Master title style</a:t>
             </a:r>
-            <a:endParaRPr lang="en-US"/>
           </a:p>
         </p:txBody>
       </p:sp>
@@ -2128,38 +2134,37 @@
           <a:p>
             <a:pPr lvl="0"/>
             <a:r>
-              <a:rPr lang="en-US" smtClean="0"/>
+              <a:rPr lang="en-US"/>
               <a:t>Click to edit Master text styles</a:t>
             </a:r>
           </a:p>
           <a:p>
             <a:pPr lvl="1"/>
             <a:r>
-              <a:rPr lang="en-US" smtClean="0"/>
+              <a:rPr lang="en-US"/>
               <a:t>Second level</a:t>
             </a:r>
           </a:p>
           <a:p>
             <a:pPr lvl="2"/>
             <a:r>
-              <a:rPr lang="en-US" smtClean="0"/>
+              <a:rPr lang="en-US"/>
               <a:t>Third level</a:t>
             </a:r>
           </a:p>
           <a:p>
             <a:pPr lvl="3"/>
             <a:r>
-              <a:rPr lang="en-US" smtClean="0"/>
+              <a:rPr lang="en-US"/>
               <a:t>Fourth level</a:t>
             </a:r>
           </a:p>
           <a:p>
             <a:pPr lvl="4"/>
             <a:r>
-              <a:rPr lang="en-US" smtClean="0"/>
+              <a:rPr lang="en-US"/>
               <a:t>Fifth level</a:t>
             </a:r>
-            <a:endParaRPr lang="en-US"/>
           </a:p>
         </p:txBody>
       </p:sp>
@@ -2222,7 +2227,7 @@
           <a:p>
             <a:pPr lvl="0"/>
             <a:r>
-              <a:rPr lang="en-US" smtClean="0"/>
+              <a:rPr lang="en-US"/>
               <a:t>Click to edit Master text styles</a:t>
             </a:r>
           </a:p>
@@ -2246,7 +2251,7 @@
             <a:fld id="{1D8BD707-D9CF-40AE-B4C6-C98DA3205C09}" type="datetimeFigureOut">
               <a:rPr lang="en-US" smtClean="0"/>
               <a:pPr/>
-              <a:t>8/1/2011</a:t>
+              <a:t>3/18/2026</a:t>
             </a:fld>
             <a:endParaRPr lang="en-US"/>
           </a:p>
@@ -2289,7 +2294,7 @@
             <a:fld id="{B6F15528-21DE-4FAA-801E-634DDDAF4B2B}" type="slidenum">
               <a:rPr lang="en-US" smtClean="0"/>
               <a:pPr/>
-              <a:t>‹#›</a:t>
+              <a:t>‹nº›</a:t>
             </a:fld>
             <a:endParaRPr lang="en-US"/>
           </a:p>
@@ -2345,10 +2350,9 @@
           </a:lstStyle>
           <a:p>
             <a:r>
-              <a:rPr lang="en-US" smtClean="0"/>
+              <a:rPr lang="en-US"/>
               <a:t>Click to edit Master title style</a:t>
             </a:r>
-            <a:endParaRPr lang="en-US"/>
           </a:p>
         </p:txBody>
       </p:sp>
@@ -2472,7 +2476,7 @@
           <a:p>
             <a:pPr lvl="0"/>
             <a:r>
-              <a:rPr lang="en-US" smtClean="0"/>
+              <a:rPr lang="en-US"/>
               <a:t>Click to edit Master text styles</a:t>
             </a:r>
           </a:p>
@@ -2496,7 +2500,7 @@
             <a:fld id="{1D8BD707-D9CF-40AE-B4C6-C98DA3205C09}" type="datetimeFigureOut">
               <a:rPr lang="en-US" smtClean="0"/>
               <a:pPr/>
-              <a:t>8/1/2011</a:t>
+              <a:t>3/18/2026</a:t>
             </a:fld>
             <a:endParaRPr lang="en-US"/>
           </a:p>
@@ -2539,7 +2543,7 @@
             <a:fld id="{B6F15528-21DE-4FAA-801E-634DDDAF4B2B}" type="slidenum">
               <a:rPr lang="en-US" smtClean="0"/>
               <a:pPr/>
-              <a:t>‹#›</a:t>
+              <a:t>‹nº›</a:t>
             </a:fld>
             <a:endParaRPr lang="en-US"/>
           </a:p>
@@ -2601,10 +2605,9 @@
           <a:lstStyle/>
           <a:p>
             <a:r>
-              <a:rPr lang="en-US" smtClean="0"/>
+              <a:rPr lang="en-US"/>
               <a:t>Click to edit Master title style</a:t>
             </a:r>
-            <a:endParaRPr lang="en-US"/>
           </a:p>
         </p:txBody>
       </p:sp>
@@ -2635,38 +2638,37 @@
           <a:p>
             <a:pPr lvl="0"/>
             <a:r>
-              <a:rPr lang="en-US" smtClean="0"/>
+              <a:rPr lang="en-US"/>
               <a:t>Click to edit Master text styles</a:t>
             </a:r>
           </a:p>
           <a:p>
             <a:pPr lvl="1"/>
             <a:r>
-              <a:rPr lang="en-US" smtClean="0"/>
+              <a:rPr lang="en-US"/>
               <a:t>Second level</a:t>
             </a:r>
           </a:p>
           <a:p>
             <a:pPr lvl="2"/>
             <a:r>
-              <a:rPr lang="en-US" smtClean="0"/>
+              <a:rPr lang="en-US"/>
               <a:t>Third level</a:t>
             </a:r>
           </a:p>
           <a:p>
             <a:pPr lvl="3"/>
             <a:r>
-              <a:rPr lang="en-US" smtClean="0"/>
+              <a:rPr lang="en-US"/>
               <a:t>Fourth level</a:t>
             </a:r>
           </a:p>
           <a:p>
             <a:pPr lvl="4"/>
             <a:r>
-              <a:rPr lang="en-US" smtClean="0"/>
+              <a:rPr lang="en-US"/>
               <a:t>Fifth level</a:t>
             </a:r>
-            <a:endParaRPr lang="en-US"/>
           </a:p>
         </p:txBody>
       </p:sp>
@@ -2706,7 +2708,7 @@
             <a:fld id="{1D8BD707-D9CF-40AE-B4C6-C98DA3205C09}" type="datetimeFigureOut">
               <a:rPr lang="en-US" smtClean="0"/>
               <a:pPr/>
-              <a:t>8/1/2011</a:t>
+              <a:t>3/18/2026</a:t>
             </a:fld>
             <a:endParaRPr lang="en-US"/>
           </a:p>
@@ -2785,7 +2787,7 @@
             <a:fld id="{B6F15528-21DE-4FAA-801E-634DDDAF4B2B}" type="slidenum">
               <a:rPr lang="en-US" smtClean="0"/>
               <a:pPr/>
-              <a:t>‹#›</a:t>
+              <a:t>‹nº›</a:t>
             </a:fld>
             <a:endParaRPr lang="en-US"/>
           </a:p>
@@ -3061,13 +3063,14 @@
 </file>
 
 <file path=ppt/slides/slide1.xml><?xml version="1.0" encoding="utf-8"?>
-<p:sld xmlns:p="http://schemas.openxmlformats.org/presentationml/2006/main" xmlns:a="http://schemas.openxmlformats.org/drawingml/2006/main" xmlns:r="http://schemas.openxmlformats.org/officeDocument/2006/relationships">
+<p:sld xmlns:a="http://schemas.openxmlformats.org/drawingml/2006/main" xmlns:r="http://schemas.openxmlformats.org/officeDocument/2006/relationships" xmlns:p="http://schemas.openxmlformats.org/presentationml/2006/main">
   <p:cSld>
     <p:bg>
       <p:bgPr>
         <a:solidFill>
           <a:srgbClr val="3972F0"/>
         </a:solidFill>
+        <a:effectLst/>
       </p:bgPr>
     </p:bg>
     <p:spTree>
@@ -3086,12 +3089,12 @@
       </p:grpSpPr>
       <p:grpSp>
         <p:nvGrpSpPr>
-          <p:cNvPr name="Group 2" id="2"/>
+          <p:cNvPr id="2" name="Group 2"/>
           <p:cNvGrpSpPr/>
           <p:nvPr/>
         </p:nvGrpSpPr>
         <p:grpSpPr>
-          <a:xfrm rot="0">
+          <a:xfrm>
             <a:off x="0" y="-1396453"/>
             <a:ext cx="18288000" cy="11083773"/>
             <a:chOff x="0" y="0"/>
@@ -3100,12 +3103,12 @@
         </p:grpSpPr>
         <p:sp>
           <p:nvSpPr>
-            <p:cNvPr name="Freeform 3" id="3"/>
+            <p:cNvPr id="3" name="Freeform 3"/>
             <p:cNvSpPr/>
             <p:nvPr/>
           </p:nvSpPr>
           <p:spPr>
-            <a:xfrm flipH="false" flipV="false" rot="0">
+            <a:xfrm>
               <a:off x="0" y="0"/>
               <a:ext cx="4816592" cy="2919183"/>
             </a:xfrm>
@@ -3114,9 +3117,9 @@
               <a:gdLst/>
               <a:ahLst/>
               <a:cxnLst/>
-              <a:rect r="r" b="b" t="t" l="l"/>
+              <a:rect l="l" t="t" r="r" b="b"/>
               <a:pathLst>
-                <a:path h="2919183" w="4816592">
+                <a:path w="4816592" h="2919183">
                   <a:moveTo>
                     <a:pt x="21590" y="0"/>
                   </a:moveTo>
@@ -3170,11 +3173,18 @@
               <a:srgbClr val="FFFFFF"/>
             </a:solidFill>
           </p:spPr>
+          <p:txBody>
+            <a:bodyPr/>
+            <a:lstStyle/>
+            <a:p>
+              <a:endParaRPr lang="pt-BR" dirty="0"/>
+            </a:p>
+          </p:txBody>
         </p:sp>
         <p:sp>
           <p:nvSpPr>
-            <p:cNvPr name="TextBox 4" id="4"/>
-            <p:cNvSpPr txBox="true"/>
+            <p:cNvPr id="4" name="TextBox 4"/>
+            <p:cNvSpPr txBox="1"/>
             <p:nvPr/>
           </p:nvSpPr>
           <p:spPr>
@@ -3187,26 +3197,27 @@
             </a:prstGeom>
           </p:spPr>
           <p:txBody>
-            <a:bodyPr anchor="ctr" rtlCol="false" tIns="50800" lIns="50800" bIns="50800" rIns="50800"/>
+            <a:bodyPr lIns="50800" tIns="50800" rIns="50800" bIns="50800" rtlCol="0" anchor="ctr"/>
             <a:lstStyle/>
             <a:p>
-              <a:pPr algn="ctr" marL="0" indent="0" lvl="0">
+              <a:pPr marL="0" lvl="0" indent="0" algn="ctr">
                 <a:lnSpc>
                   <a:spcPts val="2659"/>
                 </a:lnSpc>
               </a:pPr>
+              <a:endParaRPr/>
             </a:p>
           </p:txBody>
         </p:sp>
       </p:grpSp>
       <p:sp>
         <p:nvSpPr>
-          <p:cNvPr name="Freeform 5" id="5"/>
+          <p:cNvPr id="5" name="Freeform 5"/>
           <p:cNvSpPr/>
           <p:nvPr/>
         </p:nvSpPr>
         <p:spPr>
-          <a:xfrm flipH="false" flipV="false" rot="0">
+          <a:xfrm>
             <a:off x="9996199" y="-7188235"/>
             <a:ext cx="9529995" cy="9529995"/>
           </a:xfrm>
@@ -3215,9 +3226,9 @@
             <a:gdLst/>
             <a:ahLst/>
             <a:cxnLst/>
-            <a:rect r="r" b="b" t="t" l="l"/>
+            <a:rect l="l" t="t" r="r" b="b"/>
             <a:pathLst>
-              <a:path h="9529995" w="9529995">
+              <a:path w="9529995" h="9529995">
                 <a:moveTo>
                   <a:pt x="0" y="0"/>
                 </a:moveTo>
@@ -3247,19 +3258,19 @@
               </a:extLst>
             </a:blip>
             <a:stretch>
-              <a:fillRect l="0" t="0" r="0" b="0"/>
+              <a:fillRect/>
             </a:stretch>
           </a:blipFill>
         </p:spPr>
       </p:sp>
       <p:sp>
         <p:nvSpPr>
-          <p:cNvPr name="Freeform 6" id="6"/>
+          <p:cNvPr id="6" name="Freeform 6"/>
           <p:cNvSpPr/>
           <p:nvPr/>
         </p:nvSpPr>
         <p:spPr>
-          <a:xfrm flipH="false" flipV="true" rot="0">
+          <a:xfrm flipV="1">
             <a:off x="-810926" y="7857092"/>
             <a:ext cx="9529995" cy="9529995"/>
           </a:xfrm>
@@ -3268,9 +3279,9 @@
             <a:gdLst/>
             <a:ahLst/>
             <a:cxnLst/>
-            <a:rect r="r" b="b" t="t" l="l"/>
+            <a:rect l="l" t="t" r="r" b="b"/>
             <a:pathLst>
-              <a:path h="9529995" w="9529995">
+              <a:path w="9529995" h="9529995">
                 <a:moveTo>
                   <a:pt x="0" y="9529995"/>
                 </a:moveTo>
@@ -3300,514 +3311,30 @@
               </a:extLst>
             </a:blip>
             <a:stretch>
-              <a:fillRect l="0" t="0" r="0" b="0"/>
+              <a:fillRect/>
             </a:stretch>
           </a:blipFill>
         </p:spPr>
       </p:sp>
-      <p:grpSp>
-        <p:nvGrpSpPr>
-          <p:cNvPr name="Group 7" id="7"/>
-          <p:cNvGrpSpPr/>
-          <p:nvPr/>
-        </p:nvGrpSpPr>
-        <p:grpSpPr>
-          <a:xfrm rot="0">
-            <a:off x="-2150814" y="1730578"/>
-            <a:ext cx="3412922" cy="3412922"/>
-            <a:chOff x="0" y="0"/>
-            <a:chExt cx="812800" cy="812800"/>
-          </a:xfrm>
-        </p:grpSpPr>
-        <p:sp>
-          <p:nvSpPr>
-            <p:cNvPr name="Freeform 8" id="8"/>
-            <p:cNvSpPr/>
-            <p:nvPr/>
-          </p:nvSpPr>
-          <p:spPr>
-            <a:xfrm flipH="false" flipV="false" rot="0">
-              <a:off x="0" y="0"/>
-              <a:ext cx="812800" cy="812800"/>
-            </a:xfrm>
-            <a:custGeom>
-              <a:avLst/>
-              <a:gdLst/>
-              <a:ahLst/>
-              <a:cxnLst/>
-              <a:rect r="r" b="b" t="t" l="l"/>
-              <a:pathLst>
-                <a:path h="812800" w="812800">
-                  <a:moveTo>
-                    <a:pt x="406400" y="0"/>
-                  </a:moveTo>
-                  <a:cubicBezTo>
-                    <a:pt x="181951" y="0"/>
-                    <a:pt x="0" y="181951"/>
-                    <a:pt x="0" y="406400"/>
-                  </a:cubicBezTo>
-                  <a:cubicBezTo>
-                    <a:pt x="0" y="630849"/>
-                    <a:pt x="181951" y="812800"/>
-                    <a:pt x="406400" y="812800"/>
-                  </a:cubicBezTo>
-                  <a:cubicBezTo>
-                    <a:pt x="630849" y="812800"/>
-                    <a:pt x="812800" y="630849"/>
-                    <a:pt x="812800" y="406400"/>
-                  </a:cubicBezTo>
-                  <a:cubicBezTo>
-                    <a:pt x="812800" y="181951"/>
-                    <a:pt x="630849" y="0"/>
-                    <a:pt x="406400" y="0"/>
-                  </a:cubicBezTo>
-                  <a:close/>
-                </a:path>
-              </a:pathLst>
-            </a:custGeom>
-            <a:gradFill rotWithShape="true">
-              <a:gsLst>
-                <a:gs pos="0">
-                  <a:srgbClr val="3972F0">
-                    <a:alpha val="100000"/>
-                  </a:srgbClr>
-                </a:gs>
-                <a:gs pos="100000">
-                  <a:srgbClr val="1CDAFF">
-                    <a:alpha val="100000"/>
-                  </a:srgbClr>
-                </a:gs>
-              </a:gsLst>
-              <a:lin ang="5400000"/>
-            </a:gradFill>
-          </p:spPr>
-        </p:sp>
-        <p:sp>
-          <p:nvSpPr>
-            <p:cNvPr name="TextBox 9" id="9"/>
-            <p:cNvSpPr txBox="true"/>
-            <p:nvPr/>
-          </p:nvSpPr>
-          <p:spPr>
-            <a:xfrm>
-              <a:off x="76200" y="38100"/>
-              <a:ext cx="660400" cy="698500"/>
-            </a:xfrm>
-            <a:prstGeom prst="rect">
-              <a:avLst/>
-            </a:prstGeom>
-          </p:spPr>
-          <p:txBody>
-            <a:bodyPr anchor="ctr" rtlCol="false" tIns="50800" lIns="50800" bIns="50800" rIns="50800"/>
-            <a:lstStyle/>
-            <a:p>
-              <a:pPr algn="ctr" marL="0" indent="0" lvl="0">
-                <a:lnSpc>
-                  <a:spcPts val="2659"/>
-                </a:lnSpc>
-                <a:spcBef>
-                  <a:spcPct val="0"/>
-                </a:spcBef>
-              </a:pPr>
-            </a:p>
-          </p:txBody>
-        </p:sp>
-      </p:grpSp>
-      <p:grpSp>
-        <p:nvGrpSpPr>
-          <p:cNvPr name="Group 10" id="10"/>
-          <p:cNvGrpSpPr/>
-          <p:nvPr/>
-        </p:nvGrpSpPr>
-        <p:grpSpPr>
-          <a:xfrm rot="0">
-            <a:off x="14761196" y="5757869"/>
-            <a:ext cx="2498104" cy="2498104"/>
-            <a:chOff x="0" y="0"/>
-            <a:chExt cx="812800" cy="812800"/>
-          </a:xfrm>
-        </p:grpSpPr>
-        <p:sp>
-          <p:nvSpPr>
-            <p:cNvPr name="Freeform 11" id="11"/>
-            <p:cNvSpPr/>
-            <p:nvPr/>
-          </p:nvSpPr>
-          <p:spPr>
-            <a:xfrm flipH="false" flipV="false" rot="0">
-              <a:off x="0" y="0"/>
-              <a:ext cx="812800" cy="812800"/>
-            </a:xfrm>
-            <a:custGeom>
-              <a:avLst/>
-              <a:gdLst/>
-              <a:ahLst/>
-              <a:cxnLst/>
-              <a:rect r="r" b="b" t="t" l="l"/>
-              <a:pathLst>
-                <a:path h="812800" w="812800">
-                  <a:moveTo>
-                    <a:pt x="406400" y="0"/>
-                  </a:moveTo>
-                  <a:cubicBezTo>
-                    <a:pt x="181951" y="0"/>
-                    <a:pt x="0" y="181951"/>
-                    <a:pt x="0" y="406400"/>
-                  </a:cubicBezTo>
-                  <a:cubicBezTo>
-                    <a:pt x="0" y="630849"/>
-                    <a:pt x="181951" y="812800"/>
-                    <a:pt x="406400" y="812800"/>
-                  </a:cubicBezTo>
-                  <a:cubicBezTo>
-                    <a:pt x="630849" y="812800"/>
-                    <a:pt x="812800" y="630849"/>
-                    <a:pt x="812800" y="406400"/>
-                  </a:cubicBezTo>
-                  <a:cubicBezTo>
-                    <a:pt x="812800" y="181951"/>
-                    <a:pt x="630849" y="0"/>
-                    <a:pt x="406400" y="0"/>
-                  </a:cubicBezTo>
-                  <a:close/>
-                </a:path>
-              </a:pathLst>
-            </a:custGeom>
-            <a:gradFill rotWithShape="true">
-              <a:gsLst>
-                <a:gs pos="0">
-                  <a:srgbClr val="3972F0">
-                    <a:alpha val="100000"/>
-                  </a:srgbClr>
-                </a:gs>
-                <a:gs pos="100000">
-                  <a:srgbClr val="1CDAFF">
-                    <a:alpha val="100000"/>
-                  </a:srgbClr>
-                </a:gs>
-              </a:gsLst>
-              <a:lin ang="5400000"/>
-            </a:gradFill>
-          </p:spPr>
-        </p:sp>
-        <p:sp>
-          <p:nvSpPr>
-            <p:cNvPr name="TextBox 12" id="12"/>
-            <p:cNvSpPr txBox="true"/>
-            <p:nvPr/>
-          </p:nvSpPr>
-          <p:spPr>
-            <a:xfrm>
-              <a:off x="76200" y="38100"/>
-              <a:ext cx="660400" cy="698500"/>
-            </a:xfrm>
-            <a:prstGeom prst="rect">
-              <a:avLst/>
-            </a:prstGeom>
-          </p:spPr>
-          <p:txBody>
-            <a:bodyPr anchor="ctr" rtlCol="false" tIns="50800" lIns="50800" bIns="50800" rIns="50800"/>
-            <a:lstStyle/>
-            <a:p>
-              <a:pPr algn="ctr" marL="0" indent="0" lvl="0">
-                <a:lnSpc>
-                  <a:spcPts val="2659"/>
-                </a:lnSpc>
-                <a:spcBef>
-                  <a:spcPct val="0"/>
-                </a:spcBef>
-              </a:pPr>
-            </a:p>
-          </p:txBody>
-        </p:sp>
-      </p:grpSp>
-      <p:grpSp>
-        <p:nvGrpSpPr>
-          <p:cNvPr name="Group 13" id="13"/>
-          <p:cNvGrpSpPr/>
-          <p:nvPr/>
-        </p:nvGrpSpPr>
-        <p:grpSpPr>
-          <a:xfrm rot="0">
-            <a:off x="9612352" y="1730578"/>
-            <a:ext cx="2785139" cy="2785139"/>
-            <a:chOff x="0" y="0"/>
-            <a:chExt cx="812800" cy="812800"/>
-          </a:xfrm>
-        </p:grpSpPr>
-        <p:sp>
-          <p:nvSpPr>
-            <p:cNvPr name="Freeform 14" id="14"/>
-            <p:cNvSpPr/>
-            <p:nvPr/>
-          </p:nvSpPr>
-          <p:spPr>
-            <a:xfrm flipH="false" flipV="false" rot="0">
-              <a:off x="0" y="0"/>
-              <a:ext cx="812800" cy="812800"/>
-            </a:xfrm>
-            <a:custGeom>
-              <a:avLst/>
-              <a:gdLst/>
-              <a:ahLst/>
-              <a:cxnLst/>
-              <a:rect r="r" b="b" t="t" l="l"/>
-              <a:pathLst>
-                <a:path h="812800" w="812800">
-                  <a:moveTo>
-                    <a:pt x="406400" y="0"/>
-                  </a:moveTo>
-                  <a:cubicBezTo>
-                    <a:pt x="181951" y="0"/>
-                    <a:pt x="0" y="181951"/>
-                    <a:pt x="0" y="406400"/>
-                  </a:cubicBezTo>
-                  <a:cubicBezTo>
-                    <a:pt x="0" y="630849"/>
-                    <a:pt x="181951" y="812800"/>
-                    <a:pt x="406400" y="812800"/>
-                  </a:cubicBezTo>
-                  <a:cubicBezTo>
-                    <a:pt x="630849" y="812800"/>
-                    <a:pt x="812800" y="630849"/>
-                    <a:pt x="812800" y="406400"/>
-                  </a:cubicBezTo>
-                  <a:cubicBezTo>
-                    <a:pt x="812800" y="181951"/>
-                    <a:pt x="630849" y="0"/>
-                    <a:pt x="406400" y="0"/>
-                  </a:cubicBezTo>
-                  <a:close/>
-                </a:path>
-              </a:pathLst>
-            </a:custGeom>
-            <a:ln w="628650" cap="sq">
-              <a:gradFill>
-                <a:gsLst>
-                  <a:gs pos="0">
-                    <a:srgbClr val="3972F0">
-                      <a:alpha val="100000"/>
-                    </a:srgbClr>
-                  </a:gs>
-                  <a:gs pos="100000">
-                    <a:srgbClr val="1CDAFF">
-                      <a:alpha val="100000"/>
-                    </a:srgbClr>
-                  </a:gs>
-                </a:gsLst>
-                <a:lin ang="5400000"/>
-              </a:gradFill>
-              <a:prstDash val="solid"/>
-              <a:miter/>
-            </a:ln>
-          </p:spPr>
-        </p:sp>
-        <p:sp>
-          <p:nvSpPr>
-            <p:cNvPr name="TextBox 15" id="15"/>
-            <p:cNvSpPr txBox="true"/>
-            <p:nvPr/>
-          </p:nvSpPr>
-          <p:spPr>
-            <a:xfrm>
-              <a:off x="76200" y="38100"/>
-              <a:ext cx="660400" cy="698500"/>
-            </a:xfrm>
-            <a:prstGeom prst="rect">
-              <a:avLst/>
-            </a:prstGeom>
-          </p:spPr>
-          <p:txBody>
-            <a:bodyPr anchor="ctr" rtlCol="false" tIns="50800" lIns="50800" bIns="50800" rIns="50800"/>
-            <a:lstStyle/>
-            <a:p>
-              <a:pPr algn="ctr" marL="0" indent="0" lvl="0">
-                <a:lnSpc>
-                  <a:spcPts val="2659"/>
-                </a:lnSpc>
-                <a:spcBef>
-                  <a:spcPct val="0"/>
-                </a:spcBef>
-              </a:pPr>
-            </a:p>
-          </p:txBody>
-        </p:sp>
-      </p:grpSp>
-      <p:sp>
-        <p:nvSpPr>
-          <p:cNvPr name="Freeform 16" id="16"/>
+      <p:sp>
+        <p:nvSpPr>
+          <p:cNvPr id="19" name="Freeform 19"/>
           <p:cNvSpPr/>
           <p:nvPr/>
         </p:nvSpPr>
         <p:spPr>
-          <a:xfrm flipH="false" flipV="false" rot="0">
-            <a:off x="638862" y="5313037"/>
-            <a:ext cx="779675" cy="718763"/>
+          <a:xfrm>
+            <a:off x="-1327786" y="8288732"/>
+            <a:ext cx="1766866" cy="969568"/>
           </a:xfrm>
           <a:custGeom>
             <a:avLst/>
             <a:gdLst/>
             <a:ahLst/>
             <a:cxnLst/>
-            <a:rect r="r" b="b" t="t" l="l"/>
+            <a:rect l="l" t="t" r="r" b="b"/>
             <a:pathLst>
-              <a:path h="718763" w="779675">
-                <a:moveTo>
-                  <a:pt x="0" y="0"/>
-                </a:moveTo>
-                <a:lnTo>
-                  <a:pt x="779676" y="0"/>
-                </a:lnTo>
-                <a:lnTo>
-                  <a:pt x="779676" y="718763"/>
-                </a:lnTo>
-                <a:lnTo>
-                  <a:pt x="0" y="718763"/>
-                </a:lnTo>
-                <a:lnTo>
-                  <a:pt x="0" y="0"/>
-                </a:lnTo>
-                <a:close/>
-              </a:path>
-            </a:pathLst>
-          </a:custGeom>
-          <a:blipFill>
-            <a:blip r:embed="rId4">
-              <a:extLst>
-                <a:ext uri="{96DAC541-7B7A-43D3-8B79-37D633B846F1}">
-                  <asvg:svgBlip xmlns:asvg="http://schemas.microsoft.com/office/drawing/2016/SVG/main" r:embed="rId5"/>
-                </a:ext>
-              </a:extLst>
-            </a:blip>
-            <a:stretch>
-              <a:fillRect l="-31484" t="-39236" r="-39297" b="-46019"/>
-            </a:stretch>
-          </a:blipFill>
-        </p:spPr>
-      </p:sp>
-      <p:sp>
-        <p:nvSpPr>
-          <p:cNvPr name="Freeform 17" id="17"/>
-          <p:cNvSpPr/>
-          <p:nvPr/>
-        </p:nvSpPr>
-        <p:spPr>
-          <a:xfrm flipH="false" flipV="false" rot="2599173">
-            <a:off x="16119968" y="1707782"/>
-            <a:ext cx="609542" cy="561922"/>
-          </a:xfrm>
-          <a:custGeom>
-            <a:avLst/>
-            <a:gdLst/>
-            <a:ahLst/>
-            <a:cxnLst/>
-            <a:rect r="r" b="b" t="t" l="l"/>
-            <a:pathLst>
-              <a:path h="561922" w="609542">
-                <a:moveTo>
-                  <a:pt x="0" y="0"/>
-                </a:moveTo>
-                <a:lnTo>
-                  <a:pt x="609542" y="0"/>
-                </a:lnTo>
-                <a:lnTo>
-                  <a:pt x="609542" y="561922"/>
-                </a:lnTo>
-                <a:lnTo>
-                  <a:pt x="0" y="561922"/>
-                </a:lnTo>
-                <a:lnTo>
-                  <a:pt x="0" y="0"/>
-                </a:lnTo>
-                <a:close/>
-              </a:path>
-            </a:pathLst>
-          </a:custGeom>
-          <a:blipFill>
-            <a:blip r:embed="rId4">
-              <a:extLst>
-                <a:ext uri="{96DAC541-7B7A-43D3-8B79-37D633B846F1}">
-                  <asvg:svgBlip xmlns:asvg="http://schemas.microsoft.com/office/drawing/2016/SVG/main" r:embed="rId5"/>
-                </a:ext>
-              </a:extLst>
-            </a:blip>
-            <a:stretch>
-              <a:fillRect l="-31484" t="-39236" r="-39297" b="-46019"/>
-            </a:stretch>
-          </a:blipFill>
-        </p:spPr>
-      </p:sp>
-      <p:sp>
-        <p:nvSpPr>
-          <p:cNvPr name="Freeform 18" id="18"/>
-          <p:cNvSpPr/>
-          <p:nvPr/>
-        </p:nvSpPr>
-        <p:spPr>
-          <a:xfrm flipH="false" flipV="false" rot="0">
-            <a:off x="9510142" y="8167271"/>
-            <a:ext cx="486056" cy="448083"/>
-          </a:xfrm>
-          <a:custGeom>
-            <a:avLst/>
-            <a:gdLst/>
-            <a:ahLst/>
-            <a:cxnLst/>
-            <a:rect r="r" b="b" t="t" l="l"/>
-            <a:pathLst>
-              <a:path h="448083" w="486056">
-                <a:moveTo>
-                  <a:pt x="0" y="0"/>
-                </a:moveTo>
-                <a:lnTo>
-                  <a:pt x="486057" y="0"/>
-                </a:lnTo>
-                <a:lnTo>
-                  <a:pt x="486057" y="448084"/>
-                </a:lnTo>
-                <a:lnTo>
-                  <a:pt x="0" y="448084"/>
-                </a:lnTo>
-                <a:lnTo>
-                  <a:pt x="0" y="0"/>
-                </a:lnTo>
-                <a:close/>
-              </a:path>
-            </a:pathLst>
-          </a:custGeom>
-          <a:blipFill>
-            <a:blip r:embed="rId4">
-              <a:extLst>
-                <a:ext uri="{96DAC541-7B7A-43D3-8B79-37D633B846F1}">
-                  <asvg:svgBlip xmlns:asvg="http://schemas.microsoft.com/office/drawing/2016/SVG/main" r:embed="rId5"/>
-                </a:ext>
-              </a:extLst>
-            </a:blip>
-            <a:stretch>
-              <a:fillRect l="-31484" t="-39236" r="-39297" b="-46019"/>
-            </a:stretch>
-          </a:blipFill>
-        </p:spPr>
-      </p:sp>
-      <p:sp>
-        <p:nvSpPr>
-          <p:cNvPr name="Freeform 19" id="19"/>
-          <p:cNvSpPr/>
-          <p:nvPr/>
-        </p:nvSpPr>
-        <p:spPr>
-          <a:xfrm flipH="false" flipV="false" rot="0">
-            <a:off x="-1327786" y="8288732"/>
-            <a:ext cx="1766866" cy="969568"/>
-          </a:xfrm>
-          <a:custGeom>
-            <a:avLst/>
-            <a:gdLst/>
-            <a:ahLst/>
-            <a:cxnLst/>
-            <a:rect r="r" b="b" t="t" l="l"/>
-            <a:pathLst>
-              <a:path h="969568" w="1766866">
+              <a:path w="1766866" h="969568">
                 <a:moveTo>
                   <a:pt x="0" y="0"/>
                 </a:moveTo>
@@ -3828,27 +3355,27 @@
             </a:pathLst>
           </a:custGeom>
           <a:blipFill>
-            <a:blip r:embed="rId6">
+            <a:blip r:embed="rId4">
               <a:extLst>
                 <a:ext uri="{96DAC541-7B7A-43D3-8B79-37D633B846F1}">
-                  <asvg:svgBlip xmlns:asvg="http://schemas.microsoft.com/office/drawing/2016/SVG/main" r:embed="rId7"/>
+                  <asvg:svgBlip xmlns:asvg="http://schemas.microsoft.com/office/drawing/2016/SVG/main" r:embed="rId5"/>
                 </a:ext>
               </a:extLst>
             </a:blip>
             <a:stretch>
-              <a:fillRect l="0" t="0" r="0" b="0"/>
+              <a:fillRect/>
             </a:stretch>
           </a:blipFill>
         </p:spPr>
       </p:sp>
       <p:sp>
         <p:nvSpPr>
-          <p:cNvPr name="Freeform 20" id="20"/>
+          <p:cNvPr id="20" name="Freeform 20"/>
           <p:cNvSpPr/>
           <p:nvPr/>
         </p:nvSpPr>
         <p:spPr>
-          <a:xfrm flipH="false" flipV="false" rot="0">
+          <a:xfrm>
             <a:off x="17404567" y="3896607"/>
             <a:ext cx="1766866" cy="969568"/>
           </a:xfrm>
@@ -3857,9 +3384,9 @@
             <a:gdLst/>
             <a:ahLst/>
             <a:cxnLst/>
-            <a:rect r="r" b="b" t="t" l="l"/>
+            <a:rect l="l" t="t" r="r" b="b"/>
             <a:pathLst>
-              <a:path h="969568" w="1766866">
+              <a:path w="1766866" h="969568">
                 <a:moveTo>
                   <a:pt x="0" y="0"/>
                 </a:moveTo>
@@ -3880,73 +3407,27 @@
             </a:pathLst>
           </a:custGeom>
           <a:blipFill>
-            <a:blip r:embed="rId6">
+            <a:blip r:embed="rId4">
               <a:extLst>
                 <a:ext uri="{96DAC541-7B7A-43D3-8B79-37D633B846F1}">
-                  <asvg:svgBlip xmlns:asvg="http://schemas.microsoft.com/office/drawing/2016/SVG/main" r:embed="rId7"/>
+                  <asvg:svgBlip xmlns:asvg="http://schemas.microsoft.com/office/drawing/2016/SVG/main" r:embed="rId5"/>
                 </a:ext>
               </a:extLst>
             </a:blip>
             <a:stretch>
-              <a:fillRect l="0" t="0" r="0" b="0"/>
+              <a:fillRect/>
             </a:stretch>
           </a:blipFill>
         </p:spPr>
       </p:sp>
       <p:sp>
         <p:nvSpPr>
-          <p:cNvPr name="Freeform 21" id="21"/>
-          <p:cNvSpPr/>
+          <p:cNvPr id="22" name="TextBox 22"/>
+          <p:cNvSpPr txBox="1"/>
           <p:nvPr/>
         </p:nvSpPr>
         <p:spPr>
-          <a:xfrm flipH="false" flipV="false" rot="0">
-            <a:off x="10998859" y="2089523"/>
-            <a:ext cx="4854133" cy="6163978"/>
-          </a:xfrm>
-          <a:custGeom>
-            <a:avLst/>
-            <a:gdLst/>
-            <a:ahLst/>
-            <a:cxnLst/>
-            <a:rect r="r" b="b" t="t" l="l"/>
-            <a:pathLst>
-              <a:path h="6163978" w="4854133">
-                <a:moveTo>
-                  <a:pt x="0" y="0"/>
-                </a:moveTo>
-                <a:lnTo>
-                  <a:pt x="4854132" y="0"/>
-                </a:lnTo>
-                <a:lnTo>
-                  <a:pt x="4854132" y="6163978"/>
-                </a:lnTo>
-                <a:lnTo>
-                  <a:pt x="0" y="6163978"/>
-                </a:lnTo>
-                <a:lnTo>
-                  <a:pt x="0" y="0"/>
-                </a:lnTo>
-                <a:close/>
-              </a:path>
-            </a:pathLst>
-          </a:custGeom>
-          <a:blipFill>
-            <a:blip r:embed="rId8"/>
-            <a:stretch>
-              <a:fillRect l="0" t="0" r="0" b="0"/>
-            </a:stretch>
-          </a:blipFill>
-        </p:spPr>
-      </p:sp>
-      <p:sp>
-        <p:nvSpPr>
-          <p:cNvPr name="TextBox 22" id="22"/>
-          <p:cNvSpPr txBox="true"/>
-          <p:nvPr/>
-        </p:nvSpPr>
-        <p:spPr>
-          <a:xfrm rot="0">
+          <a:xfrm>
             <a:off x="2283410" y="3268013"/>
             <a:ext cx="7328942" cy="1516132"/>
           </a:xfrm>
@@ -3955,18 +3436,18 @@
           </a:prstGeom>
         </p:spPr>
         <p:txBody>
-          <a:bodyPr anchor="t" rtlCol="false" tIns="0" lIns="0" bIns="0" rIns="0">
+          <a:bodyPr lIns="0" tIns="0" rIns="0" bIns="0" rtlCol="0" anchor="t">
             <a:spAutoFit/>
           </a:bodyPr>
           <a:lstStyle/>
           <a:p>
-            <a:pPr algn="l" marL="0" indent="0" lvl="0">
+            <a:pPr marL="0" lvl="0" indent="0" algn="l">
               <a:lnSpc>
                 <a:spcPts val="12373"/>
               </a:lnSpc>
             </a:pPr>
             <a:r>
-              <a:rPr lang="en-US" b="true" sz="8837" spc="-618">
+              <a:rPr lang="en-US" sz="8837" b="1" spc="-618" dirty="0">
                 <a:solidFill>
                   <a:srgbClr val="000000"/>
                 </a:solidFill>
@@ -3982,12 +3463,12 @@
       </p:sp>
       <p:sp>
         <p:nvSpPr>
-          <p:cNvPr name="TextBox 23" id="23"/>
-          <p:cNvSpPr txBox="true"/>
+          <p:cNvPr id="23" name="TextBox 23"/>
+          <p:cNvSpPr txBox="1"/>
           <p:nvPr/>
         </p:nvSpPr>
         <p:spPr>
-          <a:xfrm rot="0">
+          <a:xfrm>
             <a:off x="2283410" y="4687356"/>
             <a:ext cx="8006408" cy="2322266"/>
           </a:xfrm>
@@ -3996,18 +3477,18 @@
           </a:prstGeom>
         </p:spPr>
         <p:txBody>
-          <a:bodyPr anchor="t" rtlCol="false" tIns="0" lIns="0" bIns="0" rIns="0">
+          <a:bodyPr lIns="0" tIns="0" rIns="0" bIns="0" rtlCol="0" anchor="t">
             <a:spAutoFit/>
           </a:bodyPr>
           <a:lstStyle/>
           <a:p>
-            <a:pPr algn="l" marL="0" indent="0" lvl="0">
+            <a:pPr marL="0" lvl="0" indent="0" algn="l">
               <a:lnSpc>
                 <a:spcPts val="19021"/>
               </a:lnSpc>
             </a:pPr>
             <a:r>
-              <a:rPr lang="en-US" b="true" sz="13586" spc="-951">
+              <a:rPr lang="en-US" sz="13586" b="1" spc="-951" dirty="0">
                 <a:solidFill>
                   <a:srgbClr val="3972F0"/>
                 </a:solidFill>
@@ -4023,13 +3504,13 @@
       </p:sp>
       <p:sp>
         <p:nvSpPr>
-          <p:cNvPr name="TextBox 24" id="24"/>
-          <p:cNvSpPr txBox="true"/>
+          <p:cNvPr id="24" name="TextBox 24"/>
+          <p:cNvSpPr txBox="1"/>
           <p:nvPr/>
         </p:nvSpPr>
         <p:spPr>
-          <a:xfrm rot="0">
-            <a:off x="2283410" y="7269594"/>
+          <a:xfrm>
+            <a:off x="2590800" y="7357452"/>
             <a:ext cx="5258106" cy="303647"/>
           </a:xfrm>
           <a:prstGeom prst="rect">
@@ -4037,18 +3518,18 @@
           </a:prstGeom>
         </p:spPr>
         <p:txBody>
-          <a:bodyPr anchor="t" rtlCol="false" tIns="0" lIns="0" bIns="0" rIns="0">
+          <a:bodyPr lIns="0" tIns="0" rIns="0" bIns="0" rtlCol="0" anchor="t">
             <a:spAutoFit/>
           </a:bodyPr>
           <a:lstStyle/>
           <a:p>
-            <a:pPr algn="l" marL="0" indent="0" lvl="0">
+            <a:pPr marL="0" lvl="0" indent="0" algn="l">
               <a:lnSpc>
                 <a:spcPts val="2545"/>
               </a:lnSpc>
             </a:pPr>
             <a:r>
-              <a:rPr lang="en-US" sz="1818" i="true">
+              <a:rPr lang="en-US" sz="1818" i="1" dirty="0">
                 <a:solidFill>
                   <a:srgbClr val="707070"/>
                 </a:solidFill>
@@ -4057,7 +3538,7 @@
                 <a:cs typeface="Open Sauce Italics"/>
                 <a:sym typeface="Open Sauce Italics"/>
               </a:rPr>
-              <a:t>Understanding Digital Information Management</a:t>
+              <a:t>Lucas Augusto Hartmann</a:t>
             </a:r>
           </a:p>
         </p:txBody>
@@ -4071,7 +3552,7 @@
 </file>
 
 <file path=ppt/slides/slide2.xml><?xml version="1.0" encoding="utf-8"?>
-<p:sld xmlns:p="http://schemas.openxmlformats.org/presentationml/2006/main" xmlns:a="http://schemas.openxmlformats.org/drawingml/2006/main" xmlns:r="http://schemas.openxmlformats.org/officeDocument/2006/relationships">
+<p:sld xmlns:a="http://schemas.openxmlformats.org/drawingml/2006/main" xmlns:r="http://schemas.openxmlformats.org/officeDocument/2006/relationships" xmlns:p="http://schemas.openxmlformats.org/presentationml/2006/main">
   <p:cSld>
     <p:spTree>
       <p:nvGrpSpPr>
@@ -4087,126 +3568,14 @@
           <a:chExt cx="0" cy="0"/>
         </a:xfrm>
       </p:grpSpPr>
-      <p:grpSp>
-        <p:nvGrpSpPr>
-          <p:cNvPr name="Group 2" id="2"/>
-          <p:cNvGrpSpPr/>
-          <p:nvPr/>
-        </p:nvGrpSpPr>
-        <p:grpSpPr>
-          <a:xfrm rot="0">
-            <a:off x="8592695" y="1671337"/>
-            <a:ext cx="2785139" cy="2785139"/>
-            <a:chOff x="0" y="0"/>
-            <a:chExt cx="812800" cy="812800"/>
-          </a:xfrm>
-        </p:grpSpPr>
-        <p:sp>
-          <p:nvSpPr>
-            <p:cNvPr name="Freeform 3" id="3"/>
-            <p:cNvSpPr/>
-            <p:nvPr/>
-          </p:nvSpPr>
-          <p:spPr>
-            <a:xfrm flipH="false" flipV="false" rot="0">
-              <a:off x="0" y="0"/>
-              <a:ext cx="812800" cy="812800"/>
-            </a:xfrm>
-            <a:custGeom>
-              <a:avLst/>
-              <a:gdLst/>
-              <a:ahLst/>
-              <a:cxnLst/>
-              <a:rect r="r" b="b" t="t" l="l"/>
-              <a:pathLst>
-                <a:path h="812800" w="812800">
-                  <a:moveTo>
-                    <a:pt x="406400" y="0"/>
-                  </a:moveTo>
-                  <a:cubicBezTo>
-                    <a:pt x="181951" y="0"/>
-                    <a:pt x="0" y="181951"/>
-                    <a:pt x="0" y="406400"/>
-                  </a:cubicBezTo>
-                  <a:cubicBezTo>
-                    <a:pt x="0" y="630849"/>
-                    <a:pt x="181951" y="812800"/>
-                    <a:pt x="406400" y="812800"/>
-                  </a:cubicBezTo>
-                  <a:cubicBezTo>
-                    <a:pt x="630849" y="812800"/>
-                    <a:pt x="812800" y="630849"/>
-                    <a:pt x="812800" y="406400"/>
-                  </a:cubicBezTo>
-                  <a:cubicBezTo>
-                    <a:pt x="812800" y="181951"/>
-                    <a:pt x="630849" y="0"/>
-                    <a:pt x="406400" y="0"/>
-                  </a:cubicBezTo>
-                  <a:close/>
-                </a:path>
-              </a:pathLst>
-            </a:custGeom>
-            <a:ln w="628650" cap="sq">
-              <a:gradFill>
-                <a:gsLst>
-                  <a:gs pos="0">
-                    <a:srgbClr val="3972F0">
-                      <a:alpha val="100000"/>
-                    </a:srgbClr>
-                  </a:gs>
-                  <a:gs pos="100000">
-                    <a:srgbClr val="1CDAFF">
-                      <a:alpha val="100000"/>
-                    </a:srgbClr>
-                  </a:gs>
-                </a:gsLst>
-                <a:lin ang="5400000"/>
-              </a:gradFill>
-              <a:prstDash val="solid"/>
-              <a:miter/>
-            </a:ln>
-          </p:spPr>
-        </p:sp>
-        <p:sp>
-          <p:nvSpPr>
-            <p:cNvPr name="TextBox 4" id="4"/>
-            <p:cNvSpPr txBox="true"/>
-            <p:nvPr/>
-          </p:nvSpPr>
-          <p:spPr>
-            <a:xfrm>
-              <a:off x="76200" y="38100"/>
-              <a:ext cx="660400" cy="698500"/>
-            </a:xfrm>
-            <a:prstGeom prst="rect">
-              <a:avLst/>
-            </a:prstGeom>
-          </p:spPr>
-          <p:txBody>
-            <a:bodyPr anchor="ctr" rtlCol="false" tIns="50800" lIns="50800" bIns="50800" rIns="50800"/>
-            <a:lstStyle/>
-            <a:p>
-              <a:pPr algn="ctr" marL="0" indent="0" lvl="0">
-                <a:lnSpc>
-                  <a:spcPts val="2659"/>
-                </a:lnSpc>
-                <a:spcBef>
-                  <a:spcPct val="0"/>
-                </a:spcBef>
-              </a:pPr>
-            </a:p>
-          </p:txBody>
-        </p:sp>
-      </p:grpSp>
-      <p:sp>
-        <p:nvSpPr>
-          <p:cNvPr name="Freeform 5" id="5"/>
+      <p:sp>
+        <p:nvSpPr>
+          <p:cNvPr id="5" name="Freeform 5"/>
           <p:cNvSpPr/>
           <p:nvPr/>
         </p:nvSpPr>
         <p:spPr>
-          <a:xfrm flipH="false" flipV="false" rot="0">
+          <a:xfrm>
             <a:off x="11377835" y="-7250246"/>
             <a:ext cx="9529995" cy="9529995"/>
           </a:xfrm>
@@ -4215,9 +3584,9 @@
             <a:gdLst/>
             <a:ahLst/>
             <a:cxnLst/>
-            <a:rect r="r" b="b" t="t" l="l"/>
+            <a:rect l="l" t="t" r="r" b="b"/>
             <a:pathLst>
-              <a:path h="9529995" w="9529995">
+              <a:path w="9529995" h="9529995">
                 <a:moveTo>
                   <a:pt x="0" y="0"/>
                 </a:moveTo>
@@ -4247,19 +3616,19 @@
               </a:extLst>
             </a:blip>
             <a:stretch>
-              <a:fillRect l="0" t="0" r="0" b="0"/>
+              <a:fillRect/>
             </a:stretch>
           </a:blipFill>
         </p:spPr>
       </p:sp>
       <p:grpSp>
         <p:nvGrpSpPr>
-          <p:cNvPr name="Group 6" id="6"/>
+          <p:cNvPr id="6" name="Group 6"/>
           <p:cNvGrpSpPr/>
           <p:nvPr/>
         </p:nvGrpSpPr>
         <p:grpSpPr>
-          <a:xfrm rot="0">
+          <a:xfrm>
             <a:off x="2200064" y="6914465"/>
             <a:ext cx="3405634" cy="908329"/>
             <a:chOff x="0" y="0"/>
@@ -4268,12 +3637,12 @@
         </p:grpSpPr>
         <p:sp>
           <p:nvSpPr>
-            <p:cNvPr name="Freeform 7" id="7"/>
+            <p:cNvPr id="7" name="Freeform 7"/>
             <p:cNvSpPr/>
             <p:nvPr/>
           </p:nvSpPr>
           <p:spPr>
-            <a:xfrm flipH="false" flipV="false" rot="0">
+            <a:xfrm>
               <a:off x="0" y="0"/>
               <a:ext cx="979405" cy="261221"/>
             </a:xfrm>
@@ -4282,9 +3651,9 @@
               <a:gdLst/>
               <a:ahLst/>
               <a:cxnLst/>
-              <a:rect r="r" b="b" t="t" l="l"/>
+              <a:rect l="l" t="t" r="r" b="b"/>
               <a:pathLst>
-                <a:path h="261221" w="979405">
+                <a:path w="979405" h="261221">
                   <a:moveTo>
                     <a:pt x="38646" y="0"/>
                   </a:moveTo>
@@ -4346,8 +3715,8 @@
         </p:sp>
         <p:sp>
           <p:nvSpPr>
-            <p:cNvPr name="TextBox 8" id="8"/>
-            <p:cNvSpPr txBox="true"/>
+            <p:cNvPr id="8" name="TextBox 8"/>
+            <p:cNvSpPr txBox="1"/>
             <p:nvPr/>
           </p:nvSpPr>
           <p:spPr>
@@ -4360,26 +3729,27 @@
             </a:prstGeom>
           </p:spPr>
           <p:txBody>
-            <a:bodyPr anchor="ctr" rtlCol="false" tIns="50800" lIns="50800" bIns="50800" rIns="50800"/>
+            <a:bodyPr lIns="50800" tIns="50800" rIns="50800" bIns="50800" rtlCol="0" anchor="ctr"/>
             <a:lstStyle/>
             <a:p>
-              <a:pPr algn="ctr" marL="0" indent="0" lvl="0">
+              <a:pPr marL="0" lvl="0" indent="0" algn="ctr">
                 <a:lnSpc>
                   <a:spcPts val="2659"/>
                 </a:lnSpc>
               </a:pPr>
+              <a:endParaRPr/>
             </a:p>
           </p:txBody>
         </p:sp>
       </p:grpSp>
       <p:grpSp>
         <p:nvGrpSpPr>
-          <p:cNvPr name="Group 9" id="9"/>
+          <p:cNvPr id="9" name="Group 9"/>
           <p:cNvGrpSpPr/>
           <p:nvPr/>
         </p:nvGrpSpPr>
         <p:grpSpPr>
-          <a:xfrm rot="0">
+          <a:xfrm>
             <a:off x="2200064" y="8119382"/>
             <a:ext cx="3405634" cy="908329"/>
             <a:chOff x="0" y="0"/>
@@ -4388,12 +3758,12 @@
         </p:grpSpPr>
         <p:sp>
           <p:nvSpPr>
-            <p:cNvPr name="Freeform 10" id="10"/>
+            <p:cNvPr id="10" name="Freeform 10"/>
             <p:cNvSpPr/>
             <p:nvPr/>
           </p:nvSpPr>
           <p:spPr>
-            <a:xfrm flipH="false" flipV="false" rot="0">
+            <a:xfrm>
               <a:off x="0" y="0"/>
               <a:ext cx="979405" cy="261221"/>
             </a:xfrm>
@@ -4402,9 +3772,9 @@
               <a:gdLst/>
               <a:ahLst/>
               <a:cxnLst/>
-              <a:rect r="r" b="b" t="t" l="l"/>
+              <a:rect l="l" t="t" r="r" b="b"/>
               <a:pathLst>
-                <a:path h="261221" w="979405">
+                <a:path w="979405" h="261221">
                   <a:moveTo>
                     <a:pt x="38646" y="0"/>
                   </a:moveTo>
@@ -4466,8 +3836,8 @@
         </p:sp>
         <p:sp>
           <p:nvSpPr>
-            <p:cNvPr name="TextBox 11" id="11"/>
-            <p:cNvSpPr txBox="true"/>
+            <p:cNvPr id="11" name="TextBox 11"/>
+            <p:cNvSpPr txBox="1"/>
             <p:nvPr/>
           </p:nvSpPr>
           <p:spPr>
@@ -4480,26 +3850,27 @@
             </a:prstGeom>
           </p:spPr>
           <p:txBody>
-            <a:bodyPr anchor="ctr" rtlCol="false" tIns="50800" lIns="50800" bIns="50800" rIns="50800"/>
+            <a:bodyPr lIns="50800" tIns="50800" rIns="50800" bIns="50800" rtlCol="0" anchor="ctr"/>
             <a:lstStyle/>
             <a:p>
-              <a:pPr algn="ctr" marL="0" indent="0" lvl="0">
+              <a:pPr marL="0" lvl="0" indent="0" algn="ctr">
                 <a:lnSpc>
                   <a:spcPts val="2659"/>
                 </a:lnSpc>
               </a:pPr>
+              <a:endParaRPr/>
             </a:p>
           </p:txBody>
         </p:sp>
       </p:grpSp>
       <p:grpSp>
         <p:nvGrpSpPr>
-          <p:cNvPr name="Group 12" id="12"/>
+          <p:cNvPr id="12" name="Group 12"/>
           <p:cNvGrpSpPr/>
           <p:nvPr/>
         </p:nvGrpSpPr>
         <p:grpSpPr>
-          <a:xfrm rot="0">
+          <a:xfrm>
             <a:off x="9744163" y="6914465"/>
             <a:ext cx="3405634" cy="908329"/>
             <a:chOff x="0" y="0"/>
@@ -4508,12 +3879,12 @@
         </p:grpSpPr>
         <p:sp>
           <p:nvSpPr>
-            <p:cNvPr name="Freeform 13" id="13"/>
+            <p:cNvPr id="13" name="Freeform 13"/>
             <p:cNvSpPr/>
             <p:nvPr/>
           </p:nvSpPr>
           <p:spPr>
-            <a:xfrm flipH="false" flipV="false" rot="0">
+            <a:xfrm>
               <a:off x="0" y="0"/>
               <a:ext cx="979405" cy="261221"/>
             </a:xfrm>
@@ -4522,9 +3893,9 @@
               <a:gdLst/>
               <a:ahLst/>
               <a:cxnLst/>
-              <a:rect r="r" b="b" t="t" l="l"/>
+              <a:rect l="l" t="t" r="r" b="b"/>
               <a:pathLst>
-                <a:path h="261221" w="979405">
+                <a:path w="979405" h="261221">
                   <a:moveTo>
                     <a:pt x="38646" y="0"/>
                   </a:moveTo>
@@ -4586,8 +3957,8 @@
         </p:sp>
         <p:sp>
           <p:nvSpPr>
-            <p:cNvPr name="TextBox 14" id="14"/>
-            <p:cNvSpPr txBox="true"/>
+            <p:cNvPr id="14" name="TextBox 14"/>
+            <p:cNvSpPr txBox="1"/>
             <p:nvPr/>
           </p:nvSpPr>
           <p:spPr>
@@ -4600,26 +3971,27 @@
             </a:prstGeom>
           </p:spPr>
           <p:txBody>
-            <a:bodyPr anchor="ctr" rtlCol="false" tIns="50800" lIns="50800" bIns="50800" rIns="50800"/>
+            <a:bodyPr lIns="50800" tIns="50800" rIns="50800" bIns="50800" rtlCol="0" anchor="ctr"/>
             <a:lstStyle/>
             <a:p>
-              <a:pPr algn="ctr" marL="0" indent="0" lvl="0">
+              <a:pPr marL="0" lvl="0" indent="0" algn="ctr">
                 <a:lnSpc>
                   <a:spcPts val="2659"/>
                 </a:lnSpc>
               </a:pPr>
+              <a:endParaRPr/>
             </a:p>
           </p:txBody>
         </p:sp>
       </p:grpSp>
       <p:grpSp>
         <p:nvGrpSpPr>
-          <p:cNvPr name="Group 15" id="15"/>
+          <p:cNvPr id="15" name="Group 15"/>
           <p:cNvGrpSpPr/>
           <p:nvPr/>
         </p:nvGrpSpPr>
         <p:grpSpPr>
-          <a:xfrm rot="0">
+          <a:xfrm>
             <a:off x="9744163" y="8119382"/>
             <a:ext cx="3405634" cy="908329"/>
             <a:chOff x="0" y="0"/>
@@ -4628,12 +4000,12 @@
         </p:grpSpPr>
         <p:sp>
           <p:nvSpPr>
-            <p:cNvPr name="Freeform 16" id="16"/>
+            <p:cNvPr id="16" name="Freeform 16"/>
             <p:cNvSpPr/>
             <p:nvPr/>
           </p:nvSpPr>
           <p:spPr>
-            <a:xfrm flipH="false" flipV="false" rot="0">
+            <a:xfrm>
               <a:off x="0" y="0"/>
               <a:ext cx="979405" cy="261221"/>
             </a:xfrm>
@@ -4642,9 +4014,9 @@
               <a:gdLst/>
               <a:ahLst/>
               <a:cxnLst/>
-              <a:rect r="r" b="b" t="t" l="l"/>
+              <a:rect l="l" t="t" r="r" b="b"/>
               <a:pathLst>
-                <a:path h="261221" w="979405">
+                <a:path w="979405" h="261221">
                   <a:moveTo>
                     <a:pt x="38646" y="0"/>
                   </a:moveTo>
@@ -4706,8 +4078,8 @@
         </p:sp>
         <p:sp>
           <p:nvSpPr>
-            <p:cNvPr name="TextBox 17" id="17"/>
-            <p:cNvSpPr txBox="true"/>
+            <p:cNvPr id="17" name="TextBox 17"/>
+            <p:cNvSpPr txBox="1"/>
             <p:nvPr/>
           </p:nvSpPr>
           <p:spPr>
@@ -4720,26 +4092,27 @@
             </a:prstGeom>
           </p:spPr>
           <p:txBody>
-            <a:bodyPr anchor="ctr" rtlCol="false" tIns="50800" lIns="50800" bIns="50800" rIns="50800"/>
+            <a:bodyPr lIns="50800" tIns="50800" rIns="50800" bIns="50800" rtlCol="0" anchor="ctr"/>
             <a:lstStyle/>
             <a:p>
-              <a:pPr algn="ctr" marL="0" indent="0" lvl="0">
+              <a:pPr marL="0" lvl="0" indent="0" algn="ctr">
                 <a:lnSpc>
                   <a:spcPts val="2659"/>
                 </a:lnSpc>
               </a:pPr>
+              <a:endParaRPr/>
             </a:p>
           </p:txBody>
         </p:sp>
       </p:grpSp>
       <p:grpSp>
         <p:nvGrpSpPr>
-          <p:cNvPr name="Group 18" id="18"/>
+          <p:cNvPr id="18" name="Group 18"/>
           <p:cNvGrpSpPr/>
           <p:nvPr/>
         </p:nvGrpSpPr>
         <p:grpSpPr>
-          <a:xfrm rot="0">
+          <a:xfrm>
             <a:off x="5974138" y="6914465"/>
             <a:ext cx="3405634" cy="908329"/>
             <a:chOff x="0" y="0"/>
@@ -4748,12 +4121,12 @@
         </p:grpSpPr>
         <p:sp>
           <p:nvSpPr>
-            <p:cNvPr name="Freeform 19" id="19"/>
+            <p:cNvPr id="19" name="Freeform 19"/>
             <p:cNvSpPr/>
             <p:nvPr/>
           </p:nvSpPr>
           <p:spPr>
-            <a:xfrm flipH="false" flipV="false" rot="0">
+            <a:xfrm>
               <a:off x="0" y="0"/>
               <a:ext cx="979405" cy="261221"/>
             </a:xfrm>
@@ -4762,9 +4135,9 @@
               <a:gdLst/>
               <a:ahLst/>
               <a:cxnLst/>
-              <a:rect r="r" b="b" t="t" l="l"/>
+              <a:rect l="l" t="t" r="r" b="b"/>
               <a:pathLst>
-                <a:path h="261221" w="979405">
+                <a:path w="979405" h="261221">
                   <a:moveTo>
                     <a:pt x="38646" y="0"/>
                   </a:moveTo>
@@ -4826,8 +4199,8 @@
         </p:sp>
         <p:sp>
           <p:nvSpPr>
-            <p:cNvPr name="TextBox 20" id="20"/>
-            <p:cNvSpPr txBox="true"/>
+            <p:cNvPr id="20" name="TextBox 20"/>
+            <p:cNvSpPr txBox="1"/>
             <p:nvPr/>
           </p:nvSpPr>
           <p:spPr>
@@ -4840,26 +4213,27 @@
             </a:prstGeom>
           </p:spPr>
           <p:txBody>
-            <a:bodyPr anchor="ctr" rtlCol="false" tIns="50800" lIns="50800" bIns="50800" rIns="50800"/>
+            <a:bodyPr lIns="50800" tIns="50800" rIns="50800" bIns="50800" rtlCol="0" anchor="ctr"/>
             <a:lstStyle/>
             <a:p>
-              <a:pPr algn="ctr" marL="0" indent="0" lvl="0">
+              <a:pPr marL="0" lvl="0" indent="0" algn="ctr">
                 <a:lnSpc>
                   <a:spcPts val="2659"/>
                 </a:lnSpc>
               </a:pPr>
+              <a:endParaRPr/>
             </a:p>
           </p:txBody>
         </p:sp>
       </p:grpSp>
       <p:grpSp>
         <p:nvGrpSpPr>
-          <p:cNvPr name="Group 21" id="21"/>
+          <p:cNvPr id="21" name="Group 21"/>
           <p:cNvGrpSpPr/>
           <p:nvPr/>
         </p:nvGrpSpPr>
         <p:grpSpPr>
-          <a:xfrm rot="0">
+          <a:xfrm>
             <a:off x="5974138" y="8119382"/>
             <a:ext cx="3405634" cy="908329"/>
             <a:chOff x="0" y="0"/>
@@ -4868,12 +4242,12 @@
         </p:grpSpPr>
         <p:sp>
           <p:nvSpPr>
-            <p:cNvPr name="Freeform 22" id="22"/>
+            <p:cNvPr id="22" name="Freeform 22"/>
             <p:cNvSpPr/>
             <p:nvPr/>
           </p:nvSpPr>
           <p:spPr>
-            <a:xfrm flipH="false" flipV="false" rot="0">
+            <a:xfrm>
               <a:off x="0" y="0"/>
               <a:ext cx="979405" cy="261221"/>
             </a:xfrm>
@@ -4882,9 +4256,9 @@
               <a:gdLst/>
               <a:ahLst/>
               <a:cxnLst/>
-              <a:rect r="r" b="b" t="t" l="l"/>
+              <a:rect l="l" t="t" r="r" b="b"/>
               <a:pathLst>
-                <a:path h="261221" w="979405">
+                <a:path w="979405" h="261221">
                   <a:moveTo>
                     <a:pt x="38646" y="0"/>
                   </a:moveTo>
@@ -4946,8 +4320,8 @@
         </p:sp>
         <p:sp>
           <p:nvSpPr>
-            <p:cNvPr name="TextBox 23" id="23"/>
-            <p:cNvSpPr txBox="true"/>
+            <p:cNvPr id="23" name="TextBox 23"/>
+            <p:cNvSpPr txBox="1"/>
             <p:nvPr/>
           </p:nvSpPr>
           <p:spPr>
@@ -4960,148 +4334,41 @@
             </a:prstGeom>
           </p:spPr>
           <p:txBody>
-            <a:bodyPr anchor="ctr" rtlCol="false" tIns="50800" lIns="50800" bIns="50800" rIns="50800"/>
+            <a:bodyPr lIns="50800" tIns="50800" rIns="50800" bIns="50800" rtlCol="0" anchor="ctr"/>
             <a:lstStyle/>
             <a:p>
-              <a:pPr algn="ctr" marL="0" indent="0" lvl="0">
+              <a:pPr marL="0" lvl="0" indent="0" algn="ctr">
                 <a:lnSpc>
                   <a:spcPts val="2659"/>
                 </a:lnSpc>
               </a:pPr>
+              <a:endParaRPr/>
             </a:p>
           </p:txBody>
         </p:sp>
       </p:grpSp>
       <p:grpSp>
         <p:nvGrpSpPr>
-          <p:cNvPr name="Group 24" id="24"/>
+          <p:cNvPr id="27" name="Group 27"/>
           <p:cNvGrpSpPr/>
           <p:nvPr/>
         </p:nvGrpSpPr>
         <p:grpSpPr>
-          <a:xfrm rot="0">
-            <a:off x="16142832" y="7822794"/>
-            <a:ext cx="1673561" cy="1673561"/>
+          <a:xfrm>
+            <a:off x="13518237" y="6914465"/>
+            <a:ext cx="3405634" cy="908329"/>
             <a:chOff x="0" y="0"/>
-            <a:chExt cx="812800" cy="812800"/>
+            <a:chExt cx="979405" cy="261221"/>
           </a:xfrm>
         </p:grpSpPr>
         <p:sp>
           <p:nvSpPr>
-            <p:cNvPr name="Freeform 25" id="25"/>
+            <p:cNvPr id="28" name="Freeform 28"/>
             <p:cNvSpPr/>
             <p:nvPr/>
           </p:nvSpPr>
           <p:spPr>
-            <a:xfrm flipH="false" flipV="false" rot="0">
-              <a:off x="0" y="0"/>
-              <a:ext cx="812800" cy="812800"/>
-            </a:xfrm>
-            <a:custGeom>
-              <a:avLst/>
-              <a:gdLst/>
-              <a:ahLst/>
-              <a:cxnLst/>
-              <a:rect r="r" b="b" t="t" l="l"/>
-              <a:pathLst>
-                <a:path h="812800" w="812800">
-                  <a:moveTo>
-                    <a:pt x="406400" y="0"/>
-                  </a:moveTo>
-                  <a:cubicBezTo>
-                    <a:pt x="181951" y="0"/>
-                    <a:pt x="0" y="181951"/>
-                    <a:pt x="0" y="406400"/>
-                  </a:cubicBezTo>
-                  <a:cubicBezTo>
-                    <a:pt x="0" y="630849"/>
-                    <a:pt x="181951" y="812800"/>
-                    <a:pt x="406400" y="812800"/>
-                  </a:cubicBezTo>
-                  <a:cubicBezTo>
-                    <a:pt x="630849" y="812800"/>
-                    <a:pt x="812800" y="630849"/>
-                    <a:pt x="812800" y="406400"/>
-                  </a:cubicBezTo>
-                  <a:cubicBezTo>
-                    <a:pt x="812800" y="181951"/>
-                    <a:pt x="630849" y="0"/>
-                    <a:pt x="406400" y="0"/>
-                  </a:cubicBezTo>
-                  <a:close/>
-                </a:path>
-              </a:pathLst>
-            </a:custGeom>
-            <a:gradFill rotWithShape="true">
-              <a:gsLst>
-                <a:gs pos="0">
-                  <a:srgbClr val="3972F0">
-                    <a:alpha val="100000"/>
-                  </a:srgbClr>
-                </a:gs>
-                <a:gs pos="100000">
-                  <a:srgbClr val="1CDAFF">
-                    <a:alpha val="100000"/>
-                  </a:srgbClr>
-                </a:gs>
-              </a:gsLst>
-              <a:lin ang="5400000"/>
-            </a:gradFill>
-          </p:spPr>
-        </p:sp>
-        <p:sp>
-          <p:nvSpPr>
-            <p:cNvPr name="TextBox 26" id="26"/>
-            <p:cNvSpPr txBox="true"/>
-            <p:nvPr/>
-          </p:nvSpPr>
-          <p:spPr>
             <a:xfrm>
-              <a:off x="76200" y="38100"/>
-              <a:ext cx="660400" cy="698500"/>
-            </a:xfrm>
-            <a:prstGeom prst="rect">
-              <a:avLst/>
-            </a:prstGeom>
-          </p:spPr>
-          <p:txBody>
-            <a:bodyPr anchor="ctr" rtlCol="false" tIns="50800" lIns="50800" bIns="50800" rIns="50800"/>
-            <a:lstStyle/>
-            <a:p>
-              <a:pPr algn="ctr" marL="0" indent="0" lvl="0">
-                <a:lnSpc>
-                  <a:spcPts val="2659"/>
-                </a:lnSpc>
-                <a:spcBef>
-                  <a:spcPct val="0"/>
-                </a:spcBef>
-              </a:pPr>
-            </a:p>
-          </p:txBody>
-        </p:sp>
-      </p:grpSp>
-      <p:grpSp>
-        <p:nvGrpSpPr>
-          <p:cNvPr name="Group 27" id="27"/>
-          <p:cNvGrpSpPr/>
-          <p:nvPr/>
-        </p:nvGrpSpPr>
-        <p:grpSpPr>
-          <a:xfrm rot="0">
-            <a:off x="13518237" y="6914465"/>
-            <a:ext cx="3405634" cy="908329"/>
-            <a:chOff x="0" y="0"/>
-            <a:chExt cx="979405" cy="261221"/>
-          </a:xfrm>
-        </p:grpSpPr>
-        <p:sp>
-          <p:nvSpPr>
-            <p:cNvPr name="Freeform 28" id="28"/>
-            <p:cNvSpPr/>
-            <p:nvPr/>
-          </p:nvSpPr>
-          <p:spPr>
-            <a:xfrm flipH="false" flipV="false" rot="0">
               <a:off x="0" y="0"/>
               <a:ext cx="979405" cy="261221"/>
             </a:xfrm>
@@ -5110,9 +4377,9 @@
               <a:gdLst/>
               <a:ahLst/>
               <a:cxnLst/>
-              <a:rect r="r" b="b" t="t" l="l"/>
+              <a:rect l="l" t="t" r="r" b="b"/>
               <a:pathLst>
-                <a:path h="261221" w="979405">
+                <a:path w="979405" h="261221">
                   <a:moveTo>
                     <a:pt x="38646" y="0"/>
                   </a:moveTo>
@@ -5174,8 +4441,8 @@
         </p:sp>
         <p:sp>
           <p:nvSpPr>
-            <p:cNvPr name="TextBox 29" id="29"/>
-            <p:cNvSpPr txBox="true"/>
+            <p:cNvPr id="29" name="TextBox 29"/>
+            <p:cNvSpPr txBox="1"/>
             <p:nvPr/>
           </p:nvSpPr>
           <p:spPr>
@@ -5188,26 +4455,27 @@
             </a:prstGeom>
           </p:spPr>
           <p:txBody>
-            <a:bodyPr anchor="ctr" rtlCol="false" tIns="50800" lIns="50800" bIns="50800" rIns="50800"/>
+            <a:bodyPr lIns="50800" tIns="50800" rIns="50800" bIns="50800" rtlCol="0" anchor="ctr"/>
             <a:lstStyle/>
             <a:p>
-              <a:pPr algn="ctr" marL="0" indent="0" lvl="0">
+              <a:pPr marL="0" lvl="0" indent="0" algn="ctr">
                 <a:lnSpc>
                   <a:spcPts val="2659"/>
                 </a:lnSpc>
               </a:pPr>
+              <a:endParaRPr/>
             </a:p>
           </p:txBody>
         </p:sp>
       </p:grpSp>
       <p:grpSp>
         <p:nvGrpSpPr>
-          <p:cNvPr name="Group 30" id="30"/>
+          <p:cNvPr id="30" name="Group 30"/>
           <p:cNvGrpSpPr/>
           <p:nvPr/>
         </p:nvGrpSpPr>
         <p:grpSpPr>
-          <a:xfrm rot="0">
+          <a:xfrm>
             <a:off x="13518237" y="8119382"/>
             <a:ext cx="3405634" cy="908329"/>
             <a:chOff x="0" y="0"/>
@@ -5216,12 +4484,12 @@
         </p:grpSpPr>
         <p:sp>
           <p:nvSpPr>
-            <p:cNvPr name="Freeform 31" id="31"/>
+            <p:cNvPr id="31" name="Freeform 31"/>
             <p:cNvSpPr/>
             <p:nvPr/>
           </p:nvSpPr>
           <p:spPr>
-            <a:xfrm flipH="false" flipV="false" rot="0">
+            <a:xfrm>
               <a:off x="0" y="0"/>
               <a:ext cx="979405" cy="261221"/>
             </a:xfrm>
@@ -5230,9 +4498,9 @@
               <a:gdLst/>
               <a:ahLst/>
               <a:cxnLst/>
-              <a:rect r="r" b="b" t="t" l="l"/>
+              <a:rect l="l" t="t" r="r" b="b"/>
               <a:pathLst>
-                <a:path h="261221" w="979405">
+                <a:path w="979405" h="261221">
                   <a:moveTo>
                     <a:pt x="38646" y="0"/>
                   </a:moveTo>
@@ -5294,8 +4562,8 @@
         </p:sp>
         <p:sp>
           <p:nvSpPr>
-            <p:cNvPr name="TextBox 32" id="32"/>
-            <p:cNvSpPr txBox="true"/>
+            <p:cNvPr id="32" name="TextBox 32"/>
+            <p:cNvSpPr txBox="1"/>
             <p:nvPr/>
           </p:nvSpPr>
           <p:spPr>
@@ -5308,26 +4576,27 @@
             </a:prstGeom>
           </p:spPr>
           <p:txBody>
-            <a:bodyPr anchor="ctr" rtlCol="false" tIns="50800" lIns="50800" bIns="50800" rIns="50800"/>
+            <a:bodyPr lIns="50800" tIns="50800" rIns="50800" bIns="50800" rtlCol="0" anchor="ctr"/>
             <a:lstStyle/>
             <a:p>
-              <a:pPr algn="ctr" marL="0" indent="0" lvl="0">
+              <a:pPr marL="0" lvl="0" indent="0" algn="ctr">
                 <a:lnSpc>
                   <a:spcPts val="2659"/>
                 </a:lnSpc>
               </a:pPr>
+              <a:endParaRPr/>
             </a:p>
           </p:txBody>
         </p:sp>
       </p:grpSp>
       <p:sp>
         <p:nvSpPr>
-          <p:cNvPr name="Freeform 33" id="33"/>
+          <p:cNvPr id="33" name="Freeform 33"/>
           <p:cNvSpPr/>
           <p:nvPr/>
         </p:nvSpPr>
         <p:spPr>
-          <a:xfrm flipH="false" flipV="false" rot="0">
+          <a:xfrm>
             <a:off x="16875807" y="1480173"/>
             <a:ext cx="1766866" cy="969568"/>
           </a:xfrm>
@@ -5336,9 +4605,9 @@
             <a:gdLst/>
             <a:ahLst/>
             <a:cxnLst/>
-            <a:rect r="r" b="b" t="t" l="l"/>
+            <a:rect l="l" t="t" r="r" b="b"/>
             <a:pathLst>
-              <a:path h="969568" w="1766866">
+              <a:path w="1766866" h="969568">
                 <a:moveTo>
                   <a:pt x="0" y="0"/>
                 </a:moveTo>
@@ -5367,19 +4636,19 @@
               </a:extLst>
             </a:blip>
             <a:stretch>
-              <a:fillRect l="0" t="0" r="0" b="0"/>
+              <a:fillRect/>
             </a:stretch>
           </a:blipFill>
         </p:spPr>
       </p:sp>
       <p:sp>
         <p:nvSpPr>
-          <p:cNvPr name="Freeform 34" id="34"/>
+          <p:cNvPr id="34" name="Freeform 34"/>
           <p:cNvSpPr/>
           <p:nvPr/>
         </p:nvSpPr>
         <p:spPr>
-          <a:xfrm flipH="false" flipV="false" rot="0">
+          <a:xfrm>
             <a:off x="61722" y="8808782"/>
             <a:ext cx="1766866" cy="969568"/>
           </a:xfrm>
@@ -5388,9 +4657,9 @@
             <a:gdLst/>
             <a:ahLst/>
             <a:cxnLst/>
-            <a:rect r="r" b="b" t="t" l="l"/>
+            <a:rect l="l" t="t" r="r" b="b"/>
             <a:pathLst>
-              <a:path h="969568" w="1766866">
+              <a:path w="1766866" h="969568">
                 <a:moveTo>
                   <a:pt x="0" y="0"/>
                 </a:moveTo>
@@ -5419,19 +4688,19 @@
               </a:extLst>
             </a:blip>
             <a:stretch>
-              <a:fillRect l="0" t="0" r="0" b="0"/>
+              <a:fillRect/>
             </a:stretch>
           </a:blipFill>
         </p:spPr>
       </p:sp>
       <p:grpSp>
         <p:nvGrpSpPr>
-          <p:cNvPr name="Group 35" id="35"/>
+          <p:cNvPr id="35" name="Group 35"/>
           <p:cNvGrpSpPr/>
           <p:nvPr/>
         </p:nvGrpSpPr>
         <p:grpSpPr>
-          <a:xfrm rot="0">
+          <a:xfrm>
             <a:off x="-17259300" y="-1690561"/>
             <a:ext cx="17966065" cy="12844173"/>
             <a:chOff x="0" y="0"/>
@@ -5440,12 +4709,12 @@
         </p:grpSpPr>
         <p:sp>
           <p:nvSpPr>
-            <p:cNvPr name="Freeform 36" id="36"/>
+            <p:cNvPr id="36" name="Freeform 36"/>
             <p:cNvSpPr/>
             <p:nvPr/>
           </p:nvSpPr>
           <p:spPr>
-            <a:xfrm flipH="false" flipV="false" rot="0">
+            <a:xfrm>
               <a:off x="0" y="0"/>
               <a:ext cx="4731803" cy="3382827"/>
             </a:xfrm>
@@ -5454,9 +4723,9 @@
               <a:gdLst/>
               <a:ahLst/>
               <a:cxnLst/>
-              <a:rect r="r" b="b" t="t" l="l"/>
+              <a:rect l="l" t="t" r="r" b="b"/>
               <a:pathLst>
-                <a:path h="3382827" w="4731803">
+                <a:path w="4731803" h="3382827">
                   <a:moveTo>
                     <a:pt x="21977" y="0"/>
                   </a:moveTo>
@@ -5523,8 +4792,8 @@
         </p:sp>
         <p:sp>
           <p:nvSpPr>
-            <p:cNvPr name="TextBox 37" id="37"/>
-            <p:cNvSpPr txBox="true"/>
+            <p:cNvPr id="37" name="TextBox 37"/>
+            <p:cNvSpPr txBox="1"/>
             <p:nvPr/>
           </p:nvSpPr>
           <p:spPr>
@@ -5537,176 +4806,27 @@
             </a:prstGeom>
           </p:spPr>
           <p:txBody>
-            <a:bodyPr anchor="ctr" rtlCol="false" tIns="50800" lIns="50800" bIns="50800" rIns="50800"/>
+            <a:bodyPr lIns="50800" tIns="50800" rIns="50800" bIns="50800" rtlCol="0" anchor="ctr"/>
             <a:lstStyle/>
             <a:p>
-              <a:pPr algn="ctr" marL="0" indent="0" lvl="0">
+              <a:pPr marL="0" lvl="0" indent="0" algn="ctr">
                 <a:lnSpc>
                   <a:spcPts val="2659"/>
                 </a:lnSpc>
               </a:pPr>
+              <a:endParaRPr/>
             </a:p>
           </p:txBody>
         </p:sp>
       </p:grpSp>
       <p:sp>
         <p:nvSpPr>
-          <p:cNvPr name="Freeform 38" id="38"/>
-          <p:cNvSpPr/>
+          <p:cNvPr id="41" name="TextBox 41"/>
+          <p:cNvSpPr txBox="1"/>
           <p:nvPr/>
         </p:nvSpPr>
         <p:spPr>
-          <a:xfrm flipH="false" flipV="false" rot="2599173">
-            <a:off x="10298209" y="4477172"/>
-            <a:ext cx="973532" cy="897475"/>
-          </a:xfrm>
-          <a:custGeom>
-            <a:avLst/>
-            <a:gdLst/>
-            <a:ahLst/>
-            <a:cxnLst/>
-            <a:rect r="r" b="b" t="t" l="l"/>
-            <a:pathLst>
-              <a:path h="897475" w="973532">
-                <a:moveTo>
-                  <a:pt x="0" y="0"/>
-                </a:moveTo>
-                <a:lnTo>
-                  <a:pt x="973532" y="0"/>
-                </a:lnTo>
-                <a:lnTo>
-                  <a:pt x="973532" y="897475"/>
-                </a:lnTo>
-                <a:lnTo>
-                  <a:pt x="0" y="897475"/>
-                </a:lnTo>
-                <a:lnTo>
-                  <a:pt x="0" y="0"/>
-                </a:lnTo>
-                <a:close/>
-              </a:path>
-            </a:pathLst>
-          </a:custGeom>
-          <a:blipFill>
-            <a:blip r:embed="rId6">
-              <a:extLst>
-                <a:ext uri="{96DAC541-7B7A-43D3-8B79-37D633B846F1}">
-                  <asvg:svgBlip xmlns:asvg="http://schemas.microsoft.com/office/drawing/2016/SVG/main" r:embed="rId7"/>
-                </a:ext>
-              </a:extLst>
-            </a:blip>
-            <a:stretch>
-              <a:fillRect l="-31484" t="-39236" r="-39297" b="-46019"/>
-            </a:stretch>
-          </a:blipFill>
-        </p:spPr>
-      </p:sp>
-      <p:sp>
-        <p:nvSpPr>
-          <p:cNvPr name="Freeform 39" id="39"/>
-          <p:cNvSpPr/>
-          <p:nvPr/>
-        </p:nvSpPr>
-        <p:spPr>
-          <a:xfrm flipH="false" flipV="false" rot="2599173">
-            <a:off x="17364964" y="7284684"/>
-            <a:ext cx="382567" cy="352679"/>
-          </a:xfrm>
-          <a:custGeom>
-            <a:avLst/>
-            <a:gdLst/>
-            <a:ahLst/>
-            <a:cxnLst/>
-            <a:rect r="r" b="b" t="t" l="l"/>
-            <a:pathLst>
-              <a:path h="352679" w="382567">
-                <a:moveTo>
-                  <a:pt x="0" y="0"/>
-                </a:moveTo>
-                <a:lnTo>
-                  <a:pt x="382566" y="0"/>
-                </a:lnTo>
-                <a:lnTo>
-                  <a:pt x="382566" y="352678"/>
-                </a:lnTo>
-                <a:lnTo>
-                  <a:pt x="0" y="352678"/>
-                </a:lnTo>
-                <a:lnTo>
-                  <a:pt x="0" y="0"/>
-                </a:lnTo>
-                <a:close/>
-              </a:path>
-            </a:pathLst>
-          </a:custGeom>
-          <a:blipFill>
-            <a:blip r:embed="rId6">
-              <a:extLst>
-                <a:ext uri="{96DAC541-7B7A-43D3-8B79-37D633B846F1}">
-                  <asvg:svgBlip xmlns:asvg="http://schemas.microsoft.com/office/drawing/2016/SVG/main" r:embed="rId7"/>
-                </a:ext>
-              </a:extLst>
-            </a:blip>
-            <a:stretch>
-              <a:fillRect l="-31484" t="-39236" r="-39297" b="-46019"/>
-            </a:stretch>
-          </a:blipFill>
-        </p:spPr>
-      </p:sp>
-      <p:sp>
-        <p:nvSpPr>
-          <p:cNvPr name="Freeform 40" id="40"/>
-          <p:cNvSpPr/>
-          <p:nvPr/>
-        </p:nvSpPr>
-        <p:spPr>
-          <a:xfrm flipH="false" flipV="false" rot="0">
-            <a:off x="12071795" y="2667443"/>
-            <a:ext cx="4627385" cy="3944846"/>
-          </a:xfrm>
-          <a:custGeom>
-            <a:avLst/>
-            <a:gdLst/>
-            <a:ahLst/>
-            <a:cxnLst/>
-            <a:rect r="r" b="b" t="t" l="l"/>
-            <a:pathLst>
-              <a:path h="3944846" w="4627385">
-                <a:moveTo>
-                  <a:pt x="0" y="0"/>
-                </a:moveTo>
-                <a:lnTo>
-                  <a:pt x="4627385" y="0"/>
-                </a:lnTo>
-                <a:lnTo>
-                  <a:pt x="4627385" y="3944846"/>
-                </a:lnTo>
-                <a:lnTo>
-                  <a:pt x="0" y="3944846"/>
-                </a:lnTo>
-                <a:lnTo>
-                  <a:pt x="0" y="0"/>
-                </a:lnTo>
-                <a:close/>
-              </a:path>
-            </a:pathLst>
-          </a:custGeom>
-          <a:blipFill>
-            <a:blip r:embed="rId8"/>
-            <a:stretch>
-              <a:fillRect l="0" t="0" r="0" b="0"/>
-            </a:stretch>
-          </a:blipFill>
-        </p:spPr>
-      </p:sp>
-      <p:sp>
-        <p:nvSpPr>
-          <p:cNvPr name="TextBox 41" id="41"/>
-          <p:cNvSpPr txBox="true"/>
-          <p:nvPr/>
-        </p:nvSpPr>
-        <p:spPr>
-          <a:xfrm rot="0">
+          <a:xfrm>
             <a:off x="2260365" y="3140617"/>
             <a:ext cx="5431024" cy="1577147"/>
           </a:xfrm>
@@ -5715,18 +4835,18 @@
           </a:prstGeom>
         </p:spPr>
         <p:txBody>
-          <a:bodyPr anchor="t" rtlCol="false" tIns="0" lIns="0" bIns="0" rIns="0">
+          <a:bodyPr lIns="0" tIns="0" rIns="0" bIns="0" rtlCol="0" anchor="t">
             <a:spAutoFit/>
           </a:bodyPr>
           <a:lstStyle/>
           <a:p>
-            <a:pPr algn="l" marL="0" indent="0" lvl="0">
+            <a:pPr marL="0" lvl="0" indent="0" algn="l">
               <a:lnSpc>
                 <a:spcPts val="12879"/>
               </a:lnSpc>
             </a:pPr>
             <a:r>
-              <a:rPr lang="en-US" b="true" sz="9199" spc="-643">
+              <a:rPr lang="en-US" sz="9199" b="1" spc="-643" dirty="0">
                 <a:solidFill>
                   <a:srgbClr val="000000"/>
                 </a:solidFill>
@@ -5742,12 +4862,12 @@
       </p:sp>
       <p:sp>
         <p:nvSpPr>
-          <p:cNvPr name="TextBox 42" id="42"/>
-          <p:cNvSpPr txBox="true"/>
+          <p:cNvPr id="42" name="TextBox 42"/>
+          <p:cNvSpPr txBox="1"/>
           <p:nvPr/>
         </p:nvSpPr>
         <p:spPr>
-          <a:xfrm rot="0">
+          <a:xfrm>
             <a:off x="2260365" y="4224888"/>
             <a:ext cx="5933052" cy="1956356"/>
           </a:xfrm>
@@ -5756,18 +4876,18 @@
           </a:prstGeom>
         </p:spPr>
         <p:txBody>
-          <a:bodyPr anchor="t" rtlCol="false" tIns="0" lIns="0" bIns="0" rIns="0">
+          <a:bodyPr lIns="0" tIns="0" rIns="0" bIns="0" rtlCol="0" anchor="t">
             <a:spAutoFit/>
           </a:bodyPr>
           <a:lstStyle/>
           <a:p>
-            <a:pPr algn="l" marL="0" indent="0" lvl="0">
+            <a:pPr marL="0" lvl="0" indent="0" algn="l">
               <a:lnSpc>
                 <a:spcPts val="16026"/>
               </a:lnSpc>
             </a:pPr>
             <a:r>
-              <a:rPr lang="en-US" b="true" sz="11447" spc="-801">
+              <a:rPr lang="en-US" sz="11447" b="1" spc="-801">
                 <a:solidFill>
                   <a:srgbClr val="3972F0"/>
                 </a:solidFill>
@@ -5783,12 +4903,12 @@
       </p:sp>
       <p:sp>
         <p:nvSpPr>
-          <p:cNvPr name="TextBox 43" id="43"/>
-          <p:cNvSpPr txBox="true"/>
+          <p:cNvPr id="43" name="TextBox 43"/>
+          <p:cNvSpPr txBox="1"/>
           <p:nvPr/>
         </p:nvSpPr>
         <p:spPr>
-          <a:xfrm rot="0">
+          <a:xfrm>
             <a:off x="2578870" y="7095295"/>
             <a:ext cx="2648021" cy="434227"/>
           </a:xfrm>
@@ -5797,12 +4917,12 @@
           </a:prstGeom>
         </p:spPr>
         <p:txBody>
-          <a:bodyPr anchor="t" rtlCol="false" tIns="0" lIns="0" bIns="0" rIns="0">
+          <a:bodyPr lIns="0" tIns="0" rIns="0" bIns="0" rtlCol="0" anchor="t">
             <a:spAutoFit/>
           </a:bodyPr>
           <a:lstStyle/>
           <a:p>
-            <a:pPr algn="l" marL="0" indent="0" lvl="0">
+            <a:pPr marL="0" lvl="0" indent="0" algn="l">
               <a:lnSpc>
                 <a:spcPts val="3648"/>
               </a:lnSpc>
@@ -5824,12 +4944,12 @@
       </p:sp>
       <p:sp>
         <p:nvSpPr>
-          <p:cNvPr name="TextBox 44" id="44"/>
-          <p:cNvSpPr txBox="true"/>
+          <p:cNvPr id="44" name="TextBox 44"/>
+          <p:cNvSpPr txBox="1"/>
           <p:nvPr/>
         </p:nvSpPr>
         <p:spPr>
-          <a:xfrm rot="0">
+          <a:xfrm>
             <a:off x="2578870" y="8300212"/>
             <a:ext cx="2648021" cy="434227"/>
           </a:xfrm>
@@ -5838,12 +4958,12 @@
           </a:prstGeom>
         </p:spPr>
         <p:txBody>
-          <a:bodyPr anchor="t" rtlCol="false" tIns="0" lIns="0" bIns="0" rIns="0">
+          <a:bodyPr lIns="0" tIns="0" rIns="0" bIns="0" rtlCol="0" anchor="t">
             <a:spAutoFit/>
           </a:bodyPr>
           <a:lstStyle/>
           <a:p>
-            <a:pPr algn="l" marL="0" indent="0" lvl="0">
+            <a:pPr marL="0" lvl="0" indent="0" algn="l">
               <a:lnSpc>
                 <a:spcPts val="3648"/>
               </a:lnSpc>
@@ -5865,12 +4985,12 @@
       </p:sp>
       <p:sp>
         <p:nvSpPr>
-          <p:cNvPr name="TextBox 45" id="45"/>
-          <p:cNvSpPr txBox="true"/>
+          <p:cNvPr id="45" name="TextBox 45"/>
+          <p:cNvSpPr txBox="1"/>
           <p:nvPr/>
         </p:nvSpPr>
         <p:spPr>
-          <a:xfrm rot="0">
+          <a:xfrm>
             <a:off x="10122970" y="7095295"/>
             <a:ext cx="2648021" cy="434227"/>
           </a:xfrm>
@@ -5879,12 +4999,12 @@
           </a:prstGeom>
         </p:spPr>
         <p:txBody>
-          <a:bodyPr anchor="t" rtlCol="false" tIns="0" lIns="0" bIns="0" rIns="0">
+          <a:bodyPr lIns="0" tIns="0" rIns="0" bIns="0" rtlCol="0" anchor="t">
             <a:spAutoFit/>
           </a:bodyPr>
           <a:lstStyle/>
           <a:p>
-            <a:pPr algn="l" marL="0" indent="0" lvl="0">
+            <a:pPr marL="0" lvl="0" indent="0" algn="l">
               <a:lnSpc>
                 <a:spcPts val="3648"/>
               </a:lnSpc>
@@ -5906,12 +5026,12 @@
       </p:sp>
       <p:sp>
         <p:nvSpPr>
-          <p:cNvPr name="TextBox 46" id="46"/>
-          <p:cNvSpPr txBox="true"/>
+          <p:cNvPr id="46" name="TextBox 46"/>
+          <p:cNvSpPr txBox="1"/>
           <p:nvPr/>
         </p:nvSpPr>
         <p:spPr>
-          <a:xfrm rot="0">
+          <a:xfrm>
             <a:off x="10122970" y="8300212"/>
             <a:ext cx="2648021" cy="434227"/>
           </a:xfrm>
@@ -5920,12 +5040,12 @@
           </a:prstGeom>
         </p:spPr>
         <p:txBody>
-          <a:bodyPr anchor="t" rtlCol="false" tIns="0" lIns="0" bIns="0" rIns="0">
+          <a:bodyPr lIns="0" tIns="0" rIns="0" bIns="0" rtlCol="0" anchor="t">
             <a:spAutoFit/>
           </a:bodyPr>
           <a:lstStyle/>
           <a:p>
-            <a:pPr algn="l" marL="0" indent="0" lvl="0">
+            <a:pPr marL="0" lvl="0" indent="0" algn="l">
               <a:lnSpc>
                 <a:spcPts val="3648"/>
               </a:lnSpc>
@@ -5947,12 +5067,12 @@
       </p:sp>
       <p:sp>
         <p:nvSpPr>
-          <p:cNvPr name="TextBox 47" id="47"/>
-          <p:cNvSpPr txBox="true"/>
+          <p:cNvPr id="47" name="TextBox 47"/>
+          <p:cNvSpPr txBox="1"/>
           <p:nvPr/>
         </p:nvSpPr>
         <p:spPr>
-          <a:xfrm rot="0">
+          <a:xfrm>
             <a:off x="6352945" y="7095295"/>
             <a:ext cx="2648021" cy="434227"/>
           </a:xfrm>
@@ -5961,12 +5081,12 @@
           </a:prstGeom>
         </p:spPr>
         <p:txBody>
-          <a:bodyPr anchor="t" rtlCol="false" tIns="0" lIns="0" bIns="0" rIns="0">
+          <a:bodyPr lIns="0" tIns="0" rIns="0" bIns="0" rtlCol="0" anchor="t">
             <a:spAutoFit/>
           </a:bodyPr>
           <a:lstStyle/>
           <a:p>
-            <a:pPr algn="l" marL="0" indent="0" lvl="0">
+            <a:pPr marL="0" lvl="0" indent="0" algn="l">
               <a:lnSpc>
                 <a:spcPts val="3648"/>
               </a:lnSpc>
@@ -5988,12 +5108,12 @@
       </p:sp>
       <p:sp>
         <p:nvSpPr>
-          <p:cNvPr name="TextBox 48" id="48"/>
-          <p:cNvSpPr txBox="true"/>
+          <p:cNvPr id="48" name="TextBox 48"/>
+          <p:cNvSpPr txBox="1"/>
           <p:nvPr/>
         </p:nvSpPr>
         <p:spPr>
-          <a:xfrm rot="0">
+          <a:xfrm>
             <a:off x="6352945" y="8300212"/>
             <a:ext cx="2648021" cy="434227"/>
           </a:xfrm>
@@ -6002,12 +5122,12 @@
           </a:prstGeom>
         </p:spPr>
         <p:txBody>
-          <a:bodyPr anchor="t" rtlCol="false" tIns="0" lIns="0" bIns="0" rIns="0">
+          <a:bodyPr lIns="0" tIns="0" rIns="0" bIns="0" rtlCol="0" anchor="t">
             <a:spAutoFit/>
           </a:bodyPr>
           <a:lstStyle/>
           <a:p>
-            <a:pPr algn="l" marL="0" indent="0" lvl="0">
+            <a:pPr marL="0" lvl="0" indent="0" algn="l">
               <a:lnSpc>
                 <a:spcPts val="3648"/>
               </a:lnSpc>
@@ -6029,12 +5149,12 @@
       </p:sp>
       <p:sp>
         <p:nvSpPr>
-          <p:cNvPr name="TextBox 49" id="49"/>
-          <p:cNvSpPr txBox="true"/>
+          <p:cNvPr id="49" name="TextBox 49"/>
+          <p:cNvSpPr txBox="1"/>
           <p:nvPr/>
         </p:nvSpPr>
         <p:spPr>
-          <a:xfrm rot="0">
+          <a:xfrm>
             <a:off x="13897044" y="7095295"/>
             <a:ext cx="2648021" cy="434227"/>
           </a:xfrm>
@@ -6043,12 +5163,12 @@
           </a:prstGeom>
         </p:spPr>
         <p:txBody>
-          <a:bodyPr anchor="t" rtlCol="false" tIns="0" lIns="0" bIns="0" rIns="0">
+          <a:bodyPr lIns="0" tIns="0" rIns="0" bIns="0" rtlCol="0" anchor="t">
             <a:spAutoFit/>
           </a:bodyPr>
           <a:lstStyle/>
           <a:p>
-            <a:pPr algn="l" marL="0" indent="0" lvl="0">
+            <a:pPr marL="0" lvl="0" indent="0" algn="l">
               <a:lnSpc>
                 <a:spcPts val="3648"/>
               </a:lnSpc>
@@ -6070,12 +5190,12 @@
       </p:sp>
       <p:sp>
         <p:nvSpPr>
-          <p:cNvPr name="TextBox 50" id="50"/>
-          <p:cNvSpPr txBox="true"/>
+          <p:cNvPr id="50" name="TextBox 50"/>
+          <p:cNvSpPr txBox="1"/>
           <p:nvPr/>
         </p:nvSpPr>
         <p:spPr>
-          <a:xfrm rot="0">
+          <a:xfrm>
             <a:off x="13897044" y="8300212"/>
             <a:ext cx="2648021" cy="434227"/>
           </a:xfrm>
@@ -6084,12 +5204,12 @@
           </a:prstGeom>
         </p:spPr>
         <p:txBody>
-          <a:bodyPr anchor="t" rtlCol="false" tIns="0" lIns="0" bIns="0" rIns="0">
+          <a:bodyPr lIns="0" tIns="0" rIns="0" bIns="0" rtlCol="0" anchor="t">
             <a:spAutoFit/>
           </a:bodyPr>
           <a:lstStyle/>
           <a:p>
-            <a:pPr algn="l" marL="0" indent="0" lvl="0">
+            <a:pPr marL="0" lvl="0" indent="0" algn="l">
               <a:lnSpc>
                 <a:spcPts val="3648"/>
               </a:lnSpc>
@@ -6118,7 +5238,7 @@
 </file>
 
 <file path=ppt/slides/slide3.xml><?xml version="1.0" encoding="utf-8"?>
-<p:sld xmlns:p="http://schemas.openxmlformats.org/presentationml/2006/main" xmlns:a="http://schemas.openxmlformats.org/drawingml/2006/main" xmlns:r="http://schemas.openxmlformats.org/officeDocument/2006/relationships">
+<p:sld xmlns:a="http://schemas.openxmlformats.org/drawingml/2006/main" xmlns:r="http://schemas.openxmlformats.org/officeDocument/2006/relationships" xmlns:p="http://schemas.openxmlformats.org/presentationml/2006/main">
   <p:cSld>
     <p:spTree>
       <p:nvGrpSpPr>
@@ -6134,884 +5254,15 @@
           <a:chExt cx="0" cy="0"/>
         </a:xfrm>
       </p:grpSpPr>
-      <p:grpSp>
-        <p:nvGrpSpPr>
-          <p:cNvPr name="Group 2" id="2"/>
-          <p:cNvGrpSpPr/>
+      <p:sp>
+        <p:nvSpPr>
+          <p:cNvPr id="15" name="TextBox 15"/>
+          <p:cNvSpPr txBox="1"/>
           <p:nvPr/>
-        </p:nvGrpSpPr>
-        <p:grpSpPr>
-          <a:xfrm rot="0">
-            <a:off x="9244132" y="938201"/>
-            <a:ext cx="8015168" cy="8015168"/>
-            <a:chOff x="0" y="0"/>
-            <a:chExt cx="812800" cy="812800"/>
-          </a:xfrm>
-        </p:grpSpPr>
-        <p:sp>
-          <p:nvSpPr>
-            <p:cNvPr name="Freeform 3" id="3"/>
-            <p:cNvSpPr/>
-            <p:nvPr/>
-          </p:nvSpPr>
-          <p:spPr>
-            <a:xfrm flipH="false" flipV="false" rot="0">
-              <a:off x="0" y="0"/>
-              <a:ext cx="812800" cy="812800"/>
-            </a:xfrm>
-            <a:custGeom>
-              <a:avLst/>
-              <a:gdLst/>
-              <a:ahLst/>
-              <a:cxnLst/>
-              <a:rect r="r" b="b" t="t" l="l"/>
-              <a:pathLst>
-                <a:path h="812800" w="812800">
-                  <a:moveTo>
-                    <a:pt x="406400" y="0"/>
-                  </a:moveTo>
-                  <a:cubicBezTo>
-                    <a:pt x="181951" y="0"/>
-                    <a:pt x="0" y="181951"/>
-                    <a:pt x="0" y="406400"/>
-                  </a:cubicBezTo>
-                  <a:cubicBezTo>
-                    <a:pt x="0" y="630849"/>
-                    <a:pt x="181951" y="812800"/>
-                    <a:pt x="406400" y="812800"/>
-                  </a:cubicBezTo>
-                  <a:cubicBezTo>
-                    <a:pt x="630849" y="812800"/>
-                    <a:pt x="812800" y="630849"/>
-                    <a:pt x="812800" y="406400"/>
-                  </a:cubicBezTo>
-                  <a:cubicBezTo>
-                    <a:pt x="812800" y="181951"/>
-                    <a:pt x="630849" y="0"/>
-                    <a:pt x="406400" y="0"/>
-                  </a:cubicBezTo>
-                  <a:close/>
-                </a:path>
-              </a:pathLst>
-            </a:custGeom>
-            <a:gradFill rotWithShape="true">
-              <a:gsLst>
-                <a:gs pos="0">
-                  <a:srgbClr val="3972F0">
-                    <a:alpha val="100000"/>
-                  </a:srgbClr>
-                </a:gs>
-                <a:gs pos="100000">
-                  <a:srgbClr val="1CDAFF">
-                    <a:alpha val="100000"/>
-                  </a:srgbClr>
-                </a:gs>
-              </a:gsLst>
-              <a:lin ang="5400000"/>
-            </a:gradFill>
-          </p:spPr>
-        </p:sp>
-        <p:sp>
-          <p:nvSpPr>
-            <p:cNvPr name="TextBox 4" id="4"/>
-            <p:cNvSpPr txBox="true"/>
-            <p:nvPr/>
-          </p:nvSpPr>
-          <p:spPr>
-            <a:xfrm>
-              <a:off x="76200" y="38100"/>
-              <a:ext cx="660400" cy="698500"/>
-            </a:xfrm>
-            <a:prstGeom prst="rect">
-              <a:avLst/>
-            </a:prstGeom>
-          </p:spPr>
-          <p:txBody>
-            <a:bodyPr anchor="ctr" rtlCol="false" tIns="50800" lIns="50800" bIns="50800" rIns="50800"/>
-            <a:lstStyle/>
-            <a:p>
-              <a:pPr algn="ctr" marL="0" indent="0" lvl="0">
-                <a:lnSpc>
-                  <a:spcPts val="2659"/>
-                </a:lnSpc>
-                <a:spcBef>
-                  <a:spcPct val="0"/>
-                </a:spcBef>
-              </a:pPr>
-            </a:p>
-          </p:txBody>
-        </p:sp>
-      </p:grpSp>
-      <p:grpSp>
-        <p:nvGrpSpPr>
-          <p:cNvPr name="Group 5" id="5"/>
-          <p:cNvGrpSpPr>
-            <a:grpSpLocks noChangeAspect="true"/>
-          </p:cNvGrpSpPr>
-          <p:nvPr/>
-        </p:nvGrpSpPr>
-        <p:grpSpPr>
-          <a:xfrm rot="379905">
-            <a:off x="9842765" y="1263178"/>
-            <a:ext cx="6617639" cy="13094135"/>
-            <a:chOff x="0" y="0"/>
-            <a:chExt cx="2620010" cy="5184140"/>
-          </a:xfrm>
-        </p:grpSpPr>
-        <p:sp>
-          <p:nvSpPr>
-            <p:cNvPr name="Freeform 6" id="6"/>
-            <p:cNvSpPr/>
-            <p:nvPr/>
-          </p:nvSpPr>
-          <p:spPr>
-            <a:xfrm flipH="false" flipV="false" rot="0">
-              <a:off x="53340" y="25400"/>
-              <a:ext cx="2513330" cy="5132070"/>
-            </a:xfrm>
-            <a:custGeom>
-              <a:avLst/>
-              <a:gdLst/>
-              <a:ahLst/>
-              <a:cxnLst/>
-              <a:rect r="r" b="b" t="t" l="l"/>
-              <a:pathLst>
-                <a:path h="5132070" w="2513330">
-                  <a:moveTo>
-                    <a:pt x="2159000" y="0"/>
-                  </a:moveTo>
-                  <a:lnTo>
-                    <a:pt x="354330" y="0"/>
-                  </a:lnTo>
-                  <a:cubicBezTo>
-                    <a:pt x="158750" y="0"/>
-                    <a:pt x="0" y="158750"/>
-                    <a:pt x="0" y="354330"/>
-                  </a:cubicBezTo>
-                  <a:lnTo>
-                    <a:pt x="0" y="4777740"/>
-                  </a:lnTo>
-                  <a:cubicBezTo>
-                    <a:pt x="0" y="4973320"/>
-                    <a:pt x="158750" y="5132070"/>
-                    <a:pt x="354330" y="5132070"/>
-                  </a:cubicBezTo>
-                  <a:lnTo>
-                    <a:pt x="2159000" y="5132070"/>
-                  </a:lnTo>
-                  <a:cubicBezTo>
-                    <a:pt x="2354580" y="5132070"/>
-                    <a:pt x="2513330" y="4973320"/>
-                    <a:pt x="2513330" y="4777740"/>
-                  </a:cubicBezTo>
-                  <a:lnTo>
-                    <a:pt x="2513330" y="354330"/>
-                  </a:lnTo>
-                  <a:cubicBezTo>
-                    <a:pt x="2513330" y="158750"/>
-                    <a:pt x="2354580" y="0"/>
-                    <a:pt x="2159000" y="0"/>
-                  </a:cubicBezTo>
-                  <a:close/>
-                  <a:moveTo>
-                    <a:pt x="1558290" y="162560"/>
-                  </a:moveTo>
-                  <a:cubicBezTo>
-                    <a:pt x="1576070" y="162560"/>
-                    <a:pt x="1590040" y="176530"/>
-                    <a:pt x="1590040" y="194310"/>
-                  </a:cubicBezTo>
-                  <a:cubicBezTo>
-                    <a:pt x="1590040" y="212090"/>
-                    <a:pt x="1576070" y="226060"/>
-                    <a:pt x="1558290" y="226060"/>
-                  </a:cubicBezTo>
-                  <a:cubicBezTo>
-                    <a:pt x="1540510" y="226060"/>
-                    <a:pt x="1526540" y="212090"/>
-                    <a:pt x="1526540" y="194310"/>
-                  </a:cubicBezTo>
-                  <a:cubicBezTo>
-                    <a:pt x="1526540" y="176530"/>
-                    <a:pt x="1541780" y="162560"/>
-                    <a:pt x="1558290" y="162560"/>
-                  </a:cubicBezTo>
-                  <a:close/>
-                  <a:moveTo>
-                    <a:pt x="1089660" y="172720"/>
-                  </a:moveTo>
-                  <a:lnTo>
-                    <a:pt x="1394460" y="172720"/>
-                  </a:lnTo>
-                  <a:cubicBezTo>
-                    <a:pt x="1405890" y="172720"/>
-                    <a:pt x="1416050" y="181610"/>
-                    <a:pt x="1416050" y="194310"/>
-                  </a:cubicBezTo>
-                  <a:cubicBezTo>
-                    <a:pt x="1416050" y="207010"/>
-                    <a:pt x="1405890" y="215900"/>
-                    <a:pt x="1394460" y="215900"/>
-                  </a:cubicBezTo>
-                  <a:lnTo>
-                    <a:pt x="1089660" y="215900"/>
-                  </a:lnTo>
-                  <a:cubicBezTo>
-                    <a:pt x="1078230" y="215900"/>
-                    <a:pt x="1068070" y="207010"/>
-                    <a:pt x="1068070" y="194310"/>
-                  </a:cubicBezTo>
-                  <a:cubicBezTo>
-                    <a:pt x="1068070" y="181610"/>
-                    <a:pt x="1078230" y="172720"/>
-                    <a:pt x="1089660" y="172720"/>
-                  </a:cubicBezTo>
-                  <a:close/>
-                  <a:moveTo>
-                    <a:pt x="2383790" y="4798060"/>
-                  </a:moveTo>
-                  <a:cubicBezTo>
-                    <a:pt x="2383790" y="4913630"/>
-                    <a:pt x="2289810" y="5007610"/>
-                    <a:pt x="2174240" y="5007610"/>
-                  </a:cubicBezTo>
-                  <a:lnTo>
-                    <a:pt x="341630" y="5007610"/>
-                  </a:lnTo>
-                  <a:cubicBezTo>
-                    <a:pt x="226060" y="5007610"/>
-                    <a:pt x="132080" y="4913630"/>
-                    <a:pt x="132080" y="4798060"/>
-                  </a:cubicBezTo>
-                  <a:lnTo>
-                    <a:pt x="132080" y="340360"/>
-                  </a:lnTo>
-                  <a:cubicBezTo>
-                    <a:pt x="132080" y="224790"/>
-                    <a:pt x="226060" y="130810"/>
-                    <a:pt x="341630" y="130810"/>
-                  </a:cubicBezTo>
-                  <a:lnTo>
-                    <a:pt x="614680" y="130810"/>
-                  </a:lnTo>
-                  <a:lnTo>
-                    <a:pt x="614680" y="187960"/>
-                  </a:lnTo>
-                  <a:cubicBezTo>
-                    <a:pt x="614680" y="252730"/>
-                    <a:pt x="668020" y="306070"/>
-                    <a:pt x="732790" y="306070"/>
-                  </a:cubicBezTo>
-                  <a:lnTo>
-                    <a:pt x="1783080" y="306070"/>
-                  </a:lnTo>
-                  <a:cubicBezTo>
-                    <a:pt x="1847850" y="306070"/>
-                    <a:pt x="1901190" y="252730"/>
-                    <a:pt x="1901190" y="187960"/>
-                  </a:cubicBezTo>
-                  <a:lnTo>
-                    <a:pt x="1901190" y="130810"/>
-                  </a:lnTo>
-                  <a:lnTo>
-                    <a:pt x="2172970" y="130810"/>
-                  </a:lnTo>
-                  <a:cubicBezTo>
-                    <a:pt x="2288540" y="130810"/>
-                    <a:pt x="2382520" y="224790"/>
-                    <a:pt x="2382520" y="340360"/>
-                  </a:cubicBezTo>
-                  <a:lnTo>
-                    <a:pt x="2382520" y="4798060"/>
-                  </a:lnTo>
-                  <a:close/>
-                </a:path>
-              </a:pathLst>
-            </a:custGeom>
-            <a:solidFill>
-              <a:srgbClr val="000000"/>
-            </a:solidFill>
-          </p:spPr>
-        </p:sp>
-        <p:sp>
-          <p:nvSpPr>
-            <p:cNvPr name="Freeform 7" id="7"/>
-            <p:cNvSpPr/>
-            <p:nvPr/>
-          </p:nvSpPr>
-          <p:spPr>
-            <a:xfrm flipH="false" flipV="false" rot="0">
-              <a:off x="185420" y="156210"/>
-              <a:ext cx="2250453" cy="4876800"/>
-            </a:xfrm>
-            <a:custGeom>
-              <a:avLst/>
-              <a:gdLst/>
-              <a:ahLst/>
-              <a:cxnLst/>
-              <a:rect r="r" b="b" t="t" l="l"/>
-              <a:pathLst>
-                <a:path h="4876800" w="2250453">
-                  <a:moveTo>
-                    <a:pt x="2040890" y="0"/>
-                  </a:moveTo>
-                  <a:lnTo>
-                    <a:pt x="1769110" y="0"/>
-                  </a:lnTo>
-                  <a:lnTo>
-                    <a:pt x="1769110" y="57150"/>
-                  </a:lnTo>
-                  <a:cubicBezTo>
-                    <a:pt x="1769110" y="121920"/>
-                    <a:pt x="1715770" y="175260"/>
-                    <a:pt x="1651000" y="175260"/>
-                  </a:cubicBezTo>
-                  <a:lnTo>
-                    <a:pt x="601980" y="175260"/>
-                  </a:lnTo>
-                  <a:cubicBezTo>
-                    <a:pt x="537210" y="175260"/>
-                    <a:pt x="483870" y="121920"/>
-                    <a:pt x="483870" y="57150"/>
-                  </a:cubicBezTo>
-                  <a:lnTo>
-                    <a:pt x="483870" y="0"/>
-                  </a:lnTo>
-                  <a:lnTo>
-                    <a:pt x="209550" y="0"/>
-                  </a:lnTo>
-                  <a:cubicBezTo>
-                    <a:pt x="93980" y="0"/>
-                    <a:pt x="0" y="93980"/>
-                    <a:pt x="0" y="209550"/>
-                  </a:cubicBezTo>
-                  <a:lnTo>
-                    <a:pt x="0" y="4667250"/>
-                  </a:lnTo>
-                  <a:cubicBezTo>
-                    <a:pt x="0" y="4782820"/>
-                    <a:pt x="93980" y="4876800"/>
-                    <a:pt x="209550" y="4876800"/>
-                  </a:cubicBezTo>
-                  <a:lnTo>
-                    <a:pt x="2040890" y="4876800"/>
-                  </a:lnTo>
-                  <a:cubicBezTo>
-                    <a:pt x="2156460" y="4876800"/>
-                    <a:pt x="2250440" y="4782820"/>
-                    <a:pt x="2250440" y="4667250"/>
-                  </a:cubicBezTo>
-                  <a:lnTo>
-                    <a:pt x="2250440" y="209550"/>
-                  </a:lnTo>
-                  <a:cubicBezTo>
-                    <a:pt x="2251710" y="93980"/>
-                    <a:pt x="2157730" y="0"/>
-                    <a:pt x="2040890" y="0"/>
-                  </a:cubicBezTo>
-                  <a:close/>
-                </a:path>
-              </a:pathLst>
-            </a:custGeom>
-            <a:blipFill>
-              <a:blip r:embed="rId2"/>
-              <a:stretch>
-                <a:fillRect l="-11760" t="0" r="-11760" b="0"/>
-              </a:stretch>
-            </a:blipFill>
-          </p:spPr>
-        </p:sp>
-        <p:sp>
-          <p:nvSpPr>
-            <p:cNvPr name="Freeform 8" id="8"/>
-            <p:cNvSpPr/>
-            <p:nvPr/>
-          </p:nvSpPr>
-          <p:spPr>
-            <a:xfrm flipH="false" flipV="false" rot="0">
-              <a:off x="1121410" y="198120"/>
-              <a:ext cx="347980" cy="43180"/>
-            </a:xfrm>
-            <a:custGeom>
-              <a:avLst/>
-              <a:gdLst/>
-              <a:ahLst/>
-              <a:cxnLst/>
-              <a:rect r="r" b="b" t="t" l="l"/>
-              <a:pathLst>
-                <a:path h="43180" w="347980">
-                  <a:moveTo>
-                    <a:pt x="326390" y="0"/>
-                  </a:moveTo>
-                  <a:lnTo>
-                    <a:pt x="21590" y="0"/>
-                  </a:lnTo>
-                  <a:cubicBezTo>
-                    <a:pt x="10160" y="0"/>
-                    <a:pt x="0" y="8890"/>
-                    <a:pt x="0" y="21590"/>
-                  </a:cubicBezTo>
-                  <a:cubicBezTo>
-                    <a:pt x="0" y="34290"/>
-                    <a:pt x="10160" y="43180"/>
-                    <a:pt x="21590" y="43180"/>
-                  </a:cubicBezTo>
-                  <a:lnTo>
-                    <a:pt x="326390" y="43180"/>
-                  </a:lnTo>
-                  <a:cubicBezTo>
-                    <a:pt x="337820" y="43180"/>
-                    <a:pt x="347980" y="34290"/>
-                    <a:pt x="347980" y="21590"/>
-                  </a:cubicBezTo>
-                  <a:cubicBezTo>
-                    <a:pt x="347980" y="8890"/>
-                    <a:pt x="337820" y="0"/>
-                    <a:pt x="326390" y="0"/>
-                  </a:cubicBezTo>
-                  <a:close/>
-                </a:path>
-              </a:pathLst>
-            </a:custGeom>
-            <a:solidFill>
-              <a:srgbClr val="606060"/>
-            </a:solidFill>
-          </p:spPr>
-        </p:sp>
-        <p:sp>
-          <p:nvSpPr>
-            <p:cNvPr name="Freeform 9" id="9"/>
-            <p:cNvSpPr/>
-            <p:nvPr/>
-          </p:nvSpPr>
-          <p:spPr>
-            <a:xfrm flipH="false" flipV="false" rot="0">
-              <a:off x="1579738" y="187960"/>
-              <a:ext cx="63785" cy="63501"/>
-            </a:xfrm>
-            <a:custGeom>
-              <a:avLst/>
-              <a:gdLst/>
-              <a:ahLst/>
-              <a:cxnLst/>
-              <a:rect r="r" b="b" t="t" l="l"/>
-              <a:pathLst>
-                <a:path h="63501" w="63785">
-                  <a:moveTo>
-                    <a:pt x="31892" y="0"/>
-                  </a:moveTo>
-                  <a:cubicBezTo>
-                    <a:pt x="20515" y="-51"/>
-                    <a:pt x="9980" y="5989"/>
-                    <a:pt x="4277" y="15834"/>
-                  </a:cubicBezTo>
-                  <a:cubicBezTo>
-                    <a:pt x="-1426" y="25678"/>
-                    <a:pt x="-1426" y="37822"/>
-                    <a:pt x="4277" y="47666"/>
-                  </a:cubicBezTo>
-                  <a:cubicBezTo>
-                    <a:pt x="9980" y="57511"/>
-                    <a:pt x="20515" y="63551"/>
-                    <a:pt x="31892" y="63500"/>
-                  </a:cubicBezTo>
-                  <a:cubicBezTo>
-                    <a:pt x="43269" y="63551"/>
-                    <a:pt x="53804" y="57511"/>
-                    <a:pt x="59507" y="47666"/>
-                  </a:cubicBezTo>
-                  <a:cubicBezTo>
-                    <a:pt x="65210" y="37822"/>
-                    <a:pt x="65210" y="25678"/>
-                    <a:pt x="59507" y="15834"/>
-                  </a:cubicBezTo>
-                  <a:cubicBezTo>
-                    <a:pt x="53804" y="5989"/>
-                    <a:pt x="43269" y="-51"/>
-                    <a:pt x="31892" y="0"/>
-                  </a:cubicBezTo>
-                  <a:close/>
-                </a:path>
-              </a:pathLst>
-            </a:custGeom>
-            <a:solidFill>
-              <a:srgbClr val="606060"/>
-            </a:solidFill>
-          </p:spPr>
-        </p:sp>
-        <p:sp>
-          <p:nvSpPr>
-            <p:cNvPr name="Freeform 10" id="10"/>
-            <p:cNvSpPr/>
-            <p:nvPr/>
-          </p:nvSpPr>
-          <p:spPr>
-            <a:xfrm flipH="false" flipV="false" rot="0">
-              <a:off x="0" y="685800"/>
-              <a:ext cx="27940" cy="213360"/>
-            </a:xfrm>
-            <a:custGeom>
-              <a:avLst/>
-              <a:gdLst/>
-              <a:ahLst/>
-              <a:cxnLst/>
-              <a:rect r="r" b="b" t="t" l="l"/>
-              <a:pathLst>
-                <a:path h="213360" w="27940">
-                  <a:moveTo>
-                    <a:pt x="0" y="26670"/>
-                  </a:moveTo>
-                  <a:lnTo>
-                    <a:pt x="0" y="185420"/>
-                  </a:lnTo>
-                  <a:cubicBezTo>
-                    <a:pt x="0" y="200660"/>
-                    <a:pt x="12700" y="213360"/>
-                    <a:pt x="27940" y="213360"/>
-                  </a:cubicBezTo>
-                  <a:lnTo>
-                    <a:pt x="27940" y="0"/>
-                  </a:lnTo>
-                  <a:cubicBezTo>
-                    <a:pt x="12700" y="0"/>
-                    <a:pt x="0" y="11430"/>
-                    <a:pt x="0" y="26670"/>
-                  </a:cubicBezTo>
-                  <a:close/>
-                </a:path>
-              </a:pathLst>
-            </a:custGeom>
-            <a:solidFill>
-              <a:srgbClr val="B8B8B8"/>
-            </a:solidFill>
-          </p:spPr>
-        </p:sp>
-        <p:sp>
-          <p:nvSpPr>
-            <p:cNvPr name="Freeform 11" id="11"/>
-            <p:cNvSpPr/>
-            <p:nvPr/>
-          </p:nvSpPr>
-          <p:spPr>
-            <a:xfrm flipH="false" flipV="false" rot="0">
-              <a:off x="0" y="1057910"/>
-              <a:ext cx="27940" cy="384810"/>
-            </a:xfrm>
-            <a:custGeom>
-              <a:avLst/>
-              <a:gdLst/>
-              <a:ahLst/>
-              <a:cxnLst/>
-              <a:rect r="r" b="b" t="t" l="l"/>
-              <a:pathLst>
-                <a:path h="384810" w="27940">
-                  <a:moveTo>
-                    <a:pt x="0" y="26670"/>
-                  </a:moveTo>
-                  <a:lnTo>
-                    <a:pt x="0" y="356870"/>
-                  </a:lnTo>
-                  <a:cubicBezTo>
-                    <a:pt x="0" y="372110"/>
-                    <a:pt x="12700" y="384810"/>
-                    <a:pt x="27940" y="384810"/>
-                  </a:cubicBezTo>
-                  <a:lnTo>
-                    <a:pt x="27940" y="0"/>
-                  </a:lnTo>
-                  <a:cubicBezTo>
-                    <a:pt x="12700" y="0"/>
-                    <a:pt x="0" y="11430"/>
-                    <a:pt x="0" y="26670"/>
-                  </a:cubicBezTo>
-                  <a:close/>
-                </a:path>
-              </a:pathLst>
-            </a:custGeom>
-            <a:solidFill>
-              <a:srgbClr val="B8B8B8"/>
-            </a:solidFill>
-          </p:spPr>
-        </p:sp>
-        <p:sp>
-          <p:nvSpPr>
-            <p:cNvPr name="Freeform 12" id="12"/>
-            <p:cNvSpPr/>
-            <p:nvPr/>
-          </p:nvSpPr>
-          <p:spPr>
-            <a:xfrm flipH="false" flipV="false" rot="0">
-              <a:off x="0" y="1526540"/>
-              <a:ext cx="27940" cy="386080"/>
-            </a:xfrm>
-            <a:custGeom>
-              <a:avLst/>
-              <a:gdLst/>
-              <a:ahLst/>
-              <a:cxnLst/>
-              <a:rect r="r" b="b" t="t" l="l"/>
-              <a:pathLst>
-                <a:path h="386080" w="27940">
-                  <a:moveTo>
-                    <a:pt x="0" y="27940"/>
-                  </a:moveTo>
-                  <a:lnTo>
-                    <a:pt x="0" y="358140"/>
-                  </a:lnTo>
-                  <a:cubicBezTo>
-                    <a:pt x="0" y="373380"/>
-                    <a:pt x="12700" y="386080"/>
-                    <a:pt x="27940" y="386080"/>
-                  </a:cubicBezTo>
-                  <a:lnTo>
-                    <a:pt x="27940" y="0"/>
-                  </a:lnTo>
-                  <a:cubicBezTo>
-                    <a:pt x="12700" y="0"/>
-                    <a:pt x="0" y="12700"/>
-                    <a:pt x="0" y="27940"/>
-                  </a:cubicBezTo>
-                  <a:close/>
-                </a:path>
-              </a:pathLst>
-            </a:custGeom>
-            <a:solidFill>
-              <a:srgbClr val="B8B8B8"/>
-            </a:solidFill>
-          </p:spPr>
-        </p:sp>
-        <p:sp>
-          <p:nvSpPr>
-            <p:cNvPr name="Freeform 13" id="13"/>
-            <p:cNvSpPr/>
-            <p:nvPr/>
-          </p:nvSpPr>
-          <p:spPr>
-            <a:xfrm flipH="false" flipV="false" rot="0">
-              <a:off x="2592070" y="1184910"/>
-              <a:ext cx="27940" cy="618490"/>
-            </a:xfrm>
-            <a:custGeom>
-              <a:avLst/>
-              <a:gdLst/>
-              <a:ahLst/>
-              <a:cxnLst/>
-              <a:rect r="r" b="b" t="t" l="l"/>
-              <a:pathLst>
-                <a:path h="618490" w="27940">
-                  <a:moveTo>
-                    <a:pt x="0" y="0"/>
-                  </a:moveTo>
-                  <a:lnTo>
-                    <a:pt x="0" y="618490"/>
-                  </a:lnTo>
-                  <a:cubicBezTo>
-                    <a:pt x="15240" y="618490"/>
-                    <a:pt x="27940" y="605790"/>
-                    <a:pt x="27940" y="590550"/>
-                  </a:cubicBezTo>
-                  <a:lnTo>
-                    <a:pt x="27940" y="27940"/>
-                  </a:lnTo>
-                  <a:cubicBezTo>
-                    <a:pt x="27940" y="12700"/>
-                    <a:pt x="15240" y="0"/>
-                    <a:pt x="0" y="0"/>
-                  </a:cubicBezTo>
-                  <a:close/>
-                </a:path>
-              </a:pathLst>
-            </a:custGeom>
-            <a:solidFill>
-              <a:srgbClr val="B8B8B8"/>
-            </a:solidFill>
-          </p:spPr>
-        </p:sp>
-        <p:sp>
-          <p:nvSpPr>
-            <p:cNvPr name="Freeform 14" id="14"/>
-            <p:cNvSpPr/>
-            <p:nvPr/>
-          </p:nvSpPr>
-          <p:spPr>
-            <a:xfrm flipH="false" flipV="false" rot="0">
-              <a:off x="27940" y="0"/>
-              <a:ext cx="2564130" cy="5182870"/>
-            </a:xfrm>
-            <a:custGeom>
-              <a:avLst/>
-              <a:gdLst/>
-              <a:ahLst/>
-              <a:cxnLst/>
-              <a:rect r="r" b="b" t="t" l="l"/>
-              <a:pathLst>
-                <a:path h="5182870" w="2564130">
-                  <a:moveTo>
-                    <a:pt x="2564130" y="1184910"/>
-                  </a:moveTo>
-                  <a:lnTo>
-                    <a:pt x="2564130" y="379730"/>
-                  </a:lnTo>
-                  <a:cubicBezTo>
-                    <a:pt x="2564130" y="353060"/>
-                    <a:pt x="2561590" y="327660"/>
-                    <a:pt x="2556510" y="303530"/>
-                  </a:cubicBezTo>
-                  <a:cubicBezTo>
-                    <a:pt x="2553970" y="290830"/>
-                    <a:pt x="2551430" y="279400"/>
-                    <a:pt x="2547620" y="266700"/>
-                  </a:cubicBezTo>
-                  <a:cubicBezTo>
-                    <a:pt x="2542540" y="248920"/>
-                    <a:pt x="2534920" y="231140"/>
-                    <a:pt x="2527300" y="214630"/>
-                  </a:cubicBezTo>
-                  <a:cubicBezTo>
-                    <a:pt x="2522220" y="203200"/>
-                    <a:pt x="2515870" y="193040"/>
-                    <a:pt x="2509520" y="182880"/>
-                  </a:cubicBezTo>
-                  <a:cubicBezTo>
-                    <a:pt x="2503170" y="172720"/>
-                    <a:pt x="2496820" y="162560"/>
-                    <a:pt x="2489200" y="152400"/>
-                  </a:cubicBezTo>
-                  <a:cubicBezTo>
-                    <a:pt x="2477770" y="137160"/>
-                    <a:pt x="2466340" y="124460"/>
-                    <a:pt x="2453640" y="110490"/>
-                  </a:cubicBezTo>
-                  <a:cubicBezTo>
-                    <a:pt x="2444750" y="101600"/>
-                    <a:pt x="2435860" y="93980"/>
-                    <a:pt x="2426970" y="86360"/>
-                  </a:cubicBezTo>
-                  <a:cubicBezTo>
-                    <a:pt x="2360930" y="31750"/>
-                    <a:pt x="2277110" y="0"/>
-                    <a:pt x="2185670" y="0"/>
-                  </a:cubicBezTo>
-                  <a:lnTo>
-                    <a:pt x="379730" y="0"/>
-                  </a:lnTo>
-                  <a:cubicBezTo>
-                    <a:pt x="288290" y="0"/>
-                    <a:pt x="203200" y="33020"/>
-                    <a:pt x="138430" y="86360"/>
-                  </a:cubicBezTo>
-                  <a:cubicBezTo>
-                    <a:pt x="129540" y="93980"/>
-                    <a:pt x="120650" y="102870"/>
-                    <a:pt x="111760" y="110490"/>
-                  </a:cubicBezTo>
-                  <a:cubicBezTo>
-                    <a:pt x="99060" y="123190"/>
-                    <a:pt x="86360" y="137160"/>
-                    <a:pt x="76200" y="152400"/>
-                  </a:cubicBezTo>
-                  <a:cubicBezTo>
-                    <a:pt x="68580" y="162560"/>
-                    <a:pt x="62230" y="172720"/>
-                    <a:pt x="55880" y="182880"/>
-                  </a:cubicBezTo>
-                  <a:cubicBezTo>
-                    <a:pt x="49530" y="193040"/>
-                    <a:pt x="43180" y="204470"/>
-                    <a:pt x="38100" y="214630"/>
-                  </a:cubicBezTo>
-                  <a:cubicBezTo>
-                    <a:pt x="29210" y="232410"/>
-                    <a:pt x="22860" y="248920"/>
-                    <a:pt x="16510" y="266700"/>
-                  </a:cubicBezTo>
-                  <a:cubicBezTo>
-                    <a:pt x="12700" y="279400"/>
-                    <a:pt x="10160" y="290830"/>
-                    <a:pt x="7620" y="303530"/>
-                  </a:cubicBezTo>
-                  <a:cubicBezTo>
-                    <a:pt x="2540" y="327660"/>
-                    <a:pt x="0" y="354330"/>
-                    <a:pt x="0" y="379730"/>
-                  </a:cubicBezTo>
-                  <a:lnTo>
-                    <a:pt x="0" y="4803140"/>
-                  </a:lnTo>
-                  <a:cubicBezTo>
-                    <a:pt x="0" y="5012690"/>
-                    <a:pt x="170180" y="5182870"/>
-                    <a:pt x="379730" y="5182870"/>
-                  </a:cubicBezTo>
-                  <a:lnTo>
-                    <a:pt x="2184400" y="5182870"/>
-                  </a:lnTo>
-                  <a:cubicBezTo>
-                    <a:pt x="2393950" y="5182870"/>
-                    <a:pt x="2564130" y="5012690"/>
-                    <a:pt x="2564130" y="4803140"/>
-                  </a:cubicBezTo>
-                  <a:lnTo>
-                    <a:pt x="2564130" y="1184910"/>
-                  </a:lnTo>
-                  <a:close/>
-                  <a:moveTo>
-                    <a:pt x="2538730" y="1184910"/>
-                  </a:moveTo>
-                  <a:lnTo>
-                    <a:pt x="2538730" y="4804410"/>
-                  </a:lnTo>
-                  <a:cubicBezTo>
-                    <a:pt x="2538730" y="4999990"/>
-                    <a:pt x="2379980" y="5158740"/>
-                    <a:pt x="2184400" y="5158740"/>
-                  </a:cubicBezTo>
-                  <a:lnTo>
-                    <a:pt x="379730" y="5158740"/>
-                  </a:lnTo>
-                  <a:cubicBezTo>
-                    <a:pt x="184150" y="5158740"/>
-                    <a:pt x="25400" y="4999990"/>
-                    <a:pt x="25400" y="4804410"/>
-                  </a:cubicBezTo>
-                  <a:lnTo>
-                    <a:pt x="25400" y="381000"/>
-                  </a:lnTo>
-                  <a:cubicBezTo>
-                    <a:pt x="25400" y="184150"/>
-                    <a:pt x="184150" y="25400"/>
-                    <a:pt x="379730" y="25400"/>
-                  </a:cubicBezTo>
-                  <a:lnTo>
-                    <a:pt x="2184400" y="25400"/>
-                  </a:lnTo>
-                  <a:cubicBezTo>
-                    <a:pt x="2379980" y="25400"/>
-                    <a:pt x="2538730" y="184150"/>
-                    <a:pt x="2538730" y="379730"/>
-                  </a:cubicBezTo>
-                  <a:lnTo>
-                    <a:pt x="2538730" y="1184910"/>
-                  </a:lnTo>
-                  <a:close/>
-                </a:path>
-              </a:pathLst>
-            </a:custGeom>
-            <a:solidFill>
-              <a:srgbClr val="E9E9E9"/>
-            </a:solidFill>
-          </p:spPr>
-        </p:sp>
-      </p:grpSp>
-      <p:sp>
-        <p:nvSpPr>
-          <p:cNvPr name="TextBox 15" id="15"/>
-          <p:cNvSpPr txBox="true"/>
-          <p:nvPr/>
         </p:nvSpPr>
         <p:spPr>
-          <a:xfrm rot="0">
-            <a:off x="1597986" y="1944570"/>
+          <a:xfrm>
+            <a:off x="1597986" y="748061"/>
             <a:ext cx="4964854" cy="1242996"/>
           </a:xfrm>
           <a:prstGeom prst="rect">
@@ -7019,18 +5270,18 @@
           </a:prstGeom>
         </p:spPr>
         <p:txBody>
-          <a:bodyPr anchor="t" rtlCol="false" tIns="0" lIns="0" bIns="0" rIns="0">
+          <a:bodyPr lIns="0" tIns="0" rIns="0" bIns="0" rtlCol="0" anchor="t">
             <a:spAutoFit/>
           </a:bodyPr>
           <a:lstStyle/>
           <a:p>
-            <a:pPr algn="l" marL="0" indent="0" lvl="0">
+            <a:pPr marL="0" lvl="0" indent="0" algn="l">
               <a:lnSpc>
                 <a:spcPts val="10238"/>
               </a:lnSpc>
             </a:pPr>
             <a:r>
-              <a:rPr lang="en-US" b="true" sz="7313" spc="-511">
+              <a:rPr lang="en-US" sz="7313" b="1" spc="-511" dirty="0">
                 <a:solidFill>
                   <a:srgbClr val="000000"/>
                 </a:solidFill>
@@ -7046,13 +5297,13 @@
       </p:sp>
       <p:sp>
         <p:nvSpPr>
-          <p:cNvPr name="TextBox 16" id="16"/>
-          <p:cNvSpPr txBox="true"/>
+          <p:cNvPr id="16" name="TextBox 16"/>
+          <p:cNvSpPr txBox="1"/>
           <p:nvPr/>
         </p:nvSpPr>
         <p:spPr>
-          <a:xfrm rot="0">
-            <a:off x="1597986" y="2788054"/>
+          <a:xfrm>
+            <a:off x="1597986" y="1977969"/>
             <a:ext cx="4099425" cy="1242953"/>
           </a:xfrm>
           <a:prstGeom prst="rect">
@@ -7060,18 +5311,18 @@
           </a:prstGeom>
         </p:spPr>
         <p:txBody>
-          <a:bodyPr anchor="t" rtlCol="false" tIns="0" lIns="0" bIns="0" rIns="0">
+          <a:bodyPr lIns="0" tIns="0" rIns="0" bIns="0" rtlCol="0" anchor="t">
             <a:spAutoFit/>
           </a:bodyPr>
           <a:lstStyle/>
           <a:p>
-            <a:pPr algn="l" marL="0" indent="0" lvl="0">
+            <a:pPr marL="0" lvl="0" indent="0" algn="l">
               <a:lnSpc>
                 <a:spcPts val="10240"/>
               </a:lnSpc>
             </a:pPr>
             <a:r>
-              <a:rPr lang="en-US" b="true" sz="7314" spc="-512">
+              <a:rPr lang="en-US" sz="7314" b="1" spc="-512" dirty="0">
                 <a:solidFill>
                   <a:srgbClr val="3972F0"/>
                 </a:solidFill>
@@ -7087,12 +5338,12 @@
       </p:sp>
       <p:sp>
         <p:nvSpPr>
-          <p:cNvPr name="TextBox 17" id="17"/>
-          <p:cNvSpPr txBox="true"/>
+          <p:cNvPr id="17" name="TextBox 17"/>
+          <p:cNvSpPr txBox="1"/>
           <p:nvPr/>
         </p:nvSpPr>
         <p:spPr>
-          <a:xfrm rot="0">
+          <a:xfrm>
             <a:off x="1597986" y="4806288"/>
             <a:ext cx="6121442" cy="717607"/>
           </a:xfrm>
@@ -7101,12 +5352,12 @@
           </a:prstGeom>
         </p:spPr>
         <p:txBody>
-          <a:bodyPr anchor="t" rtlCol="false" tIns="0" lIns="0" bIns="0" rIns="0">
+          <a:bodyPr lIns="0" tIns="0" rIns="0" bIns="0" rtlCol="0" anchor="t">
             <a:spAutoFit/>
           </a:bodyPr>
           <a:lstStyle/>
           <a:p>
-            <a:pPr algn="l" marL="0" indent="0" lvl="0">
+            <a:pPr marL="0" lvl="0" indent="0" algn="l">
               <a:lnSpc>
                 <a:spcPts val="1962"/>
               </a:lnSpc>
@@ -7128,12 +5379,12 @@
       </p:sp>
       <p:sp>
         <p:nvSpPr>
-          <p:cNvPr name="TextBox 18" id="18"/>
-          <p:cNvSpPr txBox="true"/>
+          <p:cNvPr id="18" name="TextBox 18"/>
+          <p:cNvSpPr txBox="1"/>
           <p:nvPr/>
         </p:nvSpPr>
         <p:spPr>
-          <a:xfrm rot="0">
+          <a:xfrm>
             <a:off x="1597986" y="4336473"/>
             <a:ext cx="1795677" cy="279328"/>
           </a:xfrm>
@@ -7142,18 +5393,18 @@
           </a:prstGeom>
         </p:spPr>
         <p:txBody>
-          <a:bodyPr anchor="t" rtlCol="false" tIns="0" lIns="0" bIns="0" rIns="0">
+          <a:bodyPr lIns="0" tIns="0" rIns="0" bIns="0" rtlCol="0" anchor="t">
             <a:spAutoFit/>
           </a:bodyPr>
           <a:lstStyle/>
           <a:p>
-            <a:pPr algn="l" marL="0" indent="0" lvl="0">
+            <a:pPr marL="0" lvl="0" indent="0" algn="l">
               <a:lnSpc>
                 <a:spcPts val="2398"/>
               </a:lnSpc>
             </a:pPr>
             <a:r>
-              <a:rPr lang="en-US" b="true" sz="1713">
+              <a:rPr lang="en-US" sz="1713" b="1">
                 <a:solidFill>
                   <a:srgbClr val="000000"/>
                 </a:solidFill>
@@ -7169,13 +5420,13 @@
       </p:sp>
       <p:sp>
         <p:nvSpPr>
-          <p:cNvPr name="TextBox 19" id="19"/>
-          <p:cNvSpPr txBox="true"/>
+          <p:cNvPr id="19" name="TextBox 19"/>
+          <p:cNvSpPr txBox="1"/>
           <p:nvPr/>
         </p:nvSpPr>
         <p:spPr>
-          <a:xfrm rot="0">
-            <a:off x="1597986" y="6375781"/>
+          <a:xfrm>
+            <a:off x="1597986" y="7983626"/>
             <a:ext cx="6121442" cy="717607"/>
           </a:xfrm>
           <a:prstGeom prst="rect">
@@ -7183,18 +5434,18 @@
           </a:prstGeom>
         </p:spPr>
         <p:txBody>
-          <a:bodyPr anchor="t" rtlCol="false" tIns="0" lIns="0" bIns="0" rIns="0">
+          <a:bodyPr lIns="0" tIns="0" rIns="0" bIns="0" rtlCol="0" anchor="t">
             <a:spAutoFit/>
           </a:bodyPr>
           <a:lstStyle/>
           <a:p>
-            <a:pPr algn="l" marL="0" indent="0" lvl="0">
+            <a:pPr marL="0" lvl="0" indent="0" algn="l">
               <a:lnSpc>
                 <a:spcPts val="1962"/>
               </a:lnSpc>
             </a:pPr>
             <a:r>
-              <a:rPr lang="en-US" sz="1401">
+              <a:rPr lang="en-US" sz="1401" dirty="0">
                 <a:solidFill>
                   <a:srgbClr val="000000"/>
                 </a:solidFill>
@@ -7210,13 +5461,13 @@
       </p:sp>
       <p:sp>
         <p:nvSpPr>
-          <p:cNvPr name="TextBox 20" id="20"/>
-          <p:cNvSpPr txBox="true"/>
+          <p:cNvPr id="20" name="TextBox 20"/>
+          <p:cNvSpPr txBox="1"/>
           <p:nvPr/>
         </p:nvSpPr>
         <p:spPr>
-          <a:xfrm rot="0">
-            <a:off x="1597986" y="5905966"/>
+          <a:xfrm>
+            <a:off x="1597986" y="7353300"/>
             <a:ext cx="1795677" cy="279328"/>
           </a:xfrm>
           <a:prstGeom prst="rect">
@@ -7224,18 +5475,18 @@
           </a:prstGeom>
         </p:spPr>
         <p:txBody>
-          <a:bodyPr anchor="t" rtlCol="false" tIns="0" lIns="0" bIns="0" rIns="0">
+          <a:bodyPr lIns="0" tIns="0" rIns="0" bIns="0" rtlCol="0" anchor="t">
             <a:spAutoFit/>
           </a:bodyPr>
           <a:lstStyle/>
           <a:p>
-            <a:pPr algn="l" marL="0" indent="0" lvl="0">
+            <a:pPr marL="0" lvl="0" indent="0" algn="l">
               <a:lnSpc>
                 <a:spcPts val="2398"/>
               </a:lnSpc>
             </a:pPr>
             <a:r>
-              <a:rPr lang="en-US" b="true" sz="1713">
+              <a:rPr lang="en-US" sz="1713" b="1" dirty="0">
                 <a:solidFill>
                   <a:srgbClr val="000000"/>
                 </a:solidFill>
@@ -7251,13 +5502,13 @@
       </p:sp>
       <p:sp>
         <p:nvSpPr>
-          <p:cNvPr name="TextBox 21" id="21"/>
-          <p:cNvSpPr txBox="true"/>
+          <p:cNvPr id="21" name="TextBox 21"/>
+          <p:cNvSpPr txBox="1"/>
           <p:nvPr/>
         </p:nvSpPr>
         <p:spPr>
-          <a:xfrm rot="0">
-            <a:off x="1597986" y="7944301"/>
+          <a:xfrm>
+            <a:off x="10363200" y="6045630"/>
             <a:ext cx="6121442" cy="717607"/>
           </a:xfrm>
           <a:prstGeom prst="rect">
@@ -7265,18 +5516,18 @@
           </a:prstGeom>
         </p:spPr>
         <p:txBody>
-          <a:bodyPr anchor="t" rtlCol="false" tIns="0" lIns="0" bIns="0" rIns="0">
+          <a:bodyPr lIns="0" tIns="0" rIns="0" bIns="0" rtlCol="0" anchor="t">
             <a:spAutoFit/>
           </a:bodyPr>
           <a:lstStyle/>
           <a:p>
-            <a:pPr algn="l" marL="0" indent="0" lvl="0">
+            <a:pPr marL="0" lvl="0" indent="0" algn="l">
               <a:lnSpc>
                 <a:spcPts val="1962"/>
               </a:lnSpc>
             </a:pPr>
             <a:r>
-              <a:rPr lang="en-US" sz="1401">
+              <a:rPr lang="en-US" sz="1401" dirty="0">
                 <a:solidFill>
                   <a:srgbClr val="000000"/>
                 </a:solidFill>
@@ -7292,13 +5543,13 @@
       </p:sp>
       <p:sp>
         <p:nvSpPr>
-          <p:cNvPr name="TextBox 22" id="22"/>
-          <p:cNvSpPr txBox="true"/>
+          <p:cNvPr id="22" name="TextBox 22"/>
+          <p:cNvSpPr txBox="1"/>
           <p:nvPr/>
         </p:nvSpPr>
         <p:spPr>
-          <a:xfrm rot="0">
-            <a:off x="1597986" y="7474486"/>
+          <a:xfrm>
+            <a:off x="10363200" y="5138530"/>
             <a:ext cx="1795677" cy="279328"/>
           </a:xfrm>
           <a:prstGeom prst="rect">
@@ -7306,18 +5557,18 @@
           </a:prstGeom>
         </p:spPr>
         <p:txBody>
-          <a:bodyPr anchor="t" rtlCol="false" tIns="0" lIns="0" bIns="0" rIns="0">
+          <a:bodyPr lIns="0" tIns="0" rIns="0" bIns="0" rtlCol="0" anchor="t">
             <a:spAutoFit/>
           </a:bodyPr>
           <a:lstStyle/>
           <a:p>
-            <a:pPr algn="l" marL="0" indent="0" lvl="0">
+            <a:pPr marL="0" lvl="0" indent="0" algn="l">
               <a:lnSpc>
                 <a:spcPts val="2398"/>
               </a:lnSpc>
             </a:pPr>
             <a:r>
-              <a:rPr lang="en-US" b="true" sz="1713">
+              <a:rPr lang="en-US" sz="1713" b="1" dirty="0">
                 <a:solidFill>
                   <a:srgbClr val="000000"/>
                 </a:solidFill>
@@ -7331,451 +5582,6 @@
           </a:p>
         </p:txBody>
       </p:sp>
-      <p:grpSp>
-        <p:nvGrpSpPr>
-          <p:cNvPr name="Group 23" id="23"/>
-          <p:cNvGrpSpPr/>
-          <p:nvPr/>
-        </p:nvGrpSpPr>
-        <p:grpSpPr>
-          <a:xfrm rot="0">
-            <a:off x="-17259300" y="-1690561"/>
-            <a:ext cx="17966065" cy="12844173"/>
-            <a:chOff x="0" y="0"/>
-            <a:chExt cx="4731803" cy="3382827"/>
-          </a:xfrm>
-        </p:grpSpPr>
-        <p:sp>
-          <p:nvSpPr>
-            <p:cNvPr name="Freeform 24" id="24"/>
-            <p:cNvSpPr/>
-            <p:nvPr/>
-          </p:nvSpPr>
-          <p:spPr>
-            <a:xfrm flipH="false" flipV="false" rot="0">
-              <a:off x="0" y="0"/>
-              <a:ext cx="4731803" cy="3382827"/>
-            </a:xfrm>
-            <a:custGeom>
-              <a:avLst/>
-              <a:gdLst/>
-              <a:ahLst/>
-              <a:cxnLst/>
-              <a:rect r="r" b="b" t="t" l="l"/>
-              <a:pathLst>
-                <a:path h="3382827" w="4731803">
-                  <a:moveTo>
-                    <a:pt x="21977" y="0"/>
-                  </a:moveTo>
-                  <a:lnTo>
-                    <a:pt x="4709826" y="0"/>
-                  </a:lnTo>
-                  <a:cubicBezTo>
-                    <a:pt x="4715655" y="0"/>
-                    <a:pt x="4721245" y="2315"/>
-                    <a:pt x="4725366" y="6437"/>
-                  </a:cubicBezTo>
-                  <a:cubicBezTo>
-                    <a:pt x="4729488" y="10558"/>
-                    <a:pt x="4731803" y="16148"/>
-                    <a:pt x="4731803" y="21977"/>
-                  </a:cubicBezTo>
-                  <a:lnTo>
-                    <a:pt x="4731803" y="3360850"/>
-                  </a:lnTo>
-                  <a:cubicBezTo>
-                    <a:pt x="4731803" y="3366679"/>
-                    <a:pt x="4729488" y="3372269"/>
-                    <a:pt x="4725366" y="3376390"/>
-                  </a:cubicBezTo>
-                  <a:cubicBezTo>
-                    <a:pt x="4721245" y="3380512"/>
-                    <a:pt x="4715655" y="3382827"/>
-                    <a:pt x="4709826" y="3382827"/>
-                  </a:cubicBezTo>
-                  <a:lnTo>
-                    <a:pt x="21977" y="3382827"/>
-                  </a:lnTo>
-                  <a:cubicBezTo>
-                    <a:pt x="16148" y="3382827"/>
-                    <a:pt x="10558" y="3380512"/>
-                    <a:pt x="6437" y="3376390"/>
-                  </a:cubicBezTo>
-                  <a:cubicBezTo>
-                    <a:pt x="2315" y="3372269"/>
-                    <a:pt x="0" y="3366679"/>
-                    <a:pt x="0" y="3360850"/>
-                  </a:cubicBezTo>
-                  <a:lnTo>
-                    <a:pt x="0" y="21977"/>
-                  </a:lnTo>
-                  <a:cubicBezTo>
-                    <a:pt x="0" y="16148"/>
-                    <a:pt x="2315" y="10558"/>
-                    <a:pt x="6437" y="6437"/>
-                  </a:cubicBezTo>
-                  <a:cubicBezTo>
-                    <a:pt x="10558" y="2315"/>
-                    <a:pt x="16148" y="0"/>
-                    <a:pt x="21977" y="0"/>
-                  </a:cubicBezTo>
-                  <a:close/>
-                </a:path>
-              </a:pathLst>
-            </a:custGeom>
-            <a:solidFill>
-              <a:srgbClr val="3972F0"/>
-            </a:solidFill>
-          </p:spPr>
-        </p:sp>
-        <p:sp>
-          <p:nvSpPr>
-            <p:cNvPr name="TextBox 25" id="25"/>
-            <p:cNvSpPr txBox="true"/>
-            <p:nvPr/>
-          </p:nvSpPr>
-          <p:spPr>
-            <a:xfrm>
-              <a:off x="0" y="-38100"/>
-              <a:ext cx="4731803" cy="3420927"/>
-            </a:xfrm>
-            <a:prstGeom prst="rect">
-              <a:avLst/>
-            </a:prstGeom>
-          </p:spPr>
-          <p:txBody>
-            <a:bodyPr anchor="ctr" rtlCol="false" tIns="50800" lIns="50800" bIns="50800" rIns="50800"/>
-            <a:lstStyle/>
-            <a:p>
-              <a:pPr algn="ctr" marL="0" indent="0" lvl="0">
-                <a:lnSpc>
-                  <a:spcPts val="2659"/>
-                </a:lnSpc>
-              </a:pPr>
-            </a:p>
-          </p:txBody>
-        </p:sp>
-      </p:grpSp>
-      <p:grpSp>
-        <p:nvGrpSpPr>
-          <p:cNvPr name="Group 26" id="26"/>
-          <p:cNvGrpSpPr/>
-          <p:nvPr/>
-        </p:nvGrpSpPr>
-        <p:grpSpPr>
-          <a:xfrm rot="0">
-            <a:off x="8666288" y="9217983"/>
-            <a:ext cx="2138034" cy="2138034"/>
-            <a:chOff x="0" y="0"/>
-            <a:chExt cx="812800" cy="812800"/>
-          </a:xfrm>
-        </p:grpSpPr>
-        <p:sp>
-          <p:nvSpPr>
-            <p:cNvPr name="Freeform 27" id="27"/>
-            <p:cNvSpPr/>
-            <p:nvPr/>
-          </p:nvSpPr>
-          <p:spPr>
-            <a:xfrm flipH="false" flipV="false" rot="0">
-              <a:off x="0" y="0"/>
-              <a:ext cx="812800" cy="812800"/>
-            </a:xfrm>
-            <a:custGeom>
-              <a:avLst/>
-              <a:gdLst/>
-              <a:ahLst/>
-              <a:cxnLst/>
-              <a:rect r="r" b="b" t="t" l="l"/>
-              <a:pathLst>
-                <a:path h="812800" w="812800">
-                  <a:moveTo>
-                    <a:pt x="406400" y="0"/>
-                  </a:moveTo>
-                  <a:cubicBezTo>
-                    <a:pt x="181951" y="0"/>
-                    <a:pt x="0" y="181951"/>
-                    <a:pt x="0" y="406400"/>
-                  </a:cubicBezTo>
-                  <a:cubicBezTo>
-                    <a:pt x="0" y="630849"/>
-                    <a:pt x="181951" y="812800"/>
-                    <a:pt x="406400" y="812800"/>
-                  </a:cubicBezTo>
-                  <a:cubicBezTo>
-                    <a:pt x="630849" y="812800"/>
-                    <a:pt x="812800" y="630849"/>
-                    <a:pt x="812800" y="406400"/>
-                  </a:cubicBezTo>
-                  <a:cubicBezTo>
-                    <a:pt x="812800" y="181951"/>
-                    <a:pt x="630849" y="0"/>
-                    <a:pt x="406400" y="0"/>
-                  </a:cubicBezTo>
-                  <a:close/>
-                </a:path>
-              </a:pathLst>
-            </a:custGeom>
-            <a:ln w="628650" cap="sq">
-              <a:gradFill>
-                <a:gsLst>
-                  <a:gs pos="0">
-                    <a:srgbClr val="3972F0">
-                      <a:alpha val="100000"/>
-                    </a:srgbClr>
-                  </a:gs>
-                  <a:gs pos="100000">
-                    <a:srgbClr val="1CDAFF">
-                      <a:alpha val="100000"/>
-                    </a:srgbClr>
-                  </a:gs>
-                </a:gsLst>
-                <a:lin ang="5400000"/>
-              </a:gradFill>
-              <a:prstDash val="solid"/>
-              <a:miter/>
-            </a:ln>
-          </p:spPr>
-        </p:sp>
-        <p:sp>
-          <p:nvSpPr>
-            <p:cNvPr name="TextBox 28" id="28"/>
-            <p:cNvSpPr txBox="true"/>
-            <p:nvPr/>
-          </p:nvSpPr>
-          <p:spPr>
-            <a:xfrm>
-              <a:off x="76200" y="38100"/>
-              <a:ext cx="660400" cy="698500"/>
-            </a:xfrm>
-            <a:prstGeom prst="rect">
-              <a:avLst/>
-            </a:prstGeom>
-          </p:spPr>
-          <p:txBody>
-            <a:bodyPr anchor="ctr" rtlCol="false" tIns="50800" lIns="50800" bIns="50800" rIns="50800"/>
-            <a:lstStyle/>
-            <a:p>
-              <a:pPr algn="ctr" marL="0" indent="0" lvl="0">
-                <a:lnSpc>
-                  <a:spcPts val="2659"/>
-                </a:lnSpc>
-                <a:spcBef>
-                  <a:spcPct val="0"/>
-                </a:spcBef>
-              </a:pPr>
-            </a:p>
-          </p:txBody>
-        </p:sp>
-      </p:grpSp>
-      <p:sp>
-        <p:nvSpPr>
-          <p:cNvPr name="Freeform 29" id="29"/>
-          <p:cNvSpPr/>
-          <p:nvPr/>
-        </p:nvSpPr>
-        <p:spPr>
-          <a:xfrm flipH="false" flipV="false" rot="0">
-            <a:off x="15492434" y="7876025"/>
-            <a:ext cx="1766866" cy="969568"/>
-          </a:xfrm>
-          <a:custGeom>
-            <a:avLst/>
-            <a:gdLst/>
-            <a:ahLst/>
-            <a:cxnLst/>
-            <a:rect r="r" b="b" t="t" l="l"/>
-            <a:pathLst>
-              <a:path h="969568" w="1766866">
-                <a:moveTo>
-                  <a:pt x="0" y="0"/>
-                </a:moveTo>
-                <a:lnTo>
-                  <a:pt x="1766866" y="0"/>
-                </a:lnTo>
-                <a:lnTo>
-                  <a:pt x="1766866" y="969568"/>
-                </a:lnTo>
-                <a:lnTo>
-                  <a:pt x="0" y="969568"/>
-                </a:lnTo>
-                <a:lnTo>
-                  <a:pt x="0" y="0"/>
-                </a:lnTo>
-                <a:close/>
-              </a:path>
-            </a:pathLst>
-          </a:custGeom>
-          <a:blipFill>
-            <a:blip r:embed="rId3">
-              <a:extLst>
-                <a:ext uri="{96DAC541-7B7A-43D3-8B79-37D633B846F1}">
-                  <asvg:svgBlip xmlns:asvg="http://schemas.microsoft.com/office/drawing/2016/SVG/main" r:embed="rId4"/>
-                </a:ext>
-              </a:extLst>
-            </a:blip>
-            <a:stretch>
-              <a:fillRect l="0" t="0" r="0" b="0"/>
-            </a:stretch>
-          </a:blipFill>
-        </p:spPr>
-      </p:sp>
-      <p:sp>
-        <p:nvSpPr>
-          <p:cNvPr name="Freeform 30" id="30"/>
-          <p:cNvSpPr/>
-          <p:nvPr/>
-        </p:nvSpPr>
-        <p:spPr>
-          <a:xfrm flipH="false" flipV="false" rot="0">
-            <a:off x="7477266" y="1497656"/>
-            <a:ext cx="1766866" cy="969568"/>
-          </a:xfrm>
-          <a:custGeom>
-            <a:avLst/>
-            <a:gdLst/>
-            <a:ahLst/>
-            <a:cxnLst/>
-            <a:rect r="r" b="b" t="t" l="l"/>
-            <a:pathLst>
-              <a:path h="969568" w="1766866">
-                <a:moveTo>
-                  <a:pt x="0" y="0"/>
-                </a:moveTo>
-                <a:lnTo>
-                  <a:pt x="1766866" y="0"/>
-                </a:lnTo>
-                <a:lnTo>
-                  <a:pt x="1766866" y="969568"/>
-                </a:lnTo>
-                <a:lnTo>
-                  <a:pt x="0" y="969568"/>
-                </a:lnTo>
-                <a:lnTo>
-                  <a:pt x="0" y="0"/>
-                </a:lnTo>
-                <a:close/>
-              </a:path>
-            </a:pathLst>
-          </a:custGeom>
-          <a:blipFill>
-            <a:blip r:embed="rId3">
-              <a:extLst>
-                <a:ext uri="{96DAC541-7B7A-43D3-8B79-37D633B846F1}">
-                  <asvg:svgBlip xmlns:asvg="http://schemas.microsoft.com/office/drawing/2016/SVG/main" r:embed="rId4"/>
-                </a:ext>
-              </a:extLst>
-            </a:blip>
-            <a:stretch>
-              <a:fillRect l="0" t="0" r="0" b="0"/>
-            </a:stretch>
-          </a:blipFill>
-        </p:spPr>
-      </p:sp>
-      <p:sp>
-        <p:nvSpPr>
-          <p:cNvPr name="Freeform 31" id="31"/>
-          <p:cNvSpPr/>
-          <p:nvPr/>
-        </p:nvSpPr>
-        <p:spPr>
-          <a:xfrm flipH="false" flipV="false" rot="2599173">
-            <a:off x="16941766" y="6930382"/>
-            <a:ext cx="635068" cy="585453"/>
-          </a:xfrm>
-          <a:custGeom>
-            <a:avLst/>
-            <a:gdLst/>
-            <a:ahLst/>
-            <a:cxnLst/>
-            <a:rect r="r" b="b" t="t" l="l"/>
-            <a:pathLst>
-              <a:path h="585453" w="635068">
-                <a:moveTo>
-                  <a:pt x="0" y="0"/>
-                </a:moveTo>
-                <a:lnTo>
-                  <a:pt x="635068" y="0"/>
-                </a:lnTo>
-                <a:lnTo>
-                  <a:pt x="635068" y="585453"/>
-                </a:lnTo>
-                <a:lnTo>
-                  <a:pt x="0" y="585453"/>
-                </a:lnTo>
-                <a:lnTo>
-                  <a:pt x="0" y="0"/>
-                </a:lnTo>
-                <a:close/>
-              </a:path>
-            </a:pathLst>
-          </a:custGeom>
-          <a:blipFill>
-            <a:blip r:embed="rId5">
-              <a:extLst>
-                <a:ext uri="{96DAC541-7B7A-43D3-8B79-37D633B846F1}">
-                  <asvg:svgBlip xmlns:asvg="http://schemas.microsoft.com/office/drawing/2016/SVG/main" r:embed="rId6"/>
-                </a:ext>
-              </a:extLst>
-            </a:blip>
-            <a:stretch>
-              <a:fillRect l="-31484" t="-39236" r="-39297" b="-46019"/>
-            </a:stretch>
-          </a:blipFill>
-        </p:spPr>
-      </p:sp>
-      <p:sp>
-        <p:nvSpPr>
-          <p:cNvPr name="Freeform 32" id="32"/>
-          <p:cNvSpPr/>
-          <p:nvPr/>
-        </p:nvSpPr>
-        <p:spPr>
-          <a:xfrm flipH="false" flipV="false" rot="2599173">
-            <a:off x="8656053" y="2185706"/>
-            <a:ext cx="969701" cy="893943"/>
-          </a:xfrm>
-          <a:custGeom>
-            <a:avLst/>
-            <a:gdLst/>
-            <a:ahLst/>
-            <a:cxnLst/>
-            <a:rect r="r" b="b" t="t" l="l"/>
-            <a:pathLst>
-              <a:path h="893943" w="969701">
-                <a:moveTo>
-                  <a:pt x="0" y="0"/>
-                </a:moveTo>
-                <a:lnTo>
-                  <a:pt x="969701" y="0"/>
-                </a:lnTo>
-                <a:lnTo>
-                  <a:pt x="969701" y="893943"/>
-                </a:lnTo>
-                <a:lnTo>
-                  <a:pt x="0" y="893943"/>
-                </a:lnTo>
-                <a:lnTo>
-                  <a:pt x="0" y="0"/>
-                </a:lnTo>
-                <a:close/>
-              </a:path>
-            </a:pathLst>
-          </a:custGeom>
-          <a:blipFill>
-            <a:blip r:embed="rId5">
-              <a:extLst>
-                <a:ext uri="{96DAC541-7B7A-43D3-8B79-37D633B846F1}">
-                  <asvg:svgBlip xmlns:asvg="http://schemas.microsoft.com/office/drawing/2016/SVG/main" r:embed="rId6"/>
-                </a:ext>
-              </a:extLst>
-            </a:blip>
-            <a:stretch>
-              <a:fillRect l="-31484" t="-39236" r="-39297" b="-46019"/>
-            </a:stretch>
-          </a:blipFill>
-        </p:spPr>
-      </p:sp>
     </p:spTree>
   </p:cSld>
   <p:clrMapOvr>
@@ -7785,7 +5591,7 @@
 </file>
 
 <file path=ppt/slides/slide4.xml><?xml version="1.0" encoding="utf-8"?>
-<p:sld xmlns:p="http://schemas.openxmlformats.org/presentationml/2006/main" xmlns:a="http://schemas.openxmlformats.org/drawingml/2006/main" xmlns:r="http://schemas.openxmlformats.org/officeDocument/2006/relationships">
+<p:sld xmlns:a="http://schemas.openxmlformats.org/drawingml/2006/main" xmlns:r="http://schemas.openxmlformats.org/officeDocument/2006/relationships" xmlns:p="http://schemas.openxmlformats.org/presentationml/2006/main">
   <p:cSld>
     <p:spTree>
       <p:nvGrpSpPr>
@@ -7801,1111 +5607,25 @@
           <a:chExt cx="0" cy="0"/>
         </a:xfrm>
       </p:grpSpPr>
-      <p:grpSp>
-        <p:nvGrpSpPr>
-          <p:cNvPr name="Group 2" id="2"/>
-          <p:cNvGrpSpPr/>
-          <p:nvPr/>
-        </p:nvGrpSpPr>
-        <p:grpSpPr>
-          <a:xfrm rot="0">
-            <a:off x="9648350" y="721476"/>
-            <a:ext cx="2138034" cy="2138034"/>
-            <a:chOff x="0" y="0"/>
-            <a:chExt cx="812800" cy="812800"/>
-          </a:xfrm>
-        </p:grpSpPr>
-        <p:sp>
-          <p:nvSpPr>
-            <p:cNvPr name="Freeform 3" id="3"/>
-            <p:cNvSpPr/>
-            <p:nvPr/>
-          </p:nvSpPr>
-          <p:spPr>
-            <a:xfrm flipH="false" flipV="false" rot="0">
-              <a:off x="0" y="0"/>
-              <a:ext cx="812800" cy="812800"/>
-            </a:xfrm>
-            <a:custGeom>
-              <a:avLst/>
-              <a:gdLst/>
-              <a:ahLst/>
-              <a:cxnLst/>
-              <a:rect r="r" b="b" t="t" l="l"/>
-              <a:pathLst>
-                <a:path h="812800" w="812800">
-                  <a:moveTo>
-                    <a:pt x="406400" y="0"/>
-                  </a:moveTo>
-                  <a:cubicBezTo>
-                    <a:pt x="181951" y="0"/>
-                    <a:pt x="0" y="181951"/>
-                    <a:pt x="0" y="406400"/>
-                  </a:cubicBezTo>
-                  <a:cubicBezTo>
-                    <a:pt x="0" y="630849"/>
-                    <a:pt x="181951" y="812800"/>
-                    <a:pt x="406400" y="812800"/>
-                  </a:cubicBezTo>
-                  <a:cubicBezTo>
-                    <a:pt x="630849" y="812800"/>
-                    <a:pt x="812800" y="630849"/>
-                    <a:pt x="812800" y="406400"/>
-                  </a:cubicBezTo>
-                  <a:cubicBezTo>
-                    <a:pt x="812800" y="181951"/>
-                    <a:pt x="630849" y="0"/>
-                    <a:pt x="406400" y="0"/>
-                  </a:cubicBezTo>
-                  <a:close/>
-                </a:path>
-              </a:pathLst>
-            </a:custGeom>
-            <a:ln w="628650" cap="sq">
-              <a:gradFill>
-                <a:gsLst>
-                  <a:gs pos="0">
-                    <a:srgbClr val="3972F0">
-                      <a:alpha val="100000"/>
-                    </a:srgbClr>
-                  </a:gs>
-                  <a:gs pos="100000">
-                    <a:srgbClr val="1CDAFF">
-                      <a:alpha val="100000"/>
-                    </a:srgbClr>
-                  </a:gs>
-                </a:gsLst>
-                <a:lin ang="5400000"/>
-              </a:gradFill>
-              <a:prstDash val="solid"/>
-              <a:miter/>
-            </a:ln>
-          </p:spPr>
-        </p:sp>
-        <p:sp>
-          <p:nvSpPr>
-            <p:cNvPr name="TextBox 4" id="4"/>
-            <p:cNvSpPr txBox="true"/>
-            <p:nvPr/>
-          </p:nvSpPr>
-          <p:spPr>
-            <a:xfrm>
-              <a:off x="76200" y="38100"/>
-              <a:ext cx="660400" cy="698500"/>
-            </a:xfrm>
-            <a:prstGeom prst="rect">
-              <a:avLst/>
-            </a:prstGeom>
-          </p:spPr>
-          <p:txBody>
-            <a:bodyPr anchor="ctr" rtlCol="false" tIns="50800" lIns="50800" bIns="50800" rIns="50800"/>
-            <a:lstStyle/>
-            <a:p>
-              <a:pPr algn="ctr" marL="0" indent="0" lvl="0">
-                <a:lnSpc>
-                  <a:spcPts val="2659"/>
-                </a:lnSpc>
-                <a:spcBef>
-                  <a:spcPct val="0"/>
-                </a:spcBef>
-              </a:pPr>
-            </a:p>
-          </p:txBody>
-        </p:sp>
-      </p:grpSp>
-      <p:grpSp>
-        <p:nvGrpSpPr>
-          <p:cNvPr name="Group 5" id="5"/>
-          <p:cNvGrpSpPr/>
-          <p:nvPr/>
-        </p:nvGrpSpPr>
-        <p:grpSpPr>
-          <a:xfrm rot="0">
-            <a:off x="10717367" y="-1278586"/>
-            <a:ext cx="10281391" cy="12844173"/>
-            <a:chOff x="0" y="0"/>
-            <a:chExt cx="2707856" cy="3382827"/>
-          </a:xfrm>
-        </p:grpSpPr>
-        <p:sp>
-          <p:nvSpPr>
-            <p:cNvPr name="Freeform 6" id="6"/>
-            <p:cNvSpPr/>
-            <p:nvPr/>
-          </p:nvSpPr>
-          <p:spPr>
-            <a:xfrm flipH="false" flipV="false" rot="0">
-              <a:off x="0" y="0"/>
-              <a:ext cx="2707856" cy="3382827"/>
-            </a:xfrm>
-            <a:custGeom>
-              <a:avLst/>
-              <a:gdLst/>
-              <a:ahLst/>
-              <a:cxnLst/>
-              <a:rect r="r" b="b" t="t" l="l"/>
-              <a:pathLst>
-                <a:path h="3382827" w="2707856">
-                  <a:moveTo>
-                    <a:pt x="38403" y="0"/>
-                  </a:moveTo>
-                  <a:lnTo>
-                    <a:pt x="2669453" y="0"/>
-                  </a:lnTo>
-                  <a:cubicBezTo>
-                    <a:pt x="2679638" y="0"/>
-                    <a:pt x="2689406" y="4046"/>
-                    <a:pt x="2696608" y="11248"/>
-                  </a:cubicBezTo>
-                  <a:cubicBezTo>
-                    <a:pt x="2703810" y="18450"/>
-                    <a:pt x="2707856" y="28218"/>
-                    <a:pt x="2707856" y="38403"/>
-                  </a:cubicBezTo>
-                  <a:lnTo>
-                    <a:pt x="2707856" y="3344424"/>
-                  </a:lnTo>
-                  <a:cubicBezTo>
-                    <a:pt x="2707856" y="3354609"/>
-                    <a:pt x="2703810" y="3364377"/>
-                    <a:pt x="2696608" y="3371579"/>
-                  </a:cubicBezTo>
-                  <a:cubicBezTo>
-                    <a:pt x="2689406" y="3378781"/>
-                    <a:pt x="2679638" y="3382827"/>
-                    <a:pt x="2669453" y="3382827"/>
-                  </a:cubicBezTo>
-                  <a:lnTo>
-                    <a:pt x="38403" y="3382827"/>
-                  </a:lnTo>
-                  <a:cubicBezTo>
-                    <a:pt x="28218" y="3382827"/>
-                    <a:pt x="18450" y="3378781"/>
-                    <a:pt x="11248" y="3371579"/>
-                  </a:cubicBezTo>
-                  <a:cubicBezTo>
-                    <a:pt x="4046" y="3364377"/>
-                    <a:pt x="0" y="3354609"/>
-                    <a:pt x="0" y="3344424"/>
-                  </a:cubicBezTo>
-                  <a:lnTo>
-                    <a:pt x="0" y="38403"/>
-                  </a:lnTo>
-                  <a:cubicBezTo>
-                    <a:pt x="0" y="28218"/>
-                    <a:pt x="4046" y="18450"/>
-                    <a:pt x="11248" y="11248"/>
-                  </a:cubicBezTo>
-                  <a:cubicBezTo>
-                    <a:pt x="18450" y="4046"/>
-                    <a:pt x="28218" y="0"/>
-                    <a:pt x="38403" y="0"/>
-                  </a:cubicBezTo>
-                  <a:close/>
-                </a:path>
-              </a:pathLst>
-            </a:custGeom>
-            <a:gradFill rotWithShape="true">
-              <a:gsLst>
-                <a:gs pos="0">
-                  <a:srgbClr val="3972F0">
-                    <a:alpha val="100000"/>
-                  </a:srgbClr>
-                </a:gs>
-                <a:gs pos="100000">
-                  <a:srgbClr val="1CDAFF">
-                    <a:alpha val="100000"/>
-                  </a:srgbClr>
-                </a:gs>
-              </a:gsLst>
-              <a:lin ang="5400000"/>
-            </a:gradFill>
-          </p:spPr>
-        </p:sp>
-        <p:sp>
-          <p:nvSpPr>
-            <p:cNvPr name="TextBox 7" id="7"/>
-            <p:cNvSpPr txBox="true"/>
-            <p:nvPr/>
-          </p:nvSpPr>
-          <p:spPr>
-            <a:xfrm>
-              <a:off x="0" y="-38100"/>
-              <a:ext cx="2707856" cy="3420927"/>
-            </a:xfrm>
-            <a:prstGeom prst="rect">
-              <a:avLst/>
-            </a:prstGeom>
-          </p:spPr>
-          <p:txBody>
-            <a:bodyPr anchor="ctr" rtlCol="false" tIns="50800" lIns="50800" bIns="50800" rIns="50800"/>
-            <a:lstStyle/>
-            <a:p>
-              <a:pPr algn="ctr" marL="0" indent="0" lvl="0">
-                <a:lnSpc>
-                  <a:spcPts val="2659"/>
-                </a:lnSpc>
-              </a:pPr>
-            </a:p>
-          </p:txBody>
-        </p:sp>
-      </p:grpSp>
-      <p:sp>
-        <p:nvSpPr>
-          <p:cNvPr name="TextBox 8" id="8"/>
-          <p:cNvSpPr txBox="true"/>
-          <p:nvPr/>
-        </p:nvSpPr>
-        <p:spPr>
-          <a:xfrm rot="0">
-            <a:off x="1597986" y="1954095"/>
-            <a:ext cx="5884621" cy="1070215"/>
-          </a:xfrm>
-          <a:prstGeom prst="rect">
-            <a:avLst/>
-          </a:prstGeom>
-        </p:spPr>
-        <p:txBody>
-          <a:bodyPr anchor="t" rtlCol="false" tIns="0" lIns="0" bIns="0" rIns="0">
-            <a:spAutoFit/>
-          </a:bodyPr>
-          <a:lstStyle/>
-          <a:p>
-            <a:pPr algn="l" marL="0" indent="0" lvl="0">
-              <a:lnSpc>
-                <a:spcPts val="8736"/>
-              </a:lnSpc>
-            </a:pPr>
-            <a:r>
-              <a:rPr lang="en-US" b="true" sz="6240" spc="-436">
-                <a:solidFill>
-                  <a:srgbClr val="000000"/>
-                </a:solidFill>
-                <a:latin typeface="Open Sauce Bold"/>
-                <a:ea typeface="Open Sauce Bold"/>
-                <a:cs typeface="Open Sauce Bold"/>
-                <a:sym typeface="Open Sauce Bold"/>
-              </a:rPr>
-              <a:t>Database Trends</a:t>
-            </a:r>
-          </a:p>
-        </p:txBody>
-      </p:sp>
-      <p:grpSp>
-        <p:nvGrpSpPr>
-          <p:cNvPr name="Group 9" id="9"/>
-          <p:cNvGrpSpPr/>
-          <p:nvPr/>
-        </p:nvGrpSpPr>
-        <p:grpSpPr>
-          <a:xfrm rot="0">
-            <a:off x="1597986" y="3534722"/>
-            <a:ext cx="8125260" cy="2556473"/>
-            <a:chOff x="0" y="0"/>
-            <a:chExt cx="2139986" cy="673310"/>
-          </a:xfrm>
-        </p:grpSpPr>
-        <p:sp>
-          <p:nvSpPr>
-            <p:cNvPr name="Freeform 10" id="10"/>
-            <p:cNvSpPr/>
-            <p:nvPr/>
-          </p:nvSpPr>
-          <p:spPr>
-            <a:xfrm flipH="false" flipV="false" rot="0">
-              <a:off x="0" y="0"/>
-              <a:ext cx="2139986" cy="673310"/>
-            </a:xfrm>
-            <a:custGeom>
-              <a:avLst/>
-              <a:gdLst/>
-              <a:ahLst/>
-              <a:cxnLst/>
-              <a:rect r="r" b="b" t="t" l="l"/>
-              <a:pathLst>
-                <a:path h="673310" w="2139986">
-                  <a:moveTo>
-                    <a:pt x="20962" y="0"/>
-                  </a:moveTo>
-                  <a:lnTo>
-                    <a:pt x="2119024" y="0"/>
-                  </a:lnTo>
-                  <a:cubicBezTo>
-                    <a:pt x="2130601" y="0"/>
-                    <a:pt x="2139986" y="9385"/>
-                    <a:pt x="2139986" y="20962"/>
-                  </a:cubicBezTo>
-                  <a:lnTo>
-                    <a:pt x="2139986" y="652348"/>
-                  </a:lnTo>
-                  <a:cubicBezTo>
-                    <a:pt x="2139986" y="657907"/>
-                    <a:pt x="2137777" y="663239"/>
-                    <a:pt x="2133846" y="667170"/>
-                  </a:cubicBezTo>
-                  <a:cubicBezTo>
-                    <a:pt x="2129915" y="671101"/>
-                    <a:pt x="2124583" y="673310"/>
-                    <a:pt x="2119024" y="673310"/>
-                  </a:cubicBezTo>
-                  <a:lnTo>
-                    <a:pt x="20962" y="673310"/>
-                  </a:lnTo>
-                  <a:cubicBezTo>
-                    <a:pt x="15403" y="673310"/>
-                    <a:pt x="10071" y="671101"/>
-                    <a:pt x="6140" y="667170"/>
-                  </a:cubicBezTo>
-                  <a:cubicBezTo>
-                    <a:pt x="2208" y="663239"/>
-                    <a:pt x="0" y="657907"/>
-                    <a:pt x="0" y="652348"/>
-                  </a:cubicBezTo>
-                  <a:lnTo>
-                    <a:pt x="0" y="20962"/>
-                  </a:lnTo>
-                  <a:cubicBezTo>
-                    <a:pt x="0" y="15403"/>
-                    <a:pt x="2208" y="10071"/>
-                    <a:pt x="6140" y="6140"/>
-                  </a:cubicBezTo>
-                  <a:cubicBezTo>
-                    <a:pt x="10071" y="2208"/>
-                    <a:pt x="15403" y="0"/>
-                    <a:pt x="20962" y="0"/>
-                  </a:cubicBezTo>
-                  <a:close/>
-                </a:path>
-              </a:pathLst>
-            </a:custGeom>
-            <a:solidFill>
-              <a:srgbClr val="F1F1F1"/>
-            </a:solidFill>
-          </p:spPr>
-        </p:sp>
-        <p:sp>
-          <p:nvSpPr>
-            <p:cNvPr name="TextBox 11" id="11"/>
-            <p:cNvSpPr txBox="true"/>
-            <p:nvPr/>
-          </p:nvSpPr>
-          <p:spPr>
-            <a:xfrm>
-              <a:off x="0" y="-38100"/>
-              <a:ext cx="2139986" cy="711410"/>
-            </a:xfrm>
-            <a:prstGeom prst="rect">
-              <a:avLst/>
-            </a:prstGeom>
-          </p:spPr>
-          <p:txBody>
-            <a:bodyPr anchor="ctr" rtlCol="false" tIns="50800" lIns="50800" bIns="50800" rIns="50800"/>
-            <a:lstStyle/>
-            <a:p>
-              <a:pPr algn="ctr" marL="0" indent="0" lvl="0">
-                <a:lnSpc>
-                  <a:spcPts val="2659"/>
-                </a:lnSpc>
-              </a:pPr>
-            </a:p>
-          </p:txBody>
-        </p:sp>
-      </p:grpSp>
-      <p:sp>
-        <p:nvSpPr>
-          <p:cNvPr name="TextBox 12" id="12"/>
-          <p:cNvSpPr txBox="true"/>
-          <p:nvPr/>
-        </p:nvSpPr>
-        <p:spPr>
-          <a:xfrm rot="0">
-            <a:off x="1885050" y="3853822"/>
-            <a:ext cx="7431406" cy="1564004"/>
-          </a:xfrm>
-          <a:prstGeom prst="rect">
-            <a:avLst/>
-          </a:prstGeom>
-        </p:spPr>
-        <p:txBody>
-          <a:bodyPr anchor="t" rtlCol="false" tIns="0" lIns="0" bIns="0" rIns="0">
-            <a:spAutoFit/>
-          </a:bodyPr>
-          <a:lstStyle/>
-          <a:p>
-            <a:pPr algn="l" marL="0" indent="0" lvl="0">
-              <a:lnSpc>
-                <a:spcPts val="2520"/>
-              </a:lnSpc>
-            </a:pPr>
-            <a:r>
-              <a:rPr lang="en-US" sz="1800">
-                <a:solidFill>
-                  <a:srgbClr val="000000"/>
-                </a:solidFill>
-                <a:latin typeface="Open Sauce"/>
-                <a:ea typeface="Open Sauce"/>
-                <a:cs typeface="Open Sauce"/>
-                <a:sym typeface="Open Sauce"/>
-              </a:rPr>
-              <a:t>SQL databases like MySQL and PostgreSQL remain the backbone of structured data storage, offering ACID compliance and reliable transaction processing. They excel at handling relational data with complex queries and are widely used for user accounts, financial records, and inventory systems.</a:t>
-            </a:r>
-          </a:p>
-        </p:txBody>
-      </p:sp>
-      <p:pic>
-        <p:nvPicPr>
-          <p:cNvPr name="Picture 13" id="13"/>
-          <p:cNvPicPr>
-            <a:picLocks noChangeAspect="true"/>
-          </p:cNvPicPr>
-          <p:nvPr/>
-        </p:nvPicPr>
-        <p:blipFill>
-          <a:blip r:embed="rId2"/>
-          <a:stretch>
-            <a:fillRect/>
-          </a:stretch>
-        </p:blipFill>
-        <p:spPr>
-          <a:xfrm rot="0">
-            <a:off x="10495434" y="1072455"/>
-            <a:ext cx="7794321" cy="8616456"/>
-          </a:xfrm>
-          <a:prstGeom prst="rect">
-            <a:avLst/>
-          </a:prstGeom>
-        </p:spPr>
-      </p:pic>
-      <p:grpSp>
-        <p:nvGrpSpPr>
-          <p:cNvPr name="Group 14" id="14"/>
-          <p:cNvGrpSpPr/>
-          <p:nvPr/>
-        </p:nvGrpSpPr>
-        <p:grpSpPr>
-          <a:xfrm rot="0">
-            <a:off x="1597986" y="6414400"/>
-            <a:ext cx="8125260" cy="2556473"/>
-            <a:chOff x="0" y="0"/>
-            <a:chExt cx="2139986" cy="673310"/>
-          </a:xfrm>
-        </p:grpSpPr>
-        <p:sp>
-          <p:nvSpPr>
-            <p:cNvPr name="Freeform 15" id="15"/>
-            <p:cNvSpPr/>
-            <p:nvPr/>
-          </p:nvSpPr>
-          <p:spPr>
-            <a:xfrm flipH="false" flipV="false" rot="0">
-              <a:off x="0" y="0"/>
-              <a:ext cx="2139986" cy="673310"/>
-            </a:xfrm>
-            <a:custGeom>
-              <a:avLst/>
-              <a:gdLst/>
-              <a:ahLst/>
-              <a:cxnLst/>
-              <a:rect r="r" b="b" t="t" l="l"/>
-              <a:pathLst>
-                <a:path h="673310" w="2139986">
-                  <a:moveTo>
-                    <a:pt x="20962" y="0"/>
-                  </a:moveTo>
-                  <a:lnTo>
-                    <a:pt x="2119024" y="0"/>
-                  </a:lnTo>
-                  <a:cubicBezTo>
-                    <a:pt x="2130601" y="0"/>
-                    <a:pt x="2139986" y="9385"/>
-                    <a:pt x="2139986" y="20962"/>
-                  </a:cubicBezTo>
-                  <a:lnTo>
-                    <a:pt x="2139986" y="652348"/>
-                  </a:lnTo>
-                  <a:cubicBezTo>
-                    <a:pt x="2139986" y="657907"/>
-                    <a:pt x="2137777" y="663239"/>
-                    <a:pt x="2133846" y="667170"/>
-                  </a:cubicBezTo>
-                  <a:cubicBezTo>
-                    <a:pt x="2129915" y="671101"/>
-                    <a:pt x="2124583" y="673310"/>
-                    <a:pt x="2119024" y="673310"/>
-                  </a:cubicBezTo>
-                  <a:lnTo>
-                    <a:pt x="20962" y="673310"/>
-                  </a:lnTo>
-                  <a:cubicBezTo>
-                    <a:pt x="15403" y="673310"/>
-                    <a:pt x="10071" y="671101"/>
-                    <a:pt x="6140" y="667170"/>
-                  </a:cubicBezTo>
-                  <a:cubicBezTo>
-                    <a:pt x="2208" y="663239"/>
-                    <a:pt x="0" y="657907"/>
-                    <a:pt x="0" y="652348"/>
-                  </a:cubicBezTo>
-                  <a:lnTo>
-                    <a:pt x="0" y="20962"/>
-                  </a:lnTo>
-                  <a:cubicBezTo>
-                    <a:pt x="0" y="15403"/>
-                    <a:pt x="2208" y="10071"/>
-                    <a:pt x="6140" y="6140"/>
-                  </a:cubicBezTo>
-                  <a:cubicBezTo>
-                    <a:pt x="10071" y="2208"/>
-                    <a:pt x="15403" y="0"/>
-                    <a:pt x="20962" y="0"/>
-                  </a:cubicBezTo>
-                  <a:close/>
-                </a:path>
-              </a:pathLst>
-            </a:custGeom>
-            <a:solidFill>
-              <a:srgbClr val="F1F1F1"/>
-            </a:solidFill>
-          </p:spPr>
-        </p:sp>
-        <p:sp>
-          <p:nvSpPr>
-            <p:cNvPr name="TextBox 16" id="16"/>
-            <p:cNvSpPr txBox="true"/>
-            <p:nvPr/>
-          </p:nvSpPr>
-          <p:spPr>
-            <a:xfrm>
-              <a:off x="0" y="-38100"/>
-              <a:ext cx="2139986" cy="711410"/>
-            </a:xfrm>
-            <a:prstGeom prst="rect">
-              <a:avLst/>
-            </a:prstGeom>
-          </p:spPr>
-          <p:txBody>
-            <a:bodyPr anchor="ctr" rtlCol="false" tIns="50800" lIns="50800" bIns="50800" rIns="50800"/>
-            <a:lstStyle/>
-            <a:p>
-              <a:pPr algn="ctr" marL="0" indent="0" lvl="0">
-                <a:lnSpc>
-                  <a:spcPts val="2659"/>
-                </a:lnSpc>
-              </a:pPr>
-            </a:p>
-          </p:txBody>
-        </p:sp>
-      </p:grpSp>
-      <p:sp>
-        <p:nvSpPr>
-          <p:cNvPr name="TextBox 17" id="17"/>
-          <p:cNvSpPr txBox="true"/>
-          <p:nvPr/>
-        </p:nvSpPr>
-        <p:spPr>
-          <a:xfrm rot="0">
-            <a:off x="1885050" y="6733500"/>
-            <a:ext cx="7431406" cy="1564004"/>
-          </a:xfrm>
-          <a:prstGeom prst="rect">
-            <a:avLst/>
-          </a:prstGeom>
-        </p:spPr>
-        <p:txBody>
-          <a:bodyPr anchor="t" rtlCol="false" tIns="0" lIns="0" bIns="0" rIns="0">
-            <a:spAutoFit/>
-          </a:bodyPr>
-          <a:lstStyle/>
-          <a:p>
-            <a:pPr algn="l" marL="0" indent="0" lvl="0">
-              <a:lnSpc>
-                <a:spcPts val="2520"/>
-              </a:lnSpc>
-            </a:pPr>
-            <a:r>
-              <a:rPr lang="en-US" sz="1800">
-                <a:solidFill>
-                  <a:srgbClr val="000000"/>
-                </a:solidFill>
-                <a:latin typeface="Open Sauce"/>
-                <a:ea typeface="Open Sauce"/>
-                <a:cs typeface="Open Sauce"/>
-                <a:sym typeface="Open Sauce"/>
-              </a:rPr>
-              <a:t>NoSQL databases such as MongoDB and Cassandra have seen rapid adoption for handling unstructured user data. They offer horizontal scalability and flexible schemas, making them ideal for storing user-generated content, session data, real-time analytics, and large-scale document storage.</a:t>
-            </a:r>
-          </a:p>
-        </p:txBody>
-      </p:sp>
-      <p:grpSp>
-        <p:nvGrpSpPr>
-          <p:cNvPr name="Group 18" id="18"/>
-          <p:cNvGrpSpPr/>
-          <p:nvPr/>
-        </p:nvGrpSpPr>
-        <p:grpSpPr>
-          <a:xfrm rot="0">
-            <a:off x="-1086669" y="6262692"/>
-            <a:ext cx="1673561" cy="1673561"/>
-            <a:chOff x="0" y="0"/>
-            <a:chExt cx="812800" cy="812800"/>
-          </a:xfrm>
-        </p:grpSpPr>
-        <p:sp>
-          <p:nvSpPr>
-            <p:cNvPr name="Freeform 19" id="19"/>
-            <p:cNvSpPr/>
-            <p:nvPr/>
-          </p:nvSpPr>
-          <p:spPr>
-            <a:xfrm flipH="false" flipV="false" rot="0">
-              <a:off x="0" y="0"/>
-              <a:ext cx="812800" cy="812800"/>
-            </a:xfrm>
-            <a:custGeom>
-              <a:avLst/>
-              <a:gdLst/>
-              <a:ahLst/>
-              <a:cxnLst/>
-              <a:rect r="r" b="b" t="t" l="l"/>
-              <a:pathLst>
-                <a:path h="812800" w="812800">
-                  <a:moveTo>
-                    <a:pt x="406400" y="0"/>
-                  </a:moveTo>
-                  <a:cubicBezTo>
-                    <a:pt x="181951" y="0"/>
-                    <a:pt x="0" y="181951"/>
-                    <a:pt x="0" y="406400"/>
-                  </a:cubicBezTo>
-                  <a:cubicBezTo>
-                    <a:pt x="0" y="630849"/>
-                    <a:pt x="181951" y="812800"/>
-                    <a:pt x="406400" y="812800"/>
-                  </a:cubicBezTo>
-                  <a:cubicBezTo>
-                    <a:pt x="630849" y="812800"/>
-                    <a:pt x="812800" y="630849"/>
-                    <a:pt x="812800" y="406400"/>
-                  </a:cubicBezTo>
-                  <a:cubicBezTo>
-                    <a:pt x="812800" y="181951"/>
-                    <a:pt x="630849" y="0"/>
-                    <a:pt x="406400" y="0"/>
-                  </a:cubicBezTo>
-                  <a:close/>
-                </a:path>
-              </a:pathLst>
-            </a:custGeom>
-            <a:gradFill rotWithShape="true">
-              <a:gsLst>
-                <a:gs pos="0">
-                  <a:srgbClr val="3972F0">
-                    <a:alpha val="100000"/>
-                  </a:srgbClr>
-                </a:gs>
-                <a:gs pos="100000">
-                  <a:srgbClr val="1CDAFF">
-                    <a:alpha val="100000"/>
-                  </a:srgbClr>
-                </a:gs>
-              </a:gsLst>
-              <a:lin ang="5400000"/>
-            </a:gradFill>
-          </p:spPr>
-        </p:sp>
-        <p:sp>
-          <p:nvSpPr>
-            <p:cNvPr name="TextBox 20" id="20"/>
-            <p:cNvSpPr txBox="true"/>
-            <p:nvPr/>
-          </p:nvSpPr>
-          <p:spPr>
-            <a:xfrm>
-              <a:off x="76200" y="38100"/>
-              <a:ext cx="660400" cy="698500"/>
-            </a:xfrm>
-            <a:prstGeom prst="rect">
-              <a:avLst/>
-            </a:prstGeom>
-          </p:spPr>
-          <p:txBody>
-            <a:bodyPr anchor="ctr" rtlCol="false" tIns="50800" lIns="50800" bIns="50800" rIns="50800"/>
-            <a:lstStyle/>
-            <a:p>
-              <a:pPr algn="ctr" marL="0" indent="0" lvl="0">
-                <a:lnSpc>
-                  <a:spcPts val="2659"/>
-                </a:lnSpc>
-                <a:spcBef>
-                  <a:spcPct val="0"/>
-                </a:spcBef>
-              </a:pPr>
-            </a:p>
-          </p:txBody>
-        </p:sp>
-      </p:grpSp>
-      <p:sp>
-        <p:nvSpPr>
-          <p:cNvPr name="Freeform 21" id="21"/>
+      <p:sp>
+        <p:nvSpPr>
+          <p:cNvPr id="2" name="Freeform 2"/>
           <p:cNvSpPr/>
           <p:nvPr/>
         </p:nvSpPr>
         <p:spPr>
-          <a:xfrm flipH="false" flipV="false" rot="0">
-            <a:off x="17020776" y="528088"/>
-            <a:ext cx="1766866" cy="969568"/>
+          <a:xfrm>
+            <a:off x="-4764998" y="5511876"/>
+            <a:ext cx="9529995" cy="9529995"/>
           </a:xfrm>
           <a:custGeom>
             <a:avLst/>
             <a:gdLst/>
             <a:ahLst/>
             <a:cxnLst/>
-            <a:rect r="r" b="b" t="t" l="l"/>
+            <a:rect l="l" t="t" r="r" b="b"/>
             <a:pathLst>
-              <a:path h="969568" w="1766866">
-                <a:moveTo>
-                  <a:pt x="0" y="0"/>
-                </a:moveTo>
-                <a:lnTo>
-                  <a:pt x="1766866" y="0"/>
-                </a:lnTo>
-                <a:lnTo>
-                  <a:pt x="1766866" y="969568"/>
-                </a:lnTo>
-                <a:lnTo>
-                  <a:pt x="0" y="969568"/>
-                </a:lnTo>
-                <a:lnTo>
-                  <a:pt x="0" y="0"/>
-                </a:lnTo>
-                <a:close/>
-              </a:path>
-            </a:pathLst>
-          </a:custGeom>
-          <a:blipFill>
-            <a:blip r:embed="rId3">
-              <a:extLst>
-                <a:ext uri="{96DAC541-7B7A-43D3-8B79-37D633B846F1}">
-                  <asvg:svgBlip xmlns:asvg="http://schemas.microsoft.com/office/drawing/2016/SVG/main" r:embed="rId4"/>
-                </a:ext>
-              </a:extLst>
-            </a:blip>
-            <a:stretch>
-              <a:fillRect l="0" t="0" r="0" b="0"/>
-            </a:stretch>
-          </a:blipFill>
-        </p:spPr>
-      </p:sp>
-      <p:grpSp>
-        <p:nvGrpSpPr>
-          <p:cNvPr name="Group 22" id="22"/>
-          <p:cNvGrpSpPr/>
-          <p:nvPr/>
-        </p:nvGrpSpPr>
-        <p:grpSpPr>
-          <a:xfrm rot="0">
-            <a:off x="0" y="9828123"/>
-            <a:ext cx="18288000" cy="12844173"/>
-            <a:chOff x="0" y="0"/>
-            <a:chExt cx="4816593" cy="3382827"/>
-          </a:xfrm>
-        </p:grpSpPr>
-        <p:sp>
-          <p:nvSpPr>
-            <p:cNvPr name="Freeform 23" id="23"/>
-            <p:cNvSpPr/>
-            <p:nvPr/>
-          </p:nvSpPr>
-          <p:spPr>
-            <a:xfrm flipH="false" flipV="false" rot="0">
-              <a:off x="0" y="0"/>
-              <a:ext cx="4816592" cy="3382827"/>
-            </a:xfrm>
-            <a:custGeom>
-              <a:avLst/>
-              <a:gdLst/>
-              <a:ahLst/>
-              <a:cxnLst/>
-              <a:rect r="r" b="b" t="t" l="l"/>
-              <a:pathLst>
-                <a:path h="3382827" w="4816592">
-                  <a:moveTo>
-                    <a:pt x="21590" y="0"/>
-                  </a:moveTo>
-                  <a:lnTo>
-                    <a:pt x="4795002" y="0"/>
-                  </a:lnTo>
-                  <a:cubicBezTo>
-                    <a:pt x="4800728" y="0"/>
-                    <a:pt x="4806220" y="2275"/>
-                    <a:pt x="4810269" y="6324"/>
-                  </a:cubicBezTo>
-                  <a:cubicBezTo>
-                    <a:pt x="4814318" y="10372"/>
-                    <a:pt x="4816592" y="15864"/>
-                    <a:pt x="4816592" y="21590"/>
-                  </a:cubicBezTo>
-                  <a:lnTo>
-                    <a:pt x="4816592" y="3361237"/>
-                  </a:lnTo>
-                  <a:cubicBezTo>
-                    <a:pt x="4816592" y="3366963"/>
-                    <a:pt x="4814318" y="3372455"/>
-                    <a:pt x="4810269" y="3376504"/>
-                  </a:cubicBezTo>
-                  <a:cubicBezTo>
-                    <a:pt x="4806220" y="3380553"/>
-                    <a:pt x="4800728" y="3382827"/>
-                    <a:pt x="4795002" y="3382827"/>
-                  </a:cubicBezTo>
-                  <a:lnTo>
-                    <a:pt x="21590" y="3382827"/>
-                  </a:lnTo>
-                  <a:cubicBezTo>
-                    <a:pt x="9666" y="3382827"/>
-                    <a:pt x="0" y="3373161"/>
-                    <a:pt x="0" y="3361237"/>
-                  </a:cubicBezTo>
-                  <a:lnTo>
-                    <a:pt x="0" y="21590"/>
-                  </a:lnTo>
-                  <a:cubicBezTo>
-                    <a:pt x="0" y="9666"/>
-                    <a:pt x="9666" y="0"/>
-                    <a:pt x="21590" y="0"/>
-                  </a:cubicBezTo>
-                  <a:close/>
-                </a:path>
-              </a:pathLst>
-            </a:custGeom>
-            <a:solidFill>
-              <a:srgbClr val="3972F0"/>
-            </a:solidFill>
-          </p:spPr>
-        </p:sp>
-        <p:sp>
-          <p:nvSpPr>
-            <p:cNvPr name="TextBox 24" id="24"/>
-            <p:cNvSpPr txBox="true"/>
-            <p:nvPr/>
-          </p:nvSpPr>
-          <p:spPr>
-            <a:xfrm>
-              <a:off x="0" y="-38100"/>
-              <a:ext cx="4816593" cy="3420927"/>
-            </a:xfrm>
-            <a:prstGeom prst="rect">
-              <a:avLst/>
-            </a:prstGeom>
-          </p:spPr>
-          <p:txBody>
-            <a:bodyPr anchor="ctr" rtlCol="false" tIns="50800" lIns="50800" bIns="50800" rIns="50800"/>
-            <a:lstStyle/>
-            <a:p>
-              <a:pPr algn="ctr" marL="0" indent="0" lvl="0">
-                <a:lnSpc>
-                  <a:spcPts val="2659"/>
-                </a:lnSpc>
-              </a:pPr>
-            </a:p>
-          </p:txBody>
-        </p:sp>
-      </p:grpSp>
-      <p:sp>
-        <p:nvSpPr>
-          <p:cNvPr name="Freeform 25" id="25"/>
-          <p:cNvSpPr/>
-          <p:nvPr/>
-        </p:nvSpPr>
-        <p:spPr>
-          <a:xfrm flipH="false" flipV="false" rot="0">
-            <a:off x="366080" y="9171889"/>
-            <a:ext cx="1766866" cy="969568"/>
-          </a:xfrm>
-          <a:custGeom>
-            <a:avLst/>
-            <a:gdLst/>
-            <a:ahLst/>
-            <a:cxnLst/>
-            <a:rect r="r" b="b" t="t" l="l"/>
-            <a:pathLst>
-              <a:path h="969568" w="1766866">
-                <a:moveTo>
-                  <a:pt x="0" y="0"/>
-                </a:moveTo>
-                <a:lnTo>
-                  <a:pt x="1766866" y="0"/>
-                </a:lnTo>
-                <a:lnTo>
-                  <a:pt x="1766866" y="969568"/>
-                </a:lnTo>
-                <a:lnTo>
-                  <a:pt x="0" y="969568"/>
-                </a:lnTo>
-                <a:lnTo>
-                  <a:pt x="0" y="0"/>
-                </a:lnTo>
-                <a:close/>
-              </a:path>
-            </a:pathLst>
-          </a:custGeom>
-          <a:blipFill>
-            <a:blip r:embed="rId5">
-              <a:extLst>
-                <a:ext uri="{96DAC541-7B7A-43D3-8B79-37D633B846F1}">
-                  <asvg:svgBlip xmlns:asvg="http://schemas.microsoft.com/office/drawing/2016/SVG/main" r:embed="rId6"/>
-                </a:ext>
-              </a:extLst>
-            </a:blip>
-            <a:stretch>
-              <a:fillRect l="0" t="0" r="0" b="0"/>
-            </a:stretch>
-          </a:blipFill>
-        </p:spPr>
-      </p:sp>
-      <p:sp>
-        <p:nvSpPr>
-          <p:cNvPr name="Freeform 26" id="26"/>
-          <p:cNvSpPr/>
-          <p:nvPr/>
-        </p:nvSpPr>
-        <p:spPr>
-          <a:xfrm flipH="false" flipV="false" rot="2599173">
-            <a:off x="9269798" y="2375022"/>
-            <a:ext cx="516765" cy="521089"/>
-          </a:xfrm>
-          <a:custGeom>
-            <a:avLst/>
-            <a:gdLst/>
-            <a:ahLst/>
-            <a:cxnLst/>
-            <a:rect r="r" b="b" t="t" l="l"/>
-            <a:pathLst>
-              <a:path h="521089" w="516765">
-                <a:moveTo>
-                  <a:pt x="0" y="0"/>
-                </a:moveTo>
-                <a:lnTo>
-                  <a:pt x="516765" y="0"/>
-                </a:lnTo>
-                <a:lnTo>
-                  <a:pt x="516765" y="521089"/>
-                </a:lnTo>
-                <a:lnTo>
-                  <a:pt x="0" y="521089"/>
-                </a:lnTo>
-                <a:lnTo>
-                  <a:pt x="0" y="0"/>
-                </a:lnTo>
-                <a:close/>
-              </a:path>
-            </a:pathLst>
-          </a:custGeom>
-          <a:blipFill>
-            <a:blip r:embed="rId7"/>
-            <a:stretch>
-              <a:fillRect l="0" t="0" r="0" b="0"/>
-            </a:stretch>
-          </a:blipFill>
-        </p:spPr>
-      </p:sp>
-      <p:sp>
-        <p:nvSpPr>
-          <p:cNvPr name="Freeform 27" id="27"/>
-          <p:cNvSpPr/>
-          <p:nvPr/>
-        </p:nvSpPr>
-        <p:spPr>
-          <a:xfrm flipH="false" flipV="false" rot="2599173">
-            <a:off x="424886" y="6042191"/>
-            <a:ext cx="326694" cy="301171"/>
-          </a:xfrm>
-          <a:custGeom>
-            <a:avLst/>
-            <a:gdLst/>
-            <a:ahLst/>
-            <a:cxnLst/>
-            <a:rect r="r" b="b" t="t" l="l"/>
-            <a:pathLst>
-              <a:path h="301171" w="326694">
-                <a:moveTo>
-                  <a:pt x="0" y="0"/>
-                </a:moveTo>
-                <a:lnTo>
-                  <a:pt x="326693" y="0"/>
-                </a:lnTo>
-                <a:lnTo>
-                  <a:pt x="326693" y="301171"/>
-                </a:lnTo>
-                <a:lnTo>
-                  <a:pt x="0" y="301171"/>
-                </a:lnTo>
-                <a:lnTo>
-                  <a:pt x="0" y="0"/>
-                </a:lnTo>
-                <a:close/>
-              </a:path>
-            </a:pathLst>
-          </a:custGeom>
-          <a:blipFill>
-            <a:blip r:embed="rId8">
-              <a:extLst>
-                <a:ext uri="{96DAC541-7B7A-43D3-8B79-37D633B846F1}">
-                  <asvg:svgBlip xmlns:asvg="http://schemas.microsoft.com/office/drawing/2016/SVG/main" r:embed="rId9"/>
-                </a:ext>
-              </a:extLst>
-            </a:blip>
-            <a:stretch>
-              <a:fillRect l="-31484" t="-39236" r="-39297" b="-46019"/>
-            </a:stretch>
-          </a:blipFill>
-        </p:spPr>
-      </p:sp>
-    </p:spTree>
-  </p:cSld>
-  <p:clrMapOvr>
-    <a:masterClrMapping/>
-  </p:clrMapOvr>
-</p:sld>
-</file>
-
-<file path=ppt/slides/slide5.xml><?xml version="1.0" encoding="utf-8"?>
-<p:sld xmlns:p="http://schemas.openxmlformats.org/presentationml/2006/main" xmlns:a="http://schemas.openxmlformats.org/drawingml/2006/main" xmlns:r="http://schemas.openxmlformats.org/officeDocument/2006/relationships">
-  <p:cSld>
-    <p:spTree>
-      <p:nvGrpSpPr>
-        <p:cNvPr id="1" name=""/>
-        <p:cNvGrpSpPr/>
-        <p:nvPr/>
-      </p:nvGrpSpPr>
-      <p:grpSpPr>
-        <a:xfrm>
-          <a:off x="0" y="0"/>
-          <a:ext cx="0" cy="0"/>
-          <a:chOff x="0" y="0"/>
-          <a:chExt cx="0" cy="0"/>
-        </a:xfrm>
-      </p:grpSpPr>
-      <p:sp>
-        <p:nvSpPr>
-          <p:cNvPr name="Freeform 2" id="2"/>
-          <p:cNvSpPr/>
-          <p:nvPr/>
-        </p:nvSpPr>
-        <p:spPr>
-          <a:xfrm flipH="false" flipV="false" rot="0">
-            <a:off x="-4764998" y="5511876"/>
-            <a:ext cx="9529995" cy="9529995"/>
-          </a:xfrm>
-          <a:custGeom>
-            <a:avLst/>
-            <a:gdLst/>
-            <a:ahLst/>
-            <a:cxnLst/>
-            <a:rect r="r" b="b" t="t" l="l"/>
-            <a:pathLst>
-              <a:path h="9529995" w="9529995">
+              <a:path w="9529995" h="9529995">
                 <a:moveTo>
                   <a:pt x="0" y="0"/>
                 </a:moveTo>
@@ -8935,19 +5655,19 @@
               </a:extLst>
             </a:blip>
             <a:stretch>
-              <a:fillRect l="0" t="0" r="0" b="0"/>
+              <a:fillRect/>
             </a:stretch>
           </a:blipFill>
         </p:spPr>
       </p:sp>
       <p:sp>
         <p:nvSpPr>
-          <p:cNvPr name="Freeform 3" id="3"/>
+          <p:cNvPr id="3" name="Freeform 3"/>
           <p:cNvSpPr/>
           <p:nvPr/>
         </p:nvSpPr>
         <p:spPr>
-          <a:xfrm flipH="false" flipV="false" rot="0">
+          <a:xfrm>
             <a:off x="6094119" y="-7263081"/>
             <a:ext cx="9529995" cy="9529995"/>
           </a:xfrm>
@@ -8956,9 +5676,9 @@
             <a:gdLst/>
             <a:ahLst/>
             <a:cxnLst/>
-            <a:rect r="r" b="b" t="t" l="l"/>
+            <a:rect l="l" t="t" r="r" b="b"/>
             <a:pathLst>
-              <a:path h="9529995" w="9529995">
+              <a:path w="9529995" h="9529995">
                 <a:moveTo>
                   <a:pt x="0" y="0"/>
                 </a:moveTo>
@@ -8988,19 +5708,19 @@
               </a:extLst>
             </a:blip>
             <a:stretch>
-              <a:fillRect l="0" t="0" r="0" b="0"/>
+              <a:fillRect/>
             </a:stretch>
           </a:blipFill>
         </p:spPr>
       </p:sp>
       <p:sp>
         <p:nvSpPr>
-          <p:cNvPr name="Freeform 4" id="4"/>
+          <p:cNvPr id="4" name="Freeform 4"/>
           <p:cNvSpPr/>
           <p:nvPr/>
         </p:nvSpPr>
         <p:spPr>
-          <a:xfrm flipH="false" flipV="false" rot="0">
+          <a:xfrm>
             <a:off x="-168881" y="2131123"/>
             <a:ext cx="1766866" cy="969568"/>
           </a:xfrm>
@@ -9009,9 +5729,9 @@
             <a:gdLst/>
             <a:ahLst/>
             <a:cxnLst/>
-            <a:rect r="r" b="b" t="t" l="l"/>
+            <a:rect l="l" t="t" r="r" b="b"/>
             <a:pathLst>
-              <a:path h="969568" w="1766866">
+              <a:path w="1766866" h="969568">
                 <a:moveTo>
                   <a:pt x="0" y="0"/>
                 </a:moveTo>
@@ -9040,19 +5760,19 @@
               </a:extLst>
             </a:blip>
             <a:stretch>
-              <a:fillRect l="0" t="0" r="0" b="0"/>
+              <a:fillRect/>
             </a:stretch>
           </a:blipFill>
         </p:spPr>
       </p:sp>
       <p:sp>
         <p:nvSpPr>
-          <p:cNvPr name="Freeform 5" id="5"/>
+          <p:cNvPr id="5" name="Freeform 5"/>
           <p:cNvSpPr/>
           <p:nvPr/>
         </p:nvSpPr>
         <p:spPr>
-          <a:xfrm flipH="false" flipV="false" rot="0">
+          <a:xfrm>
             <a:off x="16937137" y="3637312"/>
             <a:ext cx="1766866" cy="969568"/>
           </a:xfrm>
@@ -9061,9 +5781,9 @@
             <a:gdLst/>
             <a:ahLst/>
             <a:cxnLst/>
-            <a:rect r="r" b="b" t="t" l="l"/>
+            <a:rect l="l" t="t" r="r" b="b"/>
             <a:pathLst>
-              <a:path h="969568" w="1766866">
+              <a:path w="1766866" h="969568">
                 <a:moveTo>
                   <a:pt x="0" y="0"/>
                 </a:moveTo>
@@ -9092,19 +5812,19 @@
               </a:extLst>
             </a:blip>
             <a:stretch>
-              <a:fillRect l="0" t="0" r="0" b="0"/>
+              <a:fillRect/>
             </a:stretch>
           </a:blipFill>
         </p:spPr>
       </p:sp>
       <p:sp>
         <p:nvSpPr>
-          <p:cNvPr name="Freeform 6" id="6"/>
+          <p:cNvPr id="6" name="Freeform 6"/>
           <p:cNvSpPr/>
           <p:nvPr/>
         </p:nvSpPr>
         <p:spPr>
-          <a:xfrm flipH="false" flipV="false" rot="0">
+          <a:xfrm>
             <a:off x="1361670" y="643132"/>
             <a:ext cx="8389996" cy="5988360"/>
           </a:xfrm>
@@ -9113,9 +5833,9 @@
             <a:gdLst/>
             <a:ahLst/>
             <a:cxnLst/>
-            <a:rect r="r" b="b" t="t" l="l"/>
+            <a:rect l="l" t="t" r="r" b="b"/>
             <a:pathLst>
-              <a:path h="5988360" w="8389996">
+              <a:path w="8389996" h="5988360">
                 <a:moveTo>
                   <a:pt x="0" y="0"/>
                 </a:moveTo>
@@ -9138,19 +5858,19 @@
           <a:blipFill>
             <a:blip r:embed="rId6"/>
             <a:stretch>
-              <a:fillRect l="0" t="0" r="0" b="0"/>
+              <a:fillRect/>
             </a:stretch>
           </a:blipFill>
         </p:spPr>
       </p:sp>
       <p:sp>
         <p:nvSpPr>
-          <p:cNvPr name="Freeform 7" id="7"/>
+          <p:cNvPr id="7" name="Freeform 7"/>
           <p:cNvSpPr/>
           <p:nvPr/>
         </p:nvSpPr>
         <p:spPr>
-          <a:xfrm flipH="false" flipV="false" rot="0">
+          <a:xfrm>
             <a:off x="254220" y="6880257"/>
             <a:ext cx="10604897" cy="2924176"/>
           </a:xfrm>
@@ -9159,9 +5879,9 @@
             <a:gdLst/>
             <a:ahLst/>
             <a:cxnLst/>
-            <a:rect r="r" b="b" t="t" l="l"/>
+            <a:rect l="l" t="t" r="r" b="b"/>
             <a:pathLst>
-              <a:path h="2924176" w="10604897">
+              <a:path w="10604897" h="2924176">
                 <a:moveTo>
                   <a:pt x="0" y="0"/>
                 </a:moveTo>
@@ -9184,19 +5904,19 @@
           <a:blipFill>
             <a:blip r:embed="rId7"/>
             <a:stretch>
-              <a:fillRect l="-268" t="0" r="0" b="0"/>
+              <a:fillRect l="-268"/>
             </a:stretch>
           </a:blipFill>
         </p:spPr>
       </p:sp>
       <p:sp>
         <p:nvSpPr>
-          <p:cNvPr name="Freeform 8" id="8"/>
+          <p:cNvPr id="8" name="Freeform 8"/>
           <p:cNvSpPr/>
           <p:nvPr/>
         </p:nvSpPr>
         <p:spPr>
-          <a:xfrm flipH="false" flipV="false" rot="0">
+          <a:xfrm>
             <a:off x="11281718" y="454243"/>
             <a:ext cx="5764439" cy="4323329"/>
           </a:xfrm>
@@ -9205,9 +5925,9 @@
             <a:gdLst/>
             <a:ahLst/>
             <a:cxnLst/>
-            <a:rect r="r" b="b" t="t" l="l"/>
+            <a:rect l="l" t="t" r="r" b="b"/>
             <a:pathLst>
-              <a:path h="4323329" w="5764439">
+              <a:path w="5764439" h="4323329">
                 <a:moveTo>
                   <a:pt x="0" y="0"/>
                 </a:moveTo>
@@ -9230,19 +5950,19 @@
           <a:blipFill>
             <a:blip r:embed="rId8"/>
             <a:stretch>
-              <a:fillRect l="0" t="0" r="0" b="0"/>
+              <a:fillRect/>
             </a:stretch>
           </a:blipFill>
         </p:spPr>
       </p:sp>
       <p:sp>
         <p:nvSpPr>
-          <p:cNvPr name="Freeform 9" id="9"/>
+          <p:cNvPr id="9" name="Freeform 9"/>
           <p:cNvSpPr/>
           <p:nvPr/>
         </p:nvSpPr>
         <p:spPr>
-          <a:xfrm flipH="false" flipV="false" rot="0">
+          <a:xfrm>
             <a:off x="11062646" y="5135780"/>
             <a:ext cx="6202583" cy="3488953"/>
           </a:xfrm>
@@ -9251,9 +5971,9 @@
             <a:gdLst/>
             <a:ahLst/>
             <a:cxnLst/>
-            <a:rect r="r" b="b" t="t" l="l"/>
+            <a:rect l="l" t="t" r="r" b="b"/>
             <a:pathLst>
-              <a:path h="3488953" w="6202583">
+              <a:path w="6202583" h="3488953">
                 <a:moveTo>
                   <a:pt x="0" y="0"/>
                 </a:moveTo>
@@ -9276,12 +5996,187 @@
           <a:blipFill>
             <a:blip r:embed="rId9"/>
             <a:stretch>
-              <a:fillRect l="0" t="0" r="0" b="0"/>
+              <a:fillRect/>
             </a:stretch>
           </a:blipFill>
         </p:spPr>
       </p:sp>
     </p:spTree>
+  </p:cSld>
+  <p:clrMapOvr>
+    <a:masterClrMapping/>
+  </p:clrMapOvr>
+</p:sld>
+</file>
+
+<file path=ppt/slides/slide5.xml><?xml version="1.0" encoding="utf-8"?>
+<p:sld xmlns:a="http://schemas.openxmlformats.org/drawingml/2006/main" xmlns:r="http://schemas.openxmlformats.org/officeDocument/2006/relationships" xmlns:p="http://schemas.openxmlformats.org/presentationml/2006/main">
+  <p:cSld>
+    <p:spTree>
+      <p:nvGrpSpPr>
+        <p:cNvPr id="1" name=""/>
+        <p:cNvGrpSpPr/>
+        <p:nvPr/>
+      </p:nvGrpSpPr>
+      <p:grpSpPr>
+        <a:xfrm>
+          <a:off x="0" y="0"/>
+          <a:ext cx="0" cy="0"/>
+          <a:chOff x="0" y="0"/>
+          <a:chExt cx="0" cy="0"/>
+        </a:xfrm>
+      </p:grpSpPr>
+      <p:pic>
+        <p:nvPicPr>
+          <p:cNvPr id="1026" name="Picture 2" descr="SQL Server find users connected to databases – Jim Salasek's SQL Server Blog">
+            <a:extLst>
+              <a:ext uri="{FF2B5EF4-FFF2-40B4-BE49-F238E27FC236}">
+                <a16:creationId xmlns:a16="http://schemas.microsoft.com/office/drawing/2014/main" id="{71E6E40B-D68E-4575-8AF4-F8F149ADF072}"/>
+              </a:ext>
+            </a:extLst>
+          </p:cNvPr>
+          <p:cNvPicPr>
+            <a:picLocks noChangeAspect="1" noChangeArrowheads="1"/>
+          </p:cNvPicPr>
+          <p:nvPr/>
+        </p:nvPicPr>
+        <p:blipFill>
+          <a:blip r:embed="rId2">
+            <a:extLst>
+              <a:ext uri="{28A0092B-C50C-407E-A947-70E740481C1C}">
+                <a14:useLocalDpi xmlns:a14="http://schemas.microsoft.com/office/drawing/2010/main" val="0"/>
+              </a:ext>
+            </a:extLst>
+          </a:blip>
+          <a:srcRect/>
+          <a:stretch>
+            <a:fillRect/>
+          </a:stretch>
+        </p:blipFill>
+        <p:spPr bwMode="auto">
+          <a:xfrm>
+            <a:off x="1371600" y="4000500"/>
+            <a:ext cx="6286500" cy="4676775"/>
+          </a:xfrm>
+          <a:prstGeom prst="rect">
+            <a:avLst/>
+          </a:prstGeom>
+          <a:noFill/>
+          <a:extLst>
+            <a:ext uri="{909E8E84-426E-40DD-AFC4-6F175D3DCCD1}">
+              <a14:hiddenFill xmlns:a14="http://schemas.microsoft.com/office/drawing/2010/main">
+                <a:solidFill>
+                  <a:srgbClr val="FFFFFF"/>
+                </a:solidFill>
+              </a14:hiddenFill>
+            </a:ext>
+          </a:extLst>
+        </p:spPr>
+      </p:pic>
+      <p:pic>
+        <p:nvPicPr>
+          <p:cNvPr id="1028" name="Picture 4" descr="SQL Processing in web application architecture | Download Scientific Diagram">
+            <a:extLst>
+              <a:ext uri="{FF2B5EF4-FFF2-40B4-BE49-F238E27FC236}">
+                <a16:creationId xmlns:a16="http://schemas.microsoft.com/office/drawing/2014/main" id="{0F297C41-8E0A-4C23-AB55-0275B0835BDD}"/>
+              </a:ext>
+            </a:extLst>
+          </p:cNvPr>
+          <p:cNvPicPr>
+            <a:picLocks noChangeAspect="1" noChangeArrowheads="1"/>
+          </p:cNvPicPr>
+          <p:nvPr/>
+        </p:nvPicPr>
+        <p:blipFill>
+          <a:blip r:embed="rId3">
+            <a:extLst>
+              <a:ext uri="{28A0092B-C50C-407E-A947-70E740481C1C}">
+                <a14:useLocalDpi xmlns:a14="http://schemas.microsoft.com/office/drawing/2010/main" val="0"/>
+              </a:ext>
+            </a:extLst>
+          </a:blip>
+          <a:srcRect/>
+          <a:stretch>
+            <a:fillRect/>
+          </a:stretch>
+        </p:blipFill>
+        <p:spPr bwMode="auto">
+          <a:xfrm>
+            <a:off x="8534400" y="4457700"/>
+            <a:ext cx="8096250" cy="4552950"/>
+          </a:xfrm>
+          <a:prstGeom prst="rect">
+            <a:avLst/>
+          </a:prstGeom>
+          <a:noFill/>
+          <a:extLst>
+            <a:ext uri="{909E8E84-426E-40DD-AFC4-6F175D3DCCD1}">
+              <a14:hiddenFill xmlns:a14="http://schemas.microsoft.com/office/drawing/2010/main">
+                <a:solidFill>
+                  <a:srgbClr val="FFFFFF"/>
+                </a:solidFill>
+              </a14:hiddenFill>
+            </a:ext>
+          </a:extLst>
+        </p:spPr>
+      </p:pic>
+      <p:sp>
+        <p:nvSpPr>
+          <p:cNvPr id="2" name="CaixaDeTexto 1">
+            <a:extLst>
+              <a:ext uri="{FF2B5EF4-FFF2-40B4-BE49-F238E27FC236}">
+                <a16:creationId xmlns:a16="http://schemas.microsoft.com/office/drawing/2014/main" id="{8F62E445-1F9E-4AF3-9C2B-9D67028CCEE3}"/>
+              </a:ext>
+            </a:extLst>
+          </p:cNvPr>
+          <p:cNvSpPr txBox="1"/>
+          <p:nvPr/>
+        </p:nvSpPr>
+        <p:spPr>
+          <a:xfrm>
+            <a:off x="1371600" y="419100"/>
+            <a:ext cx="10058400" cy="2923877"/>
+          </a:xfrm>
+          <a:prstGeom prst="rect">
+            <a:avLst/>
+          </a:prstGeom>
+          <a:noFill/>
+        </p:spPr>
+        <p:txBody>
+          <a:bodyPr wrap="square" rtlCol="0">
+            <a:spAutoFit/>
+          </a:bodyPr>
+          <a:lstStyle/>
+          <a:p>
+            <a:r>
+              <a:rPr lang="pt-BR" sz="9200" dirty="0">
+                <a:solidFill>
+                  <a:schemeClr val="accent1"/>
+                </a:solidFill>
+              </a:rPr>
+              <a:t>SQL</a:t>
+            </a:r>
+            <a:r>
+              <a:rPr lang="pt-BR" dirty="0"/>
+              <a:t> </a:t>
+            </a:r>
+          </a:p>
+          <a:p>
+            <a:r>
+              <a:rPr lang="pt-BR" sz="9200" dirty="0">
+                <a:latin typeface="Open Sauce" panose="020B0604020202020204" charset="0"/>
+              </a:rPr>
+              <a:t>DATABASE</a:t>
+            </a:r>
+          </a:p>
+        </p:txBody>
+      </p:sp>
+    </p:spTree>
+    <p:extLst>
+      <p:ext uri="{BB962C8B-B14F-4D97-AF65-F5344CB8AC3E}">
+        <p14:creationId xmlns:p14="http://schemas.microsoft.com/office/powerpoint/2010/main" val="678281753"/>
+      </p:ext>
+    </p:extLst>
   </p:cSld>
   <p:clrMapOvr>
     <a:masterClrMapping/>
